--- a/slides/Week3-Mon-User-Testing-I.pptx
+++ b/slides/Week3-Mon-User-Testing-I.pptx
@@ -11,6 +11,7 @@
     <p:sldId id="259" r:id="rId10"/>
     <p:sldId id="260" r:id="rId12"/>
     <p:sldId id="261" r:id="rId13"/>
+    <p:sldId id="262" r:id="rId14"/>
   </p:sldIdLst>
   <p:sldSz cx="12191695" cy="6858000" type="screen4x3"/>
   <p:notesSz cx="6858000" cy="9144000"/>
@@ -577,7 +578,77 @@
           <a:lstStyle/>
           <a:p>
             <a:r>
-              <a:t>Repo 7_27 peer-testing. Bring your findings to Tuesday's values test.</a:t>
+              <a:t>Ties the aesthetics thread from Week 1 Tuesday (AI-slop / impeccable.style) into usability testing. Detector: https://impeccable.style/slop/</a:t>
+            </a:r>
+          </a:p>
+        </p:txBody>
+      </p:sp>
+      <p:sp>
+        <p:nvSpPr>
+          <p:cNvPr id="4" name="Slide Number Placeholder 3"/>
+          <p:cNvSpPr>
+            <a:spLocks noGrp="1"/>
+          </p:cNvSpPr>
+          <p:nvPr>
+            <p:ph type="sldNum" idx="5" sz="quarter"/>
+          </p:nvPr>
+        </p:nvSpPr>
+        <p:spPr/>
+      </p:sp>
+    </p:spTree>
+  </p:cSld>
+  <p:clrMapOvr>
+    <a:masterClrMapping/>
+  </p:clrMapOvr>
+</p:notes>
+</file>
+
+<file path=ppt/notesSlides/notesSlide3.xml><?xml version="1.0" encoding="utf-8"?>
+<p:notes xmlns:a="http://schemas.openxmlformats.org/drawingml/2006/main" xmlns:p="http://schemas.openxmlformats.org/presentationml/2006/main" xmlns:r="http://schemas.openxmlformats.org/officeDocument/2006/relationships">
+  <p:cSld>
+    <p:spTree>
+      <p:nvGrpSpPr>
+        <p:cNvPr id="1" name=""/>
+        <p:cNvGrpSpPr/>
+        <p:nvPr/>
+      </p:nvGrpSpPr>
+      <p:grpSpPr>
+        <a:xfrm>
+          <a:off x="0" y="0"/>
+          <a:ext cx="0" cy="0"/>
+          <a:chOff x="0" y="0"/>
+          <a:chExt cx="0" cy="0"/>
+        </a:xfrm>
+      </p:grpSpPr>
+      <p:sp>
+        <p:nvSpPr>
+          <p:cNvPr id="2" name="Slide Image Placeholder 1"/>
+          <p:cNvSpPr>
+            <a:spLocks noGrp="1"/>
+          </p:cNvSpPr>
+          <p:nvPr>
+            <p:ph type="sldImg" idx="2"/>
+          </p:nvPr>
+        </p:nvSpPr>
+        <p:spPr/>
+      </p:sp>
+      <p:sp>
+        <p:nvSpPr>
+          <p:cNvPr id="3" name="Notes Placeholder 2"/>
+          <p:cNvSpPr>
+            <a:spLocks noGrp="1"/>
+          </p:cNvSpPr>
+          <p:nvPr>
+            <p:ph type="body" idx="3" sz="quarter"/>
+          </p:nvPr>
+        </p:nvSpPr>
+        <p:spPr/>
+        <p:txBody>
+          <a:bodyPr/>
+          <a:lstStyle/>
+          <a:p>
+            <a:r>
+              <a:t>Repo 7_27 peer-testing. Bring your findings to Tuesday's values test. Include the slop-detector pass from the previous slide as an extra lens.</a:t>
             </a:r>
           </a:p>
         </p:txBody>
@@ -5196,6 +5267,380 @@
 </file>
 
 <file path=ppt/slides/slide6.xml><?xml version="1.0" encoding="utf-8"?>
+<p:sld xmlns:a="http://schemas.openxmlformats.org/drawingml/2006/main" xmlns:p="http://schemas.openxmlformats.org/presentationml/2006/main" xmlns:r="http://schemas.openxmlformats.org/officeDocument/2006/relationships">
+  <p:cSld>
+    <p:bg>
+      <p:bgPr>
+        <a:solidFill>
+          <a:srgbClr val="0B0E14"/>
+        </a:solidFill>
+        <a:effectLst/>
+      </p:bgPr>
+    </p:bg>
+    <p:spTree>
+      <p:nvGrpSpPr>
+        <p:cNvPr id="1" name=""/>
+        <p:cNvGrpSpPr/>
+        <p:nvPr/>
+      </p:nvGrpSpPr>
+      <p:grpSpPr/>
+      <p:sp>
+        <p:nvSpPr>
+          <p:cNvPr id="2" name="TextBox 1"/>
+          <p:cNvSpPr txBox="1"/>
+          <p:nvPr/>
+        </p:nvSpPr>
+        <p:spPr>
+          <a:xfrm>
+            <a:off x="640080" y="502920"/>
+            <a:ext cx="10058400" cy="365760"/>
+          </a:xfrm>
+          <a:prstGeom prst="rect">
+            <a:avLst/>
+          </a:prstGeom>
+          <a:noFill/>
+        </p:spPr>
+        <p:txBody>
+          <a:bodyPr wrap="square" anchor="t">
+            <a:spAutoFit/>
+          </a:bodyPr>
+          <a:lstStyle/>
+          <a:p>
+            <a:pPr algn="l">
+              <a:lnSpc>
+                <a:spcPct val="100000"/>
+              </a:lnSpc>
+            </a:pPr>
+            <a:r>
+              <a:rPr sz="1300" b="1">
+                <a:solidFill>
+                  <a:srgbClr val="00FF41"/>
+                </a:solidFill>
+                <a:latin typeface="Courier New"/>
+              </a:rPr>
+              <a:t>SLOP CHECK</a:t>
+            </a:r>
+          </a:p>
+        </p:txBody>
+      </p:sp>
+      <p:sp>
+        <p:nvSpPr>
+          <p:cNvPr id="3" name="Rectangle 2"/>
+          <p:cNvSpPr/>
+          <p:nvPr/>
+        </p:nvSpPr>
+        <p:spPr>
+          <a:xfrm>
+            <a:off x="640080" y="932688"/>
+            <a:ext cx="822960" cy="73152"/>
+          </a:xfrm>
+          <a:prstGeom prst="rect">
+            <a:avLst/>
+          </a:prstGeom>
+          <a:solidFill>
+            <a:srgbClr val="00FF41"/>
+          </a:solidFill>
+          <a:ln>
+            <a:noFill/>
+          </a:ln>
+          <a:effectLst/>
+        </p:spPr>
+        <p:style>
+          <a:lnRef idx="1">
+            <a:schemeClr val="accent1"/>
+          </a:lnRef>
+          <a:fillRef idx="3">
+            <a:schemeClr val="accent1"/>
+          </a:fillRef>
+          <a:effectRef idx="2">
+            <a:schemeClr val="accent1"/>
+          </a:effectRef>
+          <a:fontRef idx="minor">
+            <a:schemeClr val="lt1"/>
+          </a:fontRef>
+        </p:style>
+        <p:txBody>
+          <a:bodyPr rtlCol="0" anchor="ctr"/>
+          <a:lstStyle/>
+          <a:p>
+            <a:pPr algn="ctr"/>
+          </a:p>
+        </p:txBody>
+      </p:sp>
+      <p:sp>
+        <p:nvSpPr>
+          <p:cNvPr id="4" name="TextBox 3"/>
+          <p:cNvSpPr txBox="1"/>
+          <p:nvPr/>
+        </p:nvSpPr>
+        <p:spPr>
+          <a:xfrm>
+            <a:off x="640080" y="1188720"/>
+            <a:ext cx="10972800" cy="1097280"/>
+          </a:xfrm>
+          <a:prstGeom prst="rect">
+            <a:avLst/>
+          </a:prstGeom>
+          <a:noFill/>
+        </p:spPr>
+        <p:txBody>
+          <a:bodyPr wrap="square" anchor="t">
+            <a:spAutoFit/>
+          </a:bodyPr>
+          <a:lstStyle/>
+          <a:p>
+            <a:pPr algn="l">
+              <a:lnSpc>
+                <a:spcPct val="100000"/>
+              </a:lnSpc>
+            </a:pPr>
+            <a:r>
+              <a:rPr sz="3400" b="1">
+                <a:solidFill>
+                  <a:srgbClr val="F5F7FA"/>
+                </a:solidFill>
+                <a:latin typeface="Arial"/>
+              </a:rPr>
+              <a:t>Does it look AI-generated? Run the slop detector</a:t>
+            </a:r>
+          </a:p>
+        </p:txBody>
+      </p:sp>
+      <p:sp>
+        <p:nvSpPr>
+          <p:cNvPr id="5" name="TextBox 4"/>
+          <p:cNvSpPr txBox="1"/>
+          <p:nvPr/>
+        </p:nvSpPr>
+        <p:spPr>
+          <a:xfrm>
+            <a:off x="658368" y="2286000"/>
+            <a:ext cx="10881360" cy="3657600"/>
+          </a:xfrm>
+          <a:prstGeom prst="rect">
+            <a:avLst/>
+          </a:prstGeom>
+          <a:noFill/>
+        </p:spPr>
+        <p:txBody>
+          <a:bodyPr wrap="square" anchor="t">
+            <a:spAutoFit/>
+          </a:bodyPr>
+          <a:lstStyle/>
+          <a:p>
+            <a:pPr algn="l">
+              <a:lnSpc>
+                <a:spcPct val="112000"/>
+              </a:lnSpc>
+            </a:pPr>
+            <a:r>
+              <a:rPr sz="2000" b="1">
+                <a:solidFill>
+                  <a:srgbClr val="00FF41"/>
+                </a:solidFill>
+                <a:latin typeface="Arial"/>
+              </a:rPr>
+              <a:t>•  </a:t>
+            </a:r>
+            <a:r>
+              <a:rPr sz="2000" b="0">
+                <a:solidFill>
+                  <a:srgbClr val="F5F7FA"/>
+                </a:solidFill>
+                <a:latin typeface="Arial"/>
+              </a:rPr>
+              <a:t>impeccable.style/slop catalogs 46 deterministic patterns that mark an interface as AI-generated.</a:t>
+            </a:r>
+          </a:p>
+          <a:p>
+            <a:pPr algn="l">
+              <a:lnSpc>
+                <a:spcPct val="112000"/>
+              </a:lnSpc>
+            </a:pPr>
+            <a:r>
+              <a:rPr sz="2000" b="1">
+                <a:solidFill>
+                  <a:srgbClr val="00FF41"/>
+                </a:solidFill>
+                <a:latin typeface="Arial"/>
+              </a:rPr>
+              <a:t>•  </a:t>
+            </a:r>
+            <a:r>
+              <a:rPr sz="2000" b="0">
+                <a:solidFill>
+                  <a:srgbClr val="F5F7FA"/>
+                </a:solidFill>
+                <a:latin typeface="Arial"/>
+              </a:rPr>
+              <a:t>The tells: side-tab accent borders (“the most recognizable tell”), purple/violet gradients, gradient text, italic-serif display headlines, hero “pill chips”, dark mode with glowing accents…</a:t>
+            </a:r>
+          </a:p>
+          <a:p>
+            <a:pPr algn="l">
+              <a:lnSpc>
+                <a:spcPct val="112000"/>
+              </a:lnSpc>
+            </a:pPr>
+            <a:r>
+              <a:rPr sz="2000" b="1">
+                <a:solidFill>
+                  <a:srgbClr val="00FF41"/>
+                </a:solidFill>
+                <a:latin typeface="Arial"/>
+              </a:rPr>
+              <a:t>•  </a:t>
+            </a:r>
+            <a:r>
+              <a:rPr sz="2000" b="0">
+                <a:solidFill>
+                  <a:srgbClr val="F5F7FA"/>
+                </a:solidFill>
+                <a:latin typeface="Arial"/>
+              </a:rPr>
+              <a:t>Free Chrome extension overlays your live page — hover any outlined element to see which rule fired. CLI: npx impeccable detect &lt;url&gt;.</a:t>
+            </a:r>
+          </a:p>
+          <a:p>
+            <a:pPr algn="l">
+              <a:lnSpc>
+                <a:spcPct val="112000"/>
+              </a:lnSpc>
+            </a:pPr>
+            <a:r>
+              <a:rPr sz="2000" b="1">
+                <a:solidFill>
+                  <a:srgbClr val="00FF41"/>
+                </a:solidFill>
+                <a:latin typeface="Arial"/>
+              </a:rPr>
+              <a:t>•  </a:t>
+            </a:r>
+            <a:r>
+              <a:rPr sz="2000" b="0">
+                <a:solidFill>
+                  <a:srgbClr val="F5F7FA"/>
+                </a:solidFill>
+                <a:latin typeface="Arial"/>
+              </a:rPr>
+              <a:t>In today’s peer test: run it on the project you’re testing. Do the flagged tells overlap with where real users hesitated?</a:t>
+            </a:r>
+          </a:p>
+          <a:p>
+            <a:pPr algn="l">
+              <a:lnSpc>
+                <a:spcPct val="112000"/>
+              </a:lnSpc>
+            </a:pPr>
+            <a:r>
+              <a:rPr sz="2000" b="1">
+                <a:solidFill>
+                  <a:srgbClr val="00FF41"/>
+                </a:solidFill>
+                <a:latin typeface="Arial"/>
+              </a:rPr>
+              <a:t>•  </a:t>
+            </a:r>
+            <a:r>
+              <a:rPr sz="2000" b="0">
+                <a:solidFill>
+                  <a:srgbClr val="F5F7FA"/>
+                </a:solidFill>
+                <a:latin typeface="Arial"/>
+              </a:rPr>
+              <a:t>It grades taste, not truth — a flag is a question to ask, not a verdict. (Nielsen #8: aesthetic &amp; minimalist design.)</a:t>
+            </a:r>
+          </a:p>
+        </p:txBody>
+      </p:sp>
+      <p:sp>
+        <p:nvSpPr>
+          <p:cNvPr id="6" name="TextBox 5"/>
+          <p:cNvSpPr txBox="1"/>
+          <p:nvPr/>
+        </p:nvSpPr>
+        <p:spPr>
+          <a:xfrm>
+            <a:off x="640080" y="6355080"/>
+            <a:ext cx="10972800" cy="365760"/>
+          </a:xfrm>
+          <a:prstGeom prst="rect">
+            <a:avLst/>
+          </a:prstGeom>
+          <a:noFill/>
+        </p:spPr>
+        <p:txBody>
+          <a:bodyPr wrap="square" anchor="t">
+            <a:spAutoFit/>
+          </a:bodyPr>
+          <a:lstStyle/>
+          <a:p>
+            <a:pPr algn="l">
+              <a:lnSpc>
+                <a:spcPct val="100000"/>
+              </a:lnSpc>
+            </a:pPr>
+            <a:r>
+              <a:rPr sz="1000" b="0">
+                <a:solidFill>
+                  <a:srgbClr val="5A6474"/>
+                </a:solidFill>
+                <a:latin typeface="Courier New"/>
+              </a:rPr>
+              <a:t>Good Code, Good Vibes · TECHIE 1121 · Cornell Tech · Summer 2026</a:t>
+            </a:r>
+          </a:p>
+        </p:txBody>
+      </p:sp>
+      <p:sp>
+        <p:nvSpPr>
+          <p:cNvPr id="7" name="TextBox 6"/>
+          <p:cNvSpPr txBox="1"/>
+          <p:nvPr/>
+        </p:nvSpPr>
+        <p:spPr>
+          <a:xfrm>
+            <a:off x="640080" y="6053328"/>
+            <a:ext cx="10972800" cy="320040"/>
+          </a:xfrm>
+          <a:prstGeom prst="rect">
+            <a:avLst/>
+          </a:prstGeom>
+          <a:noFill/>
+        </p:spPr>
+        <p:txBody>
+          <a:bodyPr wrap="square" anchor="t">
+            <a:spAutoFit/>
+          </a:bodyPr>
+          <a:lstStyle/>
+          <a:p>
+            <a:pPr algn="l">
+              <a:lnSpc>
+                <a:spcPct val="100000"/>
+              </a:lnSpc>
+            </a:pPr>
+            <a:r>
+              <a:rPr sz="1050" b="0">
+                <a:solidFill>
+                  <a:srgbClr val="5A6474"/>
+                </a:solidFill>
+                <a:latin typeface="Courier New"/>
+              </a:rPr>
+              <a:t>Source: impeccable.style/slop — Paul Bakaus (free &amp; open source)</a:t>
+            </a:r>
+          </a:p>
+        </p:txBody>
+      </p:sp>
+    </p:spTree>
+  </p:cSld>
+  <p:clrMapOvr>
+    <a:masterClrMapping/>
+  </p:clrMapOvr>
+</p:sld>
+</file>
+
+<file path=ppt/slides/slide7.xml><?xml version="1.0" encoding="utf-8"?>
 <p:sld xmlns:a="http://schemas.openxmlformats.org/drawingml/2006/main" xmlns:p="http://schemas.openxmlformats.org/presentationml/2006/main" xmlns:r="http://schemas.openxmlformats.org/officeDocument/2006/relationships">
   <p:cSld>
     <p:bg>

--- a/slides/Week3-Mon-User-Testing-I.pptx
+++ b/slides/Week3-Mon-User-Testing-I.pptx
@@ -9,9 +9,17 @@
     <p:sldId id="257" r:id="rId8"/>
     <p:sldId id="258" r:id="rId9"/>
     <p:sldId id="259" r:id="rId10"/>
-    <p:sldId id="260" r:id="rId12"/>
+    <p:sldId id="260" r:id="rId11"/>
     <p:sldId id="261" r:id="rId13"/>
     <p:sldId id="262" r:id="rId14"/>
+    <p:sldId id="263" r:id="rId15"/>
+    <p:sldId id="264" r:id="rId16"/>
+    <p:sldId id="265" r:id="rId17"/>
+    <p:sldId id="266" r:id="rId18"/>
+    <p:sldId id="267" r:id="rId19"/>
+    <p:sldId id="268" r:id="rId20"/>
+    <p:sldId id="269" r:id="rId21"/>
+    <p:sldId id="270" r:id="rId22"/>
   </p:sldIdLst>
   <p:sldSz cx="12191695" cy="6858000" type="screen4x3"/>
   <p:notesSz cx="6858000" cy="9144000"/>
@@ -508,7 +516,7 @@
           <a:lstStyle/>
           <a:p>
             <a:r>
-              <a:t>Reading: Nielsen — 10 Usability Heuristics (NN/g). Use these as the lens for the peer test.</a:t>
+              <a:t>Play EH7Fx9rpC0c (a few minutes). Pause to point out the think-aloud, the neutral moderation, and one breakdown. Source: Shiri Azenkot, 'Running a Usability Study'.</a:t>
             </a:r>
           </a:p>
         </p:txBody>
@@ -578,7 +586,7 @@
           <a:lstStyle/>
           <a:p>
             <a:r>
-              <a:t>Ties the aesthetics thread from Week 1 Tuesday (AI-slop / impeccable.style) into usability testing. Detector: https://impeccable.style/slop/</a:t>
+              <a:t>Reading: Nielsen - 10 Usability Heuristics (NN/g). Use these as the lens for naming what broke.</a:t>
             </a:r>
           </a:p>
         </p:txBody>
@@ -648,7 +656,7 @@
           <a:lstStyle/>
           <a:p>
             <a:r>
-              <a:t>Repo 7_27 peer-testing. Bring your findings to Tuesday's values test. Include the slop-detector pass from the previous slide as an extra lens.</a:t>
+              <a:t>Individual work on the shared Project 2 prototype. Everyone submits their own video + write-up.</a:t>
             </a:r>
           </a:p>
         </p:txBody>
@@ -3740,7 +3748,7 @@
                 </a:solidFill>
                 <a:latin typeface="Courier New"/>
               </a:rPr>
-              <a:t>WEEK 3 · MONDAY</a:t>
+              <a:t>WEEK 3 - MONDAY</a:t>
             </a:r>
           </a:p>
         </p:txBody>
@@ -3779,7 +3787,7 @@
                 </a:solidFill>
                 <a:latin typeface="Arial"/>
               </a:rPr>
-              <a:t>User Testing I: Does It Work?</a:t>
+              <a:t>Usability Testing: Does It Work?</a:t>
             </a:r>
           </a:p>
         </p:txBody>
@@ -3818,7 +3826,2987 @@
                 </a:solidFill>
                 <a:latin typeface="Arial"/>
               </a:rPr>
-              <a:t>Outcomes — Designing systems that are useful and empowering</a:t>
+              <a:t>Human + agent testing on your Project 2 prototype</a:t>
+            </a:r>
+          </a:p>
+        </p:txBody>
+      </p:sp>
+    </p:spTree>
+  </p:cSld>
+  <p:clrMapOvr>
+    <a:masterClrMapping/>
+  </p:clrMapOvr>
+</p:sld>
+</file>
+
+<file path=ppt/slides/slide10.xml><?xml version="1.0" encoding="utf-8"?>
+<p:sld xmlns:a="http://schemas.openxmlformats.org/drawingml/2006/main" xmlns:p="http://schemas.openxmlformats.org/presentationml/2006/main" xmlns:r="http://schemas.openxmlformats.org/officeDocument/2006/relationships">
+  <p:cSld>
+    <p:bg>
+      <p:bgPr>
+        <a:solidFill>
+          <a:srgbClr val="0B0E14"/>
+        </a:solidFill>
+        <a:effectLst/>
+      </p:bgPr>
+    </p:bg>
+    <p:spTree>
+      <p:nvGrpSpPr>
+        <p:cNvPr id="1" name=""/>
+        <p:cNvGrpSpPr/>
+        <p:nvPr/>
+      </p:nvGrpSpPr>
+      <p:grpSpPr/>
+      <p:sp>
+        <p:nvSpPr>
+          <p:cNvPr id="2" name="Rectangle 1"/>
+          <p:cNvSpPr/>
+          <p:nvPr/>
+        </p:nvSpPr>
+        <p:spPr>
+          <a:xfrm>
+            <a:off x="0" y="0"/>
+            <a:ext cx="256032" cy="6858000"/>
+          </a:xfrm>
+          <a:prstGeom prst="rect">
+            <a:avLst/>
+          </a:prstGeom>
+          <a:solidFill>
+            <a:srgbClr val="00FF41"/>
+          </a:solidFill>
+          <a:ln>
+            <a:noFill/>
+          </a:ln>
+          <a:effectLst/>
+        </p:spPr>
+        <p:style>
+          <a:lnRef idx="1">
+            <a:schemeClr val="accent1"/>
+          </a:lnRef>
+          <a:fillRef idx="3">
+            <a:schemeClr val="accent1"/>
+          </a:fillRef>
+          <a:effectRef idx="2">
+            <a:schemeClr val="accent1"/>
+          </a:effectRef>
+          <a:fontRef idx="minor">
+            <a:schemeClr val="lt1"/>
+          </a:fontRef>
+        </p:style>
+        <p:txBody>
+          <a:bodyPr rtlCol="0" anchor="ctr"/>
+          <a:lstStyle/>
+          <a:p>
+            <a:pPr algn="ctr"/>
+          </a:p>
+        </p:txBody>
+      </p:sp>
+      <p:sp>
+        <p:nvSpPr>
+          <p:cNvPr id="3" name="TextBox 2"/>
+          <p:cNvSpPr txBox="1"/>
+          <p:nvPr/>
+        </p:nvSpPr>
+        <p:spPr>
+          <a:xfrm>
+            <a:off x="822960" y="2194560"/>
+            <a:ext cx="10515600" cy="548640"/>
+          </a:xfrm>
+          <a:prstGeom prst="rect">
+            <a:avLst/>
+          </a:prstGeom>
+          <a:noFill/>
+        </p:spPr>
+        <p:txBody>
+          <a:bodyPr wrap="square" anchor="t">
+            <a:spAutoFit/>
+          </a:bodyPr>
+          <a:lstStyle/>
+          <a:p>
+            <a:pPr algn="l">
+              <a:lnSpc>
+                <a:spcPct val="100000"/>
+              </a:lnSpc>
+            </a:pPr>
+            <a:r>
+              <a:rPr sz="1800" b="1">
+                <a:solidFill>
+                  <a:srgbClr val="00FF41"/>
+                </a:solidFill>
+                <a:latin typeface="Courier New"/>
+              </a:rPr>
+              <a:t>PART B</a:t>
+            </a:r>
+          </a:p>
+        </p:txBody>
+      </p:sp>
+      <p:sp>
+        <p:nvSpPr>
+          <p:cNvPr id="4" name="TextBox 3"/>
+          <p:cNvSpPr txBox="1"/>
+          <p:nvPr/>
+        </p:nvSpPr>
+        <p:spPr>
+          <a:xfrm>
+            <a:off x="804672" y="2743200"/>
+            <a:ext cx="10515600" cy="1554480"/>
+          </a:xfrm>
+          <a:prstGeom prst="rect">
+            <a:avLst/>
+          </a:prstGeom>
+          <a:noFill/>
+        </p:spPr>
+        <p:txBody>
+          <a:bodyPr wrap="square" anchor="t">
+            <a:spAutoFit/>
+          </a:bodyPr>
+          <a:lstStyle/>
+          <a:p>
+            <a:pPr algn="l">
+              <a:lnSpc>
+                <a:spcPct val="100000"/>
+              </a:lnSpc>
+            </a:pPr>
+            <a:r>
+              <a:rPr sz="4800" b="1">
+                <a:solidFill>
+                  <a:srgbClr val="F5F7FA"/>
+                </a:solidFill>
+                <a:latin typeface="Arial"/>
+              </a:rPr>
+              <a:t>Now let an AI agent test it</a:t>
+            </a:r>
+          </a:p>
+        </p:txBody>
+      </p:sp>
+      <p:sp>
+        <p:nvSpPr>
+          <p:cNvPr id="5" name="TextBox 4"/>
+          <p:cNvSpPr txBox="1"/>
+          <p:nvPr/>
+        </p:nvSpPr>
+        <p:spPr>
+          <a:xfrm>
+            <a:off x="841248" y="4297680"/>
+            <a:ext cx="10058400" cy="640080"/>
+          </a:xfrm>
+          <a:prstGeom prst="rect">
+            <a:avLst/>
+          </a:prstGeom>
+          <a:noFill/>
+        </p:spPr>
+        <p:txBody>
+          <a:bodyPr wrap="square" anchor="t">
+            <a:spAutoFit/>
+          </a:bodyPr>
+          <a:lstStyle/>
+          <a:p>
+            <a:pPr algn="l">
+              <a:lnSpc>
+                <a:spcPct val="100000"/>
+              </a:lnSpc>
+            </a:pPr>
+            <a:r>
+              <a:rPr sz="1900" b="0">
+                <a:solidFill>
+                  <a:srgbClr val="8A94A6"/>
+                </a:solidFill>
+                <a:latin typeface="Arial"/>
+              </a:rPr>
+              <a:t>An agent takes browser control of your live site and reports what breaks</a:t>
+            </a:r>
+          </a:p>
+        </p:txBody>
+      </p:sp>
+    </p:spTree>
+  </p:cSld>
+  <p:clrMapOvr>
+    <a:masterClrMapping/>
+  </p:clrMapOvr>
+</p:sld>
+</file>
+
+<file path=ppt/slides/slide11.xml><?xml version="1.0" encoding="utf-8"?>
+<p:sld xmlns:a="http://schemas.openxmlformats.org/drawingml/2006/main" xmlns:p="http://schemas.openxmlformats.org/presentationml/2006/main" xmlns:r="http://schemas.openxmlformats.org/officeDocument/2006/relationships">
+  <p:cSld>
+    <p:bg>
+      <p:bgPr>
+        <a:solidFill>
+          <a:srgbClr val="0B0E14"/>
+        </a:solidFill>
+        <a:effectLst/>
+      </p:bgPr>
+    </p:bg>
+    <p:spTree>
+      <p:nvGrpSpPr>
+        <p:cNvPr id="1" name=""/>
+        <p:cNvGrpSpPr/>
+        <p:nvPr/>
+      </p:nvGrpSpPr>
+      <p:grpSpPr/>
+      <p:sp>
+        <p:nvSpPr>
+          <p:cNvPr id="2" name="TextBox 1"/>
+          <p:cNvSpPr txBox="1"/>
+          <p:nvPr/>
+        </p:nvSpPr>
+        <p:spPr>
+          <a:xfrm>
+            <a:off x="640080" y="502920"/>
+            <a:ext cx="10058400" cy="365760"/>
+          </a:xfrm>
+          <a:prstGeom prst="rect">
+            <a:avLst/>
+          </a:prstGeom>
+          <a:noFill/>
+        </p:spPr>
+        <p:txBody>
+          <a:bodyPr wrap="square" anchor="t">
+            <a:spAutoFit/>
+          </a:bodyPr>
+          <a:lstStyle/>
+          <a:p>
+            <a:pPr algn="l">
+              <a:lnSpc>
+                <a:spcPct val="100000"/>
+              </a:lnSpc>
+            </a:pPr>
+            <a:r>
+              <a:rPr sz="1300" b="1">
+                <a:solidFill>
+                  <a:srgbClr val="00FF41"/>
+                </a:solidFill>
+                <a:latin typeface="Courier New"/>
+              </a:rPr>
+              <a:t>PART B - AGENT TESTING</a:t>
+            </a:r>
+          </a:p>
+        </p:txBody>
+      </p:sp>
+      <p:sp>
+        <p:nvSpPr>
+          <p:cNvPr id="3" name="Rectangle 2"/>
+          <p:cNvSpPr/>
+          <p:nvPr/>
+        </p:nvSpPr>
+        <p:spPr>
+          <a:xfrm>
+            <a:off x="640080" y="932688"/>
+            <a:ext cx="822960" cy="73152"/>
+          </a:xfrm>
+          <a:prstGeom prst="rect">
+            <a:avLst/>
+          </a:prstGeom>
+          <a:solidFill>
+            <a:srgbClr val="00FF41"/>
+          </a:solidFill>
+          <a:ln>
+            <a:noFill/>
+          </a:ln>
+          <a:effectLst/>
+        </p:spPr>
+        <p:style>
+          <a:lnRef idx="1">
+            <a:schemeClr val="accent1"/>
+          </a:lnRef>
+          <a:fillRef idx="3">
+            <a:schemeClr val="accent1"/>
+          </a:fillRef>
+          <a:effectRef idx="2">
+            <a:schemeClr val="accent1"/>
+          </a:effectRef>
+          <a:fontRef idx="minor">
+            <a:schemeClr val="lt1"/>
+          </a:fontRef>
+        </p:style>
+        <p:txBody>
+          <a:bodyPr rtlCol="0" anchor="ctr"/>
+          <a:lstStyle/>
+          <a:p>
+            <a:pPr algn="ctr"/>
+          </a:p>
+        </p:txBody>
+      </p:sp>
+      <p:sp>
+        <p:nvSpPr>
+          <p:cNvPr id="4" name="TextBox 3"/>
+          <p:cNvSpPr txBox="1"/>
+          <p:nvPr/>
+        </p:nvSpPr>
+        <p:spPr>
+          <a:xfrm>
+            <a:off x="640080" y="1188720"/>
+            <a:ext cx="10972800" cy="914400"/>
+          </a:xfrm>
+          <a:prstGeom prst="rect">
+            <a:avLst/>
+          </a:prstGeom>
+          <a:noFill/>
+        </p:spPr>
+        <p:txBody>
+          <a:bodyPr wrap="square" anchor="t">
+            <a:spAutoFit/>
+          </a:bodyPr>
+          <a:lstStyle/>
+          <a:p>
+            <a:pPr algn="l">
+              <a:lnSpc>
+                <a:spcPct val="100000"/>
+              </a:lnSpc>
+            </a:pPr>
+            <a:r>
+              <a:rPr sz="3200" b="1">
+                <a:solidFill>
+                  <a:srgbClr val="F5F7FA"/>
+                </a:solidFill>
+                <a:latin typeface="Arial"/>
+              </a:rPr>
+              <a:t>An AI drives your live site</a:t>
+            </a:r>
+          </a:p>
+        </p:txBody>
+      </p:sp>
+      <p:sp>
+        <p:nvSpPr>
+          <p:cNvPr id="5" name="Rounded Rectangle 4"/>
+          <p:cNvSpPr/>
+          <p:nvPr/>
+        </p:nvSpPr>
+        <p:spPr>
+          <a:xfrm>
+            <a:off x="640080" y="2468880"/>
+            <a:ext cx="3393338" cy="3383280"/>
+          </a:xfrm>
+          <a:prstGeom prst="roundRect">
+            <a:avLst/>
+          </a:prstGeom>
+          <a:solidFill>
+            <a:srgbClr val="151B26"/>
+          </a:solidFill>
+          <a:ln>
+            <a:noFill/>
+          </a:ln>
+          <a:effectLst/>
+        </p:spPr>
+        <p:style>
+          <a:lnRef idx="1">
+            <a:schemeClr val="accent1"/>
+          </a:lnRef>
+          <a:fillRef idx="3">
+            <a:schemeClr val="accent1"/>
+          </a:fillRef>
+          <a:effectRef idx="2">
+            <a:schemeClr val="accent1"/>
+          </a:effectRef>
+          <a:fontRef idx="minor">
+            <a:schemeClr val="lt1"/>
+          </a:fontRef>
+        </p:style>
+        <p:txBody>
+          <a:bodyPr rtlCol="0" anchor="ctr"/>
+          <a:lstStyle/>
+          <a:p>
+            <a:pPr algn="ctr"/>
+          </a:p>
+        </p:txBody>
+      </p:sp>
+      <p:sp>
+        <p:nvSpPr>
+          <p:cNvPr id="6" name="Rectangle 5"/>
+          <p:cNvSpPr/>
+          <p:nvPr/>
+        </p:nvSpPr>
+        <p:spPr>
+          <a:xfrm>
+            <a:off x="640080" y="2468880"/>
+            <a:ext cx="3393338" cy="82296"/>
+          </a:xfrm>
+          <a:prstGeom prst="rect">
+            <a:avLst/>
+          </a:prstGeom>
+          <a:solidFill>
+            <a:srgbClr val="00FF41"/>
+          </a:solidFill>
+          <a:ln>
+            <a:noFill/>
+          </a:ln>
+          <a:effectLst/>
+        </p:spPr>
+        <p:style>
+          <a:lnRef idx="1">
+            <a:schemeClr val="accent1"/>
+          </a:lnRef>
+          <a:fillRef idx="3">
+            <a:schemeClr val="accent1"/>
+          </a:fillRef>
+          <a:effectRef idx="2">
+            <a:schemeClr val="accent1"/>
+          </a:effectRef>
+          <a:fontRef idx="minor">
+            <a:schemeClr val="lt1"/>
+          </a:fontRef>
+        </p:style>
+        <p:txBody>
+          <a:bodyPr rtlCol="0" anchor="ctr"/>
+          <a:lstStyle/>
+          <a:p>
+            <a:pPr algn="ctr"/>
+          </a:p>
+        </p:txBody>
+      </p:sp>
+      <p:sp>
+        <p:nvSpPr>
+          <p:cNvPr id="7" name="TextBox 6"/>
+          <p:cNvSpPr txBox="1"/>
+          <p:nvPr/>
+        </p:nvSpPr>
+        <p:spPr>
+          <a:xfrm>
+            <a:off x="914400" y="2788920"/>
+            <a:ext cx="2844698" cy="457200"/>
+          </a:xfrm>
+          <a:prstGeom prst="rect">
+            <a:avLst/>
+          </a:prstGeom>
+          <a:noFill/>
+        </p:spPr>
+        <p:txBody>
+          <a:bodyPr wrap="square" anchor="t">
+            <a:spAutoFit/>
+          </a:bodyPr>
+          <a:lstStyle/>
+          <a:p>
+            <a:pPr algn="l">
+              <a:lnSpc>
+                <a:spcPct val="100000"/>
+              </a:lnSpc>
+            </a:pPr>
+            <a:r>
+              <a:rPr sz="1200" b="1">
+                <a:solidFill>
+                  <a:srgbClr val="00FF41"/>
+                </a:solidFill>
+                <a:latin typeface="Courier New"/>
+              </a:rPr>
+              <a:t>WHAT</a:t>
+            </a:r>
+          </a:p>
+        </p:txBody>
+      </p:sp>
+      <p:sp>
+        <p:nvSpPr>
+          <p:cNvPr id="8" name="TextBox 7"/>
+          <p:cNvSpPr txBox="1"/>
+          <p:nvPr/>
+        </p:nvSpPr>
+        <p:spPr>
+          <a:xfrm>
+            <a:off x="914400" y="3246120"/>
+            <a:ext cx="2844698" cy="822960"/>
+          </a:xfrm>
+          <a:prstGeom prst="rect">
+            <a:avLst/>
+          </a:prstGeom>
+          <a:noFill/>
+        </p:spPr>
+        <p:txBody>
+          <a:bodyPr wrap="square" anchor="t">
+            <a:spAutoFit/>
+          </a:bodyPr>
+          <a:lstStyle/>
+          <a:p>
+            <a:pPr algn="l">
+              <a:lnSpc>
+                <a:spcPct val="100000"/>
+              </a:lnSpc>
+            </a:pPr>
+            <a:r>
+              <a:rPr sz="2000" b="1">
+                <a:solidFill>
+                  <a:srgbClr val="F5F7FA"/>
+                </a:solidFill>
+                <a:latin typeface="Arial"/>
+              </a:rPr>
+              <a:t>Agent-based usability test</a:t>
+            </a:r>
+          </a:p>
+        </p:txBody>
+      </p:sp>
+      <p:sp>
+        <p:nvSpPr>
+          <p:cNvPr id="9" name="TextBox 8"/>
+          <p:cNvSpPr txBox="1"/>
+          <p:nvPr/>
+        </p:nvSpPr>
+        <p:spPr>
+          <a:xfrm>
+            <a:off x="914400" y="4114800"/>
+            <a:ext cx="2844698" cy="1554480"/>
+          </a:xfrm>
+          <a:prstGeom prst="rect">
+            <a:avLst/>
+          </a:prstGeom>
+          <a:noFill/>
+        </p:spPr>
+        <p:txBody>
+          <a:bodyPr wrap="square" anchor="t">
+            <a:spAutoFit/>
+          </a:bodyPr>
+          <a:lstStyle/>
+          <a:p>
+            <a:pPr algn="l">
+              <a:lnSpc>
+                <a:spcPct val="110000"/>
+              </a:lnSpc>
+            </a:pPr>
+            <a:r>
+              <a:rPr sz="1500" b="0">
+                <a:solidFill>
+                  <a:srgbClr val="8A94A6"/>
+                </a:solidFill>
+                <a:latin typeface="Arial"/>
+              </a:rPr>
+              <a:t>Give an AI agent your live URL and the same task. It clicks through and reports where it gets stuck.</a:t>
+            </a:r>
+          </a:p>
+        </p:txBody>
+      </p:sp>
+      <p:sp>
+        <p:nvSpPr>
+          <p:cNvPr id="10" name="Rounded Rectangle 9"/>
+          <p:cNvSpPr/>
+          <p:nvPr/>
+        </p:nvSpPr>
+        <p:spPr>
+          <a:xfrm>
+            <a:off x="4399178" y="2468880"/>
+            <a:ext cx="3393338" cy="3383280"/>
+          </a:xfrm>
+          <a:prstGeom prst="roundRect">
+            <a:avLst/>
+          </a:prstGeom>
+          <a:solidFill>
+            <a:srgbClr val="151B26"/>
+          </a:solidFill>
+          <a:ln>
+            <a:noFill/>
+          </a:ln>
+          <a:effectLst/>
+        </p:spPr>
+        <p:style>
+          <a:lnRef idx="1">
+            <a:schemeClr val="accent1"/>
+          </a:lnRef>
+          <a:fillRef idx="3">
+            <a:schemeClr val="accent1"/>
+          </a:fillRef>
+          <a:effectRef idx="2">
+            <a:schemeClr val="accent1"/>
+          </a:effectRef>
+          <a:fontRef idx="minor">
+            <a:schemeClr val="lt1"/>
+          </a:fontRef>
+        </p:style>
+        <p:txBody>
+          <a:bodyPr rtlCol="0" anchor="ctr"/>
+          <a:lstStyle/>
+          <a:p>
+            <a:pPr algn="ctr"/>
+          </a:p>
+        </p:txBody>
+      </p:sp>
+      <p:sp>
+        <p:nvSpPr>
+          <p:cNvPr id="11" name="Rectangle 10"/>
+          <p:cNvSpPr/>
+          <p:nvPr/>
+        </p:nvSpPr>
+        <p:spPr>
+          <a:xfrm>
+            <a:off x="4399178" y="2468880"/>
+            <a:ext cx="3393338" cy="82296"/>
+          </a:xfrm>
+          <a:prstGeom prst="rect">
+            <a:avLst/>
+          </a:prstGeom>
+          <a:solidFill>
+            <a:srgbClr val="00FF41"/>
+          </a:solidFill>
+          <a:ln>
+            <a:noFill/>
+          </a:ln>
+          <a:effectLst/>
+        </p:spPr>
+        <p:style>
+          <a:lnRef idx="1">
+            <a:schemeClr val="accent1"/>
+          </a:lnRef>
+          <a:fillRef idx="3">
+            <a:schemeClr val="accent1"/>
+          </a:fillRef>
+          <a:effectRef idx="2">
+            <a:schemeClr val="accent1"/>
+          </a:effectRef>
+          <a:fontRef idx="minor">
+            <a:schemeClr val="lt1"/>
+          </a:fontRef>
+        </p:style>
+        <p:txBody>
+          <a:bodyPr rtlCol="0" anchor="ctr"/>
+          <a:lstStyle/>
+          <a:p>
+            <a:pPr algn="ctr"/>
+          </a:p>
+        </p:txBody>
+      </p:sp>
+      <p:sp>
+        <p:nvSpPr>
+          <p:cNvPr id="12" name="TextBox 11"/>
+          <p:cNvSpPr txBox="1"/>
+          <p:nvPr/>
+        </p:nvSpPr>
+        <p:spPr>
+          <a:xfrm>
+            <a:off x="4673498" y="2788920"/>
+            <a:ext cx="2844698" cy="457200"/>
+          </a:xfrm>
+          <a:prstGeom prst="rect">
+            <a:avLst/>
+          </a:prstGeom>
+          <a:noFill/>
+        </p:spPr>
+        <p:txBody>
+          <a:bodyPr wrap="square" anchor="t">
+            <a:spAutoFit/>
+          </a:bodyPr>
+          <a:lstStyle/>
+          <a:p>
+            <a:pPr algn="l">
+              <a:lnSpc>
+                <a:spcPct val="100000"/>
+              </a:lnSpc>
+            </a:pPr>
+            <a:r>
+              <a:rPr sz="1200" b="1">
+                <a:solidFill>
+                  <a:srgbClr val="00FF41"/>
+                </a:solidFill>
+                <a:latin typeface="Courier New"/>
+              </a:rPr>
+              <a:t>WHY</a:t>
+            </a:r>
+          </a:p>
+        </p:txBody>
+      </p:sp>
+      <p:sp>
+        <p:nvSpPr>
+          <p:cNvPr id="13" name="TextBox 12"/>
+          <p:cNvSpPr txBox="1"/>
+          <p:nvPr/>
+        </p:nvSpPr>
+        <p:spPr>
+          <a:xfrm>
+            <a:off x="4673498" y="3246120"/>
+            <a:ext cx="2844698" cy="822960"/>
+          </a:xfrm>
+          <a:prstGeom prst="rect">
+            <a:avLst/>
+          </a:prstGeom>
+          <a:noFill/>
+        </p:spPr>
+        <p:txBody>
+          <a:bodyPr wrap="square" anchor="t">
+            <a:spAutoFit/>
+          </a:bodyPr>
+          <a:lstStyle/>
+          <a:p>
+            <a:pPr algn="l">
+              <a:lnSpc>
+                <a:spcPct val="100000"/>
+              </a:lnSpc>
+            </a:pPr>
+            <a:r>
+              <a:rPr sz="2000" b="1">
+                <a:solidFill>
+                  <a:srgbClr val="F5F7FA"/>
+                </a:solidFill>
+                <a:latin typeface="Arial"/>
+              </a:rPr>
+              <a:t>Fast, tireless, literal</a:t>
+            </a:r>
+          </a:p>
+        </p:txBody>
+      </p:sp>
+      <p:sp>
+        <p:nvSpPr>
+          <p:cNvPr id="14" name="TextBox 13"/>
+          <p:cNvSpPr txBox="1"/>
+          <p:nvPr/>
+        </p:nvSpPr>
+        <p:spPr>
+          <a:xfrm>
+            <a:off x="4673498" y="4114800"/>
+            <a:ext cx="2844698" cy="1554480"/>
+          </a:xfrm>
+          <a:prstGeom prst="rect">
+            <a:avLst/>
+          </a:prstGeom>
+          <a:noFill/>
+        </p:spPr>
+        <p:txBody>
+          <a:bodyPr wrap="square" anchor="t">
+            <a:spAutoFit/>
+          </a:bodyPr>
+          <a:lstStyle/>
+          <a:p>
+            <a:pPr algn="l">
+              <a:lnSpc>
+                <a:spcPct val="110000"/>
+              </a:lnSpc>
+            </a:pPr>
+            <a:r>
+              <a:rPr sz="1500" b="0">
+                <a:solidFill>
+                  <a:srgbClr val="8A94A6"/>
+                </a:solidFill>
+                <a:latin typeface="Arial"/>
+              </a:rPr>
+              <a:t>Catches broken flows, dead links, unclear labels, impossible steps - in minutes, at any hour.</a:t>
+            </a:r>
+          </a:p>
+        </p:txBody>
+      </p:sp>
+      <p:sp>
+        <p:nvSpPr>
+          <p:cNvPr id="15" name="Rounded Rectangle 14"/>
+          <p:cNvSpPr/>
+          <p:nvPr/>
+        </p:nvSpPr>
+        <p:spPr>
+          <a:xfrm>
+            <a:off x="8158276" y="2468880"/>
+            <a:ext cx="3393338" cy="3383280"/>
+          </a:xfrm>
+          <a:prstGeom prst="roundRect">
+            <a:avLst/>
+          </a:prstGeom>
+          <a:solidFill>
+            <a:srgbClr val="151B26"/>
+          </a:solidFill>
+          <a:ln>
+            <a:noFill/>
+          </a:ln>
+          <a:effectLst/>
+        </p:spPr>
+        <p:style>
+          <a:lnRef idx="1">
+            <a:schemeClr val="accent1"/>
+          </a:lnRef>
+          <a:fillRef idx="3">
+            <a:schemeClr val="accent1"/>
+          </a:fillRef>
+          <a:effectRef idx="2">
+            <a:schemeClr val="accent1"/>
+          </a:effectRef>
+          <a:fontRef idx="minor">
+            <a:schemeClr val="lt1"/>
+          </a:fontRef>
+        </p:style>
+        <p:txBody>
+          <a:bodyPr rtlCol="0" anchor="ctr"/>
+          <a:lstStyle/>
+          <a:p>
+            <a:pPr algn="ctr"/>
+          </a:p>
+        </p:txBody>
+      </p:sp>
+      <p:sp>
+        <p:nvSpPr>
+          <p:cNvPr id="16" name="Rectangle 15"/>
+          <p:cNvSpPr/>
+          <p:nvPr/>
+        </p:nvSpPr>
+        <p:spPr>
+          <a:xfrm>
+            <a:off x="8158276" y="2468880"/>
+            <a:ext cx="3393338" cy="82296"/>
+          </a:xfrm>
+          <a:prstGeom prst="rect">
+            <a:avLst/>
+          </a:prstGeom>
+          <a:solidFill>
+            <a:srgbClr val="00FF41"/>
+          </a:solidFill>
+          <a:ln>
+            <a:noFill/>
+          </a:ln>
+          <a:effectLst/>
+        </p:spPr>
+        <p:style>
+          <a:lnRef idx="1">
+            <a:schemeClr val="accent1"/>
+          </a:lnRef>
+          <a:fillRef idx="3">
+            <a:schemeClr val="accent1"/>
+          </a:fillRef>
+          <a:effectRef idx="2">
+            <a:schemeClr val="accent1"/>
+          </a:effectRef>
+          <a:fontRef idx="minor">
+            <a:schemeClr val="lt1"/>
+          </a:fontRef>
+        </p:style>
+        <p:txBody>
+          <a:bodyPr rtlCol="0" anchor="ctr"/>
+          <a:lstStyle/>
+          <a:p>
+            <a:pPr algn="ctr"/>
+          </a:p>
+        </p:txBody>
+      </p:sp>
+      <p:sp>
+        <p:nvSpPr>
+          <p:cNvPr id="17" name="TextBox 16"/>
+          <p:cNvSpPr txBox="1"/>
+          <p:nvPr/>
+        </p:nvSpPr>
+        <p:spPr>
+          <a:xfrm>
+            <a:off x="8432596" y="2788920"/>
+            <a:ext cx="2844698" cy="457200"/>
+          </a:xfrm>
+          <a:prstGeom prst="rect">
+            <a:avLst/>
+          </a:prstGeom>
+          <a:noFill/>
+        </p:spPr>
+        <p:txBody>
+          <a:bodyPr wrap="square" anchor="t">
+            <a:spAutoFit/>
+          </a:bodyPr>
+          <a:lstStyle/>
+          <a:p>
+            <a:pPr algn="l">
+              <a:lnSpc>
+                <a:spcPct val="100000"/>
+              </a:lnSpc>
+            </a:pPr>
+            <a:r>
+              <a:rPr sz="1200" b="1">
+                <a:solidFill>
+                  <a:srgbClr val="00FF41"/>
+                </a:solidFill>
+                <a:latin typeface="Courier New"/>
+              </a:rPr>
+              <a:t>TOOLS</a:t>
+            </a:r>
+          </a:p>
+        </p:txBody>
+      </p:sp>
+      <p:sp>
+        <p:nvSpPr>
+          <p:cNvPr id="18" name="TextBox 17"/>
+          <p:cNvSpPr txBox="1"/>
+          <p:nvPr/>
+        </p:nvSpPr>
+        <p:spPr>
+          <a:xfrm>
+            <a:off x="8432596" y="3246120"/>
+            <a:ext cx="2844698" cy="822960"/>
+          </a:xfrm>
+          <a:prstGeom prst="rect">
+            <a:avLst/>
+          </a:prstGeom>
+          <a:noFill/>
+        </p:spPr>
+        <p:txBody>
+          <a:bodyPr wrap="square" anchor="t">
+            <a:spAutoFit/>
+          </a:bodyPr>
+          <a:lstStyle/>
+          <a:p>
+            <a:pPr algn="l">
+              <a:lnSpc>
+                <a:spcPct val="100000"/>
+              </a:lnSpc>
+            </a:pPr>
+            <a:r>
+              <a:rPr sz="2000" b="1">
+                <a:solidFill>
+                  <a:srgbClr val="F5F7FA"/>
+                </a:solidFill>
+                <a:latin typeface="Arial"/>
+              </a:rPr>
+              <a:t>Pick one you can run</a:t>
+            </a:r>
+          </a:p>
+        </p:txBody>
+      </p:sp>
+      <p:sp>
+        <p:nvSpPr>
+          <p:cNvPr id="19" name="TextBox 18"/>
+          <p:cNvSpPr txBox="1"/>
+          <p:nvPr/>
+        </p:nvSpPr>
+        <p:spPr>
+          <a:xfrm>
+            <a:off x="8432596" y="4114800"/>
+            <a:ext cx="2844698" cy="1554480"/>
+          </a:xfrm>
+          <a:prstGeom prst="rect">
+            <a:avLst/>
+          </a:prstGeom>
+          <a:noFill/>
+        </p:spPr>
+        <p:txBody>
+          <a:bodyPr wrap="square" anchor="t">
+            <a:spAutoFit/>
+          </a:bodyPr>
+          <a:lstStyle/>
+          <a:p>
+            <a:pPr algn="l">
+              <a:lnSpc>
+                <a:spcPct val="110000"/>
+              </a:lnSpc>
+            </a:pPr>
+            <a:r>
+              <a:rPr sz="1500" b="0">
+                <a:solidFill>
+                  <a:srgbClr val="8A94A6"/>
+                </a:solidFill>
+                <a:latin typeface="Arial"/>
+              </a:rPr>
+              <a:t>Antigravity | Chrome DevTools MCP | Playwright MCP | browser-use. Log your prompts in history.md.</a:t>
+            </a:r>
+          </a:p>
+        </p:txBody>
+      </p:sp>
+      <p:sp>
+        <p:nvSpPr>
+          <p:cNvPr id="20" name="TextBox 19"/>
+          <p:cNvSpPr txBox="1"/>
+          <p:nvPr/>
+        </p:nvSpPr>
+        <p:spPr>
+          <a:xfrm>
+            <a:off x="640080" y="6355080"/>
+            <a:ext cx="10972800" cy="365760"/>
+          </a:xfrm>
+          <a:prstGeom prst="rect">
+            <a:avLst/>
+          </a:prstGeom>
+          <a:noFill/>
+        </p:spPr>
+        <p:txBody>
+          <a:bodyPr wrap="square" anchor="t">
+            <a:spAutoFit/>
+          </a:bodyPr>
+          <a:lstStyle/>
+          <a:p>
+            <a:pPr algn="l">
+              <a:lnSpc>
+                <a:spcPct val="100000"/>
+              </a:lnSpc>
+            </a:pPr>
+            <a:r>
+              <a:rPr sz="1000" b="0">
+                <a:solidFill>
+                  <a:srgbClr val="5A6474"/>
+                </a:solidFill>
+                <a:latin typeface="Courier New"/>
+              </a:rPr>
+              <a:t>Good Code, Good Vibes · TECHIE 1121 · Cornell Tech · Summer 2026</a:t>
+            </a:r>
+          </a:p>
+        </p:txBody>
+      </p:sp>
+    </p:spTree>
+  </p:cSld>
+  <p:clrMapOvr>
+    <a:masterClrMapping/>
+  </p:clrMapOvr>
+</p:sld>
+</file>
+
+<file path=ppt/slides/slide12.xml><?xml version="1.0" encoding="utf-8"?>
+<p:sld xmlns:a="http://schemas.openxmlformats.org/drawingml/2006/main" xmlns:p="http://schemas.openxmlformats.org/presentationml/2006/main" xmlns:r="http://schemas.openxmlformats.org/officeDocument/2006/relationships">
+  <p:cSld>
+    <p:bg>
+      <p:bgPr>
+        <a:solidFill>
+          <a:srgbClr val="0B0E14"/>
+        </a:solidFill>
+        <a:effectLst/>
+      </p:bgPr>
+    </p:bg>
+    <p:spTree>
+      <p:nvGrpSpPr>
+        <p:cNvPr id="1" name=""/>
+        <p:cNvGrpSpPr/>
+        <p:nvPr/>
+      </p:nvGrpSpPr>
+      <p:grpSpPr/>
+      <p:sp>
+        <p:nvSpPr>
+          <p:cNvPr id="2" name="TextBox 1"/>
+          <p:cNvSpPr txBox="1"/>
+          <p:nvPr/>
+        </p:nvSpPr>
+        <p:spPr>
+          <a:xfrm>
+            <a:off x="640080" y="502920"/>
+            <a:ext cx="10058400" cy="365760"/>
+          </a:xfrm>
+          <a:prstGeom prst="rect">
+            <a:avLst/>
+          </a:prstGeom>
+          <a:noFill/>
+        </p:spPr>
+        <p:txBody>
+          <a:bodyPr wrap="square" anchor="t">
+            <a:spAutoFit/>
+          </a:bodyPr>
+          <a:lstStyle/>
+          <a:p>
+            <a:pPr algn="l">
+              <a:lnSpc>
+                <a:spcPct val="100000"/>
+              </a:lnSpc>
+            </a:pPr>
+            <a:r>
+              <a:rPr sz="1300" b="1">
+                <a:solidFill>
+                  <a:srgbClr val="00FF41"/>
+                </a:solidFill>
+                <a:latin typeface="Courier New"/>
+              </a:rPr>
+              <a:t>HUMAN vs AGENT</a:t>
+            </a:r>
+          </a:p>
+        </p:txBody>
+      </p:sp>
+      <p:sp>
+        <p:nvSpPr>
+          <p:cNvPr id="3" name="Rectangle 2"/>
+          <p:cNvSpPr/>
+          <p:nvPr/>
+        </p:nvSpPr>
+        <p:spPr>
+          <a:xfrm>
+            <a:off x="640080" y="932688"/>
+            <a:ext cx="822960" cy="73152"/>
+          </a:xfrm>
+          <a:prstGeom prst="rect">
+            <a:avLst/>
+          </a:prstGeom>
+          <a:solidFill>
+            <a:srgbClr val="00FF41"/>
+          </a:solidFill>
+          <a:ln>
+            <a:noFill/>
+          </a:ln>
+          <a:effectLst/>
+        </p:spPr>
+        <p:style>
+          <a:lnRef idx="1">
+            <a:schemeClr val="accent1"/>
+          </a:lnRef>
+          <a:fillRef idx="3">
+            <a:schemeClr val="accent1"/>
+          </a:fillRef>
+          <a:effectRef idx="2">
+            <a:schemeClr val="accent1"/>
+          </a:effectRef>
+          <a:fontRef idx="minor">
+            <a:schemeClr val="lt1"/>
+          </a:fontRef>
+        </p:style>
+        <p:txBody>
+          <a:bodyPr rtlCol="0" anchor="ctr"/>
+          <a:lstStyle/>
+          <a:p>
+            <a:pPr algn="ctr"/>
+          </a:p>
+        </p:txBody>
+      </p:sp>
+      <p:sp>
+        <p:nvSpPr>
+          <p:cNvPr id="4" name="TextBox 3"/>
+          <p:cNvSpPr txBox="1"/>
+          <p:nvPr/>
+        </p:nvSpPr>
+        <p:spPr>
+          <a:xfrm>
+            <a:off x="640080" y="1188720"/>
+            <a:ext cx="10972800" cy="914400"/>
+          </a:xfrm>
+          <a:prstGeom prst="rect">
+            <a:avLst/>
+          </a:prstGeom>
+          <a:noFill/>
+        </p:spPr>
+        <p:txBody>
+          <a:bodyPr wrap="square" anchor="t">
+            <a:spAutoFit/>
+          </a:bodyPr>
+          <a:lstStyle/>
+          <a:p>
+            <a:pPr algn="l">
+              <a:lnSpc>
+                <a:spcPct val="100000"/>
+              </a:lnSpc>
+            </a:pPr>
+            <a:r>
+              <a:rPr sz="3200" b="1">
+                <a:solidFill>
+                  <a:srgbClr val="F5F7FA"/>
+                </a:solidFill>
+                <a:latin typeface="Arial"/>
+              </a:rPr>
+              <a:t>Two testers, different eyes</a:t>
+            </a:r>
+          </a:p>
+        </p:txBody>
+      </p:sp>
+      <p:sp>
+        <p:nvSpPr>
+          <p:cNvPr id="5" name="Rounded Rectangle 4"/>
+          <p:cNvSpPr/>
+          <p:nvPr/>
+        </p:nvSpPr>
+        <p:spPr>
+          <a:xfrm>
+            <a:off x="640080" y="2468880"/>
+            <a:ext cx="3393338" cy="3383280"/>
+          </a:xfrm>
+          <a:prstGeom prst="roundRect">
+            <a:avLst/>
+          </a:prstGeom>
+          <a:solidFill>
+            <a:srgbClr val="151B26"/>
+          </a:solidFill>
+          <a:ln>
+            <a:noFill/>
+          </a:ln>
+          <a:effectLst/>
+        </p:spPr>
+        <p:style>
+          <a:lnRef idx="1">
+            <a:schemeClr val="accent1"/>
+          </a:lnRef>
+          <a:fillRef idx="3">
+            <a:schemeClr val="accent1"/>
+          </a:fillRef>
+          <a:effectRef idx="2">
+            <a:schemeClr val="accent1"/>
+          </a:effectRef>
+          <a:fontRef idx="minor">
+            <a:schemeClr val="lt1"/>
+          </a:fontRef>
+        </p:style>
+        <p:txBody>
+          <a:bodyPr rtlCol="0" anchor="ctr"/>
+          <a:lstStyle/>
+          <a:p>
+            <a:pPr algn="ctr"/>
+          </a:p>
+        </p:txBody>
+      </p:sp>
+      <p:sp>
+        <p:nvSpPr>
+          <p:cNvPr id="6" name="Rectangle 5"/>
+          <p:cNvSpPr/>
+          <p:nvPr/>
+        </p:nvSpPr>
+        <p:spPr>
+          <a:xfrm>
+            <a:off x="640080" y="2468880"/>
+            <a:ext cx="3393338" cy="82296"/>
+          </a:xfrm>
+          <a:prstGeom prst="rect">
+            <a:avLst/>
+          </a:prstGeom>
+          <a:solidFill>
+            <a:srgbClr val="00FF41"/>
+          </a:solidFill>
+          <a:ln>
+            <a:noFill/>
+          </a:ln>
+          <a:effectLst/>
+        </p:spPr>
+        <p:style>
+          <a:lnRef idx="1">
+            <a:schemeClr val="accent1"/>
+          </a:lnRef>
+          <a:fillRef idx="3">
+            <a:schemeClr val="accent1"/>
+          </a:fillRef>
+          <a:effectRef idx="2">
+            <a:schemeClr val="accent1"/>
+          </a:effectRef>
+          <a:fontRef idx="minor">
+            <a:schemeClr val="lt1"/>
+          </a:fontRef>
+        </p:style>
+        <p:txBody>
+          <a:bodyPr rtlCol="0" anchor="ctr"/>
+          <a:lstStyle/>
+          <a:p>
+            <a:pPr algn="ctr"/>
+          </a:p>
+        </p:txBody>
+      </p:sp>
+      <p:sp>
+        <p:nvSpPr>
+          <p:cNvPr id="7" name="TextBox 6"/>
+          <p:cNvSpPr txBox="1"/>
+          <p:nvPr/>
+        </p:nvSpPr>
+        <p:spPr>
+          <a:xfrm>
+            <a:off x="914400" y="2788920"/>
+            <a:ext cx="2844698" cy="457200"/>
+          </a:xfrm>
+          <a:prstGeom prst="rect">
+            <a:avLst/>
+          </a:prstGeom>
+          <a:noFill/>
+        </p:spPr>
+        <p:txBody>
+          <a:bodyPr wrap="square" anchor="t">
+            <a:spAutoFit/>
+          </a:bodyPr>
+          <a:lstStyle/>
+          <a:p>
+            <a:pPr algn="l">
+              <a:lnSpc>
+                <a:spcPct val="100000"/>
+              </a:lnSpc>
+            </a:pPr>
+            <a:r>
+              <a:rPr sz="1200" b="1">
+                <a:solidFill>
+                  <a:srgbClr val="00FF41"/>
+                </a:solidFill>
+                <a:latin typeface="Courier New"/>
+              </a:rPr>
+              <a:t>HUMANS CATCH</a:t>
+            </a:r>
+          </a:p>
+        </p:txBody>
+      </p:sp>
+      <p:sp>
+        <p:nvSpPr>
+          <p:cNvPr id="8" name="TextBox 7"/>
+          <p:cNvSpPr txBox="1"/>
+          <p:nvPr/>
+        </p:nvSpPr>
+        <p:spPr>
+          <a:xfrm>
+            <a:off x="914400" y="3246120"/>
+            <a:ext cx="2844698" cy="822960"/>
+          </a:xfrm>
+          <a:prstGeom prst="rect">
+            <a:avLst/>
+          </a:prstGeom>
+          <a:noFill/>
+        </p:spPr>
+        <p:txBody>
+          <a:bodyPr wrap="square" anchor="t">
+            <a:spAutoFit/>
+          </a:bodyPr>
+          <a:lstStyle/>
+          <a:p>
+            <a:pPr algn="l">
+              <a:lnSpc>
+                <a:spcPct val="100000"/>
+              </a:lnSpc>
+            </a:pPr>
+            <a:r>
+              <a:rPr sz="2000" b="1">
+                <a:solidFill>
+                  <a:srgbClr val="F5F7FA"/>
+                </a:solidFill>
+                <a:latin typeface="Arial"/>
+              </a:rPr>
+              <a:t>Confusion &amp; feeling</a:t>
+            </a:r>
+          </a:p>
+        </p:txBody>
+      </p:sp>
+      <p:sp>
+        <p:nvSpPr>
+          <p:cNvPr id="9" name="TextBox 8"/>
+          <p:cNvSpPr txBox="1"/>
+          <p:nvPr/>
+        </p:nvSpPr>
+        <p:spPr>
+          <a:xfrm>
+            <a:off x="914400" y="4114800"/>
+            <a:ext cx="2844698" cy="1554480"/>
+          </a:xfrm>
+          <a:prstGeom prst="rect">
+            <a:avLst/>
+          </a:prstGeom>
+          <a:noFill/>
+        </p:spPr>
+        <p:txBody>
+          <a:bodyPr wrap="square" anchor="t">
+            <a:spAutoFit/>
+          </a:bodyPr>
+          <a:lstStyle/>
+          <a:p>
+            <a:pPr algn="l">
+              <a:lnSpc>
+                <a:spcPct val="110000"/>
+              </a:lnSpc>
+            </a:pPr>
+            <a:r>
+              <a:rPr sz="1500" b="0">
+                <a:solidFill>
+                  <a:srgbClr val="8A94A6"/>
+                </a:solidFill>
+                <a:latin typeface="Arial"/>
+              </a:rPr>
+              <a:t>Hesitation, frustration, delight, misread labels, real-world mismatch, the value bending. Emotion you can't fake.</a:t>
+            </a:r>
+          </a:p>
+        </p:txBody>
+      </p:sp>
+      <p:sp>
+        <p:nvSpPr>
+          <p:cNvPr id="10" name="Rounded Rectangle 9"/>
+          <p:cNvSpPr/>
+          <p:nvPr/>
+        </p:nvSpPr>
+        <p:spPr>
+          <a:xfrm>
+            <a:off x="4399178" y="2468880"/>
+            <a:ext cx="3393338" cy="3383280"/>
+          </a:xfrm>
+          <a:prstGeom prst="roundRect">
+            <a:avLst/>
+          </a:prstGeom>
+          <a:solidFill>
+            <a:srgbClr val="151B26"/>
+          </a:solidFill>
+          <a:ln>
+            <a:noFill/>
+          </a:ln>
+          <a:effectLst/>
+        </p:spPr>
+        <p:style>
+          <a:lnRef idx="1">
+            <a:schemeClr val="accent1"/>
+          </a:lnRef>
+          <a:fillRef idx="3">
+            <a:schemeClr val="accent1"/>
+          </a:fillRef>
+          <a:effectRef idx="2">
+            <a:schemeClr val="accent1"/>
+          </a:effectRef>
+          <a:fontRef idx="minor">
+            <a:schemeClr val="lt1"/>
+          </a:fontRef>
+        </p:style>
+        <p:txBody>
+          <a:bodyPr rtlCol="0" anchor="ctr"/>
+          <a:lstStyle/>
+          <a:p>
+            <a:pPr algn="ctr"/>
+          </a:p>
+        </p:txBody>
+      </p:sp>
+      <p:sp>
+        <p:nvSpPr>
+          <p:cNvPr id="11" name="Rectangle 10"/>
+          <p:cNvSpPr/>
+          <p:nvPr/>
+        </p:nvSpPr>
+        <p:spPr>
+          <a:xfrm>
+            <a:off x="4399178" y="2468880"/>
+            <a:ext cx="3393338" cy="82296"/>
+          </a:xfrm>
+          <a:prstGeom prst="rect">
+            <a:avLst/>
+          </a:prstGeom>
+          <a:solidFill>
+            <a:srgbClr val="00FF41"/>
+          </a:solidFill>
+          <a:ln>
+            <a:noFill/>
+          </a:ln>
+          <a:effectLst/>
+        </p:spPr>
+        <p:style>
+          <a:lnRef idx="1">
+            <a:schemeClr val="accent1"/>
+          </a:lnRef>
+          <a:fillRef idx="3">
+            <a:schemeClr val="accent1"/>
+          </a:fillRef>
+          <a:effectRef idx="2">
+            <a:schemeClr val="accent1"/>
+          </a:effectRef>
+          <a:fontRef idx="minor">
+            <a:schemeClr val="lt1"/>
+          </a:fontRef>
+        </p:style>
+        <p:txBody>
+          <a:bodyPr rtlCol="0" anchor="ctr"/>
+          <a:lstStyle/>
+          <a:p>
+            <a:pPr algn="ctr"/>
+          </a:p>
+        </p:txBody>
+      </p:sp>
+      <p:sp>
+        <p:nvSpPr>
+          <p:cNvPr id="12" name="TextBox 11"/>
+          <p:cNvSpPr txBox="1"/>
+          <p:nvPr/>
+        </p:nvSpPr>
+        <p:spPr>
+          <a:xfrm>
+            <a:off x="4673498" y="2788920"/>
+            <a:ext cx="2844698" cy="457200"/>
+          </a:xfrm>
+          <a:prstGeom prst="rect">
+            <a:avLst/>
+          </a:prstGeom>
+          <a:noFill/>
+        </p:spPr>
+        <p:txBody>
+          <a:bodyPr wrap="square" anchor="t">
+            <a:spAutoFit/>
+          </a:bodyPr>
+          <a:lstStyle/>
+          <a:p>
+            <a:pPr algn="l">
+              <a:lnSpc>
+                <a:spcPct val="100000"/>
+              </a:lnSpc>
+            </a:pPr>
+            <a:r>
+              <a:rPr sz="1200" b="1">
+                <a:solidFill>
+                  <a:srgbClr val="00FF41"/>
+                </a:solidFill>
+                <a:latin typeface="Courier New"/>
+              </a:rPr>
+              <a:t>AGENTS CATCH</a:t>
+            </a:r>
+          </a:p>
+        </p:txBody>
+      </p:sp>
+      <p:sp>
+        <p:nvSpPr>
+          <p:cNvPr id="13" name="TextBox 12"/>
+          <p:cNvSpPr txBox="1"/>
+          <p:nvPr/>
+        </p:nvSpPr>
+        <p:spPr>
+          <a:xfrm>
+            <a:off x="4673498" y="3246120"/>
+            <a:ext cx="2844698" cy="822960"/>
+          </a:xfrm>
+          <a:prstGeom prst="rect">
+            <a:avLst/>
+          </a:prstGeom>
+          <a:noFill/>
+        </p:spPr>
+        <p:txBody>
+          <a:bodyPr wrap="square" anchor="t">
+            <a:spAutoFit/>
+          </a:bodyPr>
+          <a:lstStyle/>
+          <a:p>
+            <a:pPr algn="l">
+              <a:lnSpc>
+                <a:spcPct val="100000"/>
+              </a:lnSpc>
+            </a:pPr>
+            <a:r>
+              <a:rPr sz="2000" b="1">
+                <a:solidFill>
+                  <a:srgbClr val="F5F7FA"/>
+                </a:solidFill>
+                <a:latin typeface="Arial"/>
+              </a:rPr>
+              <a:t>Breakage &amp; coverage</a:t>
+            </a:r>
+          </a:p>
+        </p:txBody>
+      </p:sp>
+      <p:sp>
+        <p:nvSpPr>
+          <p:cNvPr id="14" name="TextBox 13"/>
+          <p:cNvSpPr txBox="1"/>
+          <p:nvPr/>
+        </p:nvSpPr>
+        <p:spPr>
+          <a:xfrm>
+            <a:off x="4673498" y="4114800"/>
+            <a:ext cx="2844698" cy="1554480"/>
+          </a:xfrm>
+          <a:prstGeom prst="rect">
+            <a:avLst/>
+          </a:prstGeom>
+          <a:noFill/>
+        </p:spPr>
+        <p:txBody>
+          <a:bodyPr wrap="square" anchor="t">
+            <a:spAutoFit/>
+          </a:bodyPr>
+          <a:lstStyle/>
+          <a:p>
+            <a:pPr algn="l">
+              <a:lnSpc>
+                <a:spcPct val="110000"/>
+              </a:lnSpc>
+            </a:pPr>
+            <a:r>
+              <a:rPr sz="1500" b="0">
+                <a:solidFill>
+                  <a:srgbClr val="8A94A6"/>
+                </a:solidFill>
+                <a:latin typeface="Arial"/>
+              </a:rPr>
+              <a:t>Dead ends, broken buttons, missing states, every link - fast and repeatable. No fatigue, no mercy.</a:t>
+            </a:r>
+          </a:p>
+        </p:txBody>
+      </p:sp>
+      <p:sp>
+        <p:nvSpPr>
+          <p:cNvPr id="15" name="Rounded Rectangle 14"/>
+          <p:cNvSpPr/>
+          <p:nvPr/>
+        </p:nvSpPr>
+        <p:spPr>
+          <a:xfrm>
+            <a:off x="8158276" y="2468880"/>
+            <a:ext cx="3393338" cy="3383280"/>
+          </a:xfrm>
+          <a:prstGeom prst="roundRect">
+            <a:avLst/>
+          </a:prstGeom>
+          <a:solidFill>
+            <a:srgbClr val="151B26"/>
+          </a:solidFill>
+          <a:ln>
+            <a:noFill/>
+          </a:ln>
+          <a:effectLst/>
+        </p:spPr>
+        <p:style>
+          <a:lnRef idx="1">
+            <a:schemeClr val="accent1"/>
+          </a:lnRef>
+          <a:fillRef idx="3">
+            <a:schemeClr val="accent1"/>
+          </a:fillRef>
+          <a:effectRef idx="2">
+            <a:schemeClr val="accent1"/>
+          </a:effectRef>
+          <a:fontRef idx="minor">
+            <a:schemeClr val="lt1"/>
+          </a:fontRef>
+        </p:style>
+        <p:txBody>
+          <a:bodyPr rtlCol="0" anchor="ctr"/>
+          <a:lstStyle/>
+          <a:p>
+            <a:pPr algn="ctr"/>
+          </a:p>
+        </p:txBody>
+      </p:sp>
+      <p:sp>
+        <p:nvSpPr>
+          <p:cNvPr id="16" name="Rectangle 15"/>
+          <p:cNvSpPr/>
+          <p:nvPr/>
+        </p:nvSpPr>
+        <p:spPr>
+          <a:xfrm>
+            <a:off x="8158276" y="2468880"/>
+            <a:ext cx="3393338" cy="82296"/>
+          </a:xfrm>
+          <a:prstGeom prst="rect">
+            <a:avLst/>
+          </a:prstGeom>
+          <a:solidFill>
+            <a:srgbClr val="00FF41"/>
+          </a:solidFill>
+          <a:ln>
+            <a:noFill/>
+          </a:ln>
+          <a:effectLst/>
+        </p:spPr>
+        <p:style>
+          <a:lnRef idx="1">
+            <a:schemeClr val="accent1"/>
+          </a:lnRef>
+          <a:fillRef idx="3">
+            <a:schemeClr val="accent1"/>
+          </a:fillRef>
+          <a:effectRef idx="2">
+            <a:schemeClr val="accent1"/>
+          </a:effectRef>
+          <a:fontRef idx="minor">
+            <a:schemeClr val="lt1"/>
+          </a:fontRef>
+        </p:style>
+        <p:txBody>
+          <a:bodyPr rtlCol="0" anchor="ctr"/>
+          <a:lstStyle/>
+          <a:p>
+            <a:pPr algn="ctr"/>
+          </a:p>
+        </p:txBody>
+      </p:sp>
+      <p:sp>
+        <p:nvSpPr>
+          <p:cNvPr id="17" name="TextBox 16"/>
+          <p:cNvSpPr txBox="1"/>
+          <p:nvPr/>
+        </p:nvSpPr>
+        <p:spPr>
+          <a:xfrm>
+            <a:off x="8432596" y="2788920"/>
+            <a:ext cx="2844698" cy="457200"/>
+          </a:xfrm>
+          <a:prstGeom prst="rect">
+            <a:avLst/>
+          </a:prstGeom>
+          <a:noFill/>
+        </p:spPr>
+        <p:txBody>
+          <a:bodyPr wrap="square" anchor="t">
+            <a:spAutoFit/>
+          </a:bodyPr>
+          <a:lstStyle/>
+          <a:p>
+            <a:pPr algn="l">
+              <a:lnSpc>
+                <a:spcPct val="100000"/>
+              </a:lnSpc>
+            </a:pPr>
+            <a:r>
+              <a:rPr sz="1200" b="1">
+                <a:solidFill>
+                  <a:srgbClr val="00FF41"/>
+                </a:solidFill>
+                <a:latin typeface="Courier New"/>
+              </a:rPr>
+              <a:t>AGENTS MISS</a:t>
+            </a:r>
+          </a:p>
+        </p:txBody>
+      </p:sp>
+      <p:sp>
+        <p:nvSpPr>
+          <p:cNvPr id="18" name="TextBox 17"/>
+          <p:cNvSpPr txBox="1"/>
+          <p:nvPr/>
+        </p:nvSpPr>
+        <p:spPr>
+          <a:xfrm>
+            <a:off x="8432596" y="3246120"/>
+            <a:ext cx="2844698" cy="822960"/>
+          </a:xfrm>
+          <a:prstGeom prst="rect">
+            <a:avLst/>
+          </a:prstGeom>
+          <a:noFill/>
+        </p:spPr>
+        <p:txBody>
+          <a:bodyPr wrap="square" anchor="t">
+            <a:spAutoFit/>
+          </a:bodyPr>
+          <a:lstStyle/>
+          <a:p>
+            <a:pPr algn="l">
+              <a:lnSpc>
+                <a:spcPct val="100000"/>
+              </a:lnSpc>
+            </a:pPr>
+            <a:r>
+              <a:rPr sz="2000" b="1">
+                <a:solidFill>
+                  <a:srgbClr val="F5F7FA"/>
+                </a:solidFill>
+                <a:latin typeface="Arial"/>
+              </a:rPr>
+              <a:t>Being human</a:t>
+            </a:r>
+          </a:p>
+        </p:txBody>
+      </p:sp>
+      <p:sp>
+        <p:nvSpPr>
+          <p:cNvPr id="19" name="TextBox 18"/>
+          <p:cNvSpPr txBox="1"/>
+          <p:nvPr/>
+        </p:nvSpPr>
+        <p:spPr>
+          <a:xfrm>
+            <a:off x="8432596" y="4114800"/>
+            <a:ext cx="2844698" cy="1554480"/>
+          </a:xfrm>
+          <a:prstGeom prst="rect">
+            <a:avLst/>
+          </a:prstGeom>
+          <a:noFill/>
+        </p:spPr>
+        <p:txBody>
+          <a:bodyPr wrap="square" anchor="t">
+            <a:spAutoFit/>
+          </a:bodyPr>
+          <a:lstStyle/>
+          <a:p>
+            <a:pPr algn="l">
+              <a:lnSpc>
+                <a:spcPct val="110000"/>
+              </a:lnSpc>
+            </a:pPr>
+            <a:r>
+              <a:rPr sz="1500" b="0">
+                <a:solidFill>
+                  <a:srgbClr val="8A94A6"/>
+                </a:solidFill>
+                <a:latin typeface="Arial"/>
+              </a:rPr>
+              <a:t>They don't feel stuck, don't get embarrassed, don't bring context. Speed is not understanding.</a:t>
+            </a:r>
+          </a:p>
+        </p:txBody>
+      </p:sp>
+      <p:sp>
+        <p:nvSpPr>
+          <p:cNvPr id="20" name="TextBox 19"/>
+          <p:cNvSpPr txBox="1"/>
+          <p:nvPr/>
+        </p:nvSpPr>
+        <p:spPr>
+          <a:xfrm>
+            <a:off x="640080" y="6355080"/>
+            <a:ext cx="10972800" cy="365760"/>
+          </a:xfrm>
+          <a:prstGeom prst="rect">
+            <a:avLst/>
+          </a:prstGeom>
+          <a:noFill/>
+        </p:spPr>
+        <p:txBody>
+          <a:bodyPr wrap="square" anchor="t">
+            <a:spAutoFit/>
+          </a:bodyPr>
+          <a:lstStyle/>
+          <a:p>
+            <a:pPr algn="l">
+              <a:lnSpc>
+                <a:spcPct val="100000"/>
+              </a:lnSpc>
+            </a:pPr>
+            <a:r>
+              <a:rPr sz="1000" b="0">
+                <a:solidFill>
+                  <a:srgbClr val="5A6474"/>
+                </a:solidFill>
+                <a:latin typeface="Courier New"/>
+              </a:rPr>
+              <a:t>Good Code, Good Vibes · TECHIE 1121 · Cornell Tech · Summer 2026</a:t>
+            </a:r>
+          </a:p>
+        </p:txBody>
+      </p:sp>
+    </p:spTree>
+  </p:cSld>
+  <p:clrMapOvr>
+    <a:masterClrMapping/>
+  </p:clrMapOvr>
+</p:sld>
+</file>
+
+<file path=ppt/slides/slide13.xml><?xml version="1.0" encoding="utf-8"?>
+<p:sld xmlns:a="http://schemas.openxmlformats.org/drawingml/2006/main" xmlns:p="http://schemas.openxmlformats.org/presentationml/2006/main" xmlns:r="http://schemas.openxmlformats.org/officeDocument/2006/relationships">
+  <p:cSld>
+    <p:bg>
+      <p:bgPr>
+        <a:solidFill>
+          <a:srgbClr val="0B0E14"/>
+        </a:solidFill>
+        <a:effectLst/>
+      </p:bgPr>
+    </p:bg>
+    <p:spTree>
+      <p:nvGrpSpPr>
+        <p:cNvPr id="1" name=""/>
+        <p:cNvGrpSpPr/>
+        <p:nvPr/>
+      </p:nvGrpSpPr>
+      <p:grpSpPr/>
+      <p:sp>
+        <p:nvSpPr>
+          <p:cNvPr id="2" name="TextBox 1"/>
+          <p:cNvSpPr txBox="1"/>
+          <p:nvPr/>
+        </p:nvSpPr>
+        <p:spPr>
+          <a:xfrm>
+            <a:off x="640080" y="502920"/>
+            <a:ext cx="10058400" cy="365760"/>
+          </a:xfrm>
+          <a:prstGeom prst="rect">
+            <a:avLst/>
+          </a:prstGeom>
+          <a:noFill/>
+        </p:spPr>
+        <p:txBody>
+          <a:bodyPr wrap="square" anchor="t">
+            <a:spAutoFit/>
+          </a:bodyPr>
+          <a:lstStyle/>
+          <a:p>
+            <a:pPr algn="l">
+              <a:lnSpc>
+                <a:spcPct val="100000"/>
+              </a:lnSpc>
+            </a:pPr>
+            <a:r>
+              <a:rPr sz="1300" b="1">
+                <a:solidFill>
+                  <a:srgbClr val="00FF41"/>
+                </a:solidFill>
+                <a:latin typeface="Courier New"/>
+              </a:rPr>
+              <a:t>THE DELIVERABLE - ONE VIDEO</a:t>
+            </a:r>
+          </a:p>
+        </p:txBody>
+      </p:sp>
+      <p:sp>
+        <p:nvSpPr>
+          <p:cNvPr id="3" name="Rectangle 2"/>
+          <p:cNvSpPr/>
+          <p:nvPr/>
+        </p:nvSpPr>
+        <p:spPr>
+          <a:xfrm>
+            <a:off x="640080" y="932688"/>
+            <a:ext cx="822960" cy="73152"/>
+          </a:xfrm>
+          <a:prstGeom prst="rect">
+            <a:avLst/>
+          </a:prstGeom>
+          <a:solidFill>
+            <a:srgbClr val="00FF41"/>
+          </a:solidFill>
+          <a:ln>
+            <a:noFill/>
+          </a:ln>
+          <a:effectLst/>
+        </p:spPr>
+        <p:style>
+          <a:lnRef idx="1">
+            <a:schemeClr val="accent1"/>
+          </a:lnRef>
+          <a:fillRef idx="3">
+            <a:schemeClr val="accent1"/>
+          </a:fillRef>
+          <a:effectRef idx="2">
+            <a:schemeClr val="accent1"/>
+          </a:effectRef>
+          <a:fontRef idx="minor">
+            <a:schemeClr val="lt1"/>
+          </a:fontRef>
+        </p:style>
+        <p:txBody>
+          <a:bodyPr rtlCol="0" anchor="ctr"/>
+          <a:lstStyle/>
+          <a:p>
+            <a:pPr algn="ctr"/>
+          </a:p>
+        </p:txBody>
+      </p:sp>
+      <p:sp>
+        <p:nvSpPr>
+          <p:cNvPr id="4" name="TextBox 3"/>
+          <p:cNvSpPr txBox="1"/>
+          <p:nvPr/>
+        </p:nvSpPr>
+        <p:spPr>
+          <a:xfrm>
+            <a:off x="640080" y="1188720"/>
+            <a:ext cx="10972800" cy="914400"/>
+          </a:xfrm>
+          <a:prstGeom prst="rect">
+            <a:avLst/>
+          </a:prstGeom>
+          <a:noFill/>
+        </p:spPr>
+        <p:txBody>
+          <a:bodyPr wrap="square" anchor="t">
+            <a:spAutoFit/>
+          </a:bodyPr>
+          <a:lstStyle/>
+          <a:p>
+            <a:pPr algn="l">
+              <a:lnSpc>
+                <a:spcPct val="100000"/>
+              </a:lnSpc>
+            </a:pPr>
+            <a:r>
+              <a:rPr sz="3400" b="1">
+                <a:solidFill>
+                  <a:srgbClr val="F5F7FA"/>
+                </a:solidFill>
+                <a:latin typeface="Arial"/>
+              </a:rPr>
+              <a:t>Compress hours of testing into 5 minutes</a:t>
+            </a:r>
+          </a:p>
+        </p:txBody>
+      </p:sp>
+      <p:sp>
+        <p:nvSpPr>
+          <p:cNvPr id="5" name="TextBox 4"/>
+          <p:cNvSpPr txBox="1"/>
+          <p:nvPr/>
+        </p:nvSpPr>
+        <p:spPr>
+          <a:xfrm>
+            <a:off x="822960" y="2286000"/>
+            <a:ext cx="10515600" cy="3840480"/>
+          </a:xfrm>
+          <a:prstGeom prst="rect">
+            <a:avLst/>
+          </a:prstGeom>
+          <a:noFill/>
+        </p:spPr>
+        <p:txBody>
+          <a:bodyPr wrap="square" anchor="t">
+            <a:spAutoFit/>
+          </a:bodyPr>
+          <a:lstStyle/>
+          <a:p>
+            <a:pPr algn="l">
+              <a:lnSpc>
+                <a:spcPct val="135000"/>
+              </a:lnSpc>
+            </a:pPr>
+            <a:r>
+              <a:rPr sz="2000" b="1">
+                <a:solidFill>
+                  <a:srgbClr val="00FF41"/>
+                </a:solidFill>
+                <a:latin typeface="Arial"/>
+              </a:rPr>
+              <a:t>✓  </a:t>
+            </a:r>
+            <a:r>
+              <a:rPr sz="2000" b="0">
+                <a:solidFill>
+                  <a:srgbClr val="F5F7FA"/>
+                </a:solidFill>
+                <a:latin typeface="Arial"/>
+              </a:rPr>
+              <a:t>Record &gt;= 20 min of real testing (2 human tests + 1 agent test).</a:t>
+            </a:r>
+          </a:p>
+          <a:p>
+            <a:pPr algn="l">
+              <a:lnSpc>
+                <a:spcPct val="135000"/>
+              </a:lnSpc>
+            </a:pPr>
+            <a:r>
+              <a:rPr sz="2000" b="1">
+                <a:solidFill>
+                  <a:srgbClr val="00FF41"/>
+                </a:solidFill>
+                <a:latin typeface="Arial"/>
+              </a:rPr>
+              <a:t>✓  </a:t>
+            </a:r>
+            <a:r>
+              <a:rPr sz="2000" b="0">
+                <a:solidFill>
+                  <a:srgbClr val="F5F7FA"/>
+                </a:solidFill>
+                <a:latin typeface="Arial"/>
+              </a:rPr>
+              <a:t>Cut and speed up to &lt;= 5 minutes - keep the moments that show a finding.</a:t>
+            </a:r>
+          </a:p>
+          <a:p>
+            <a:pPr algn="l">
+              <a:lnSpc>
+                <a:spcPct val="135000"/>
+              </a:lnSpc>
+            </a:pPr>
+            <a:r>
+              <a:rPr sz="2000" b="1">
+                <a:solidFill>
+                  <a:srgbClr val="00FF41"/>
+                </a:solidFill>
+                <a:latin typeface="Arial"/>
+              </a:rPr>
+              <a:t>✓  </a:t>
+            </a:r>
+            <a:r>
+              <a:rPr sz="2000" b="0">
+                <a:solidFill>
+                  <a:srgbClr val="F5F7FA"/>
+                </a:solidFill>
+                <a:latin typeface="Arial"/>
+              </a:rPr>
+              <a:t>Subtitles required (YouTube auto-captions are fine).</a:t>
+            </a:r>
+          </a:p>
+          <a:p>
+            <a:pPr algn="l">
+              <a:lnSpc>
+                <a:spcPct val="135000"/>
+              </a:lnSpc>
+            </a:pPr>
+            <a:r>
+              <a:rPr sz="2000" b="1">
+                <a:solidFill>
+                  <a:srgbClr val="00FF41"/>
+                </a:solidFill>
+                <a:latin typeface="Arial"/>
+              </a:rPr>
+              <a:t>✓  </a:t>
+            </a:r>
+            <a:r>
+              <a:rPr sz="2000" b="0">
+                <a:solidFill>
+                  <a:srgbClr val="F5F7FA"/>
+                </a:solidFill>
+                <a:latin typeface="Arial"/>
+              </a:rPr>
+              <a:t>End with findings slides + your spoken summary.</a:t>
+            </a:r>
+          </a:p>
+          <a:p>
+            <a:pPr algn="l">
+              <a:lnSpc>
+                <a:spcPct val="135000"/>
+              </a:lnSpc>
+            </a:pPr>
+            <a:r>
+              <a:rPr sz="2000" b="1">
+                <a:solidFill>
+                  <a:srgbClr val="00FF41"/>
+                </a:solidFill>
+                <a:latin typeface="Arial"/>
+              </a:rPr>
+              <a:t>✓  </a:t>
+            </a:r>
+            <a:r>
+              <a:rPr sz="2000" b="0">
+                <a:solidFill>
+                  <a:srgbClr val="F5F7FA"/>
+                </a:solidFill>
+                <a:latin typeface="Arial"/>
+              </a:rPr>
+              <a:t>Host unlisted on YouTube; link it in vibe-report.md. No coding today.</a:t>
+            </a:r>
+          </a:p>
+        </p:txBody>
+      </p:sp>
+      <p:sp>
+        <p:nvSpPr>
+          <p:cNvPr id="6" name="TextBox 5"/>
+          <p:cNvSpPr txBox="1"/>
+          <p:nvPr/>
+        </p:nvSpPr>
+        <p:spPr>
+          <a:xfrm>
+            <a:off x="640080" y="6355080"/>
+            <a:ext cx="10972800" cy="365760"/>
+          </a:xfrm>
+          <a:prstGeom prst="rect">
+            <a:avLst/>
+          </a:prstGeom>
+          <a:noFill/>
+        </p:spPr>
+        <p:txBody>
+          <a:bodyPr wrap="square" anchor="t">
+            <a:spAutoFit/>
+          </a:bodyPr>
+          <a:lstStyle/>
+          <a:p>
+            <a:pPr algn="l">
+              <a:lnSpc>
+                <a:spcPct val="100000"/>
+              </a:lnSpc>
+            </a:pPr>
+            <a:r>
+              <a:rPr sz="1000" b="0">
+                <a:solidFill>
+                  <a:srgbClr val="5A6474"/>
+                </a:solidFill>
+                <a:latin typeface="Courier New"/>
+              </a:rPr>
+              <a:t>Good Code, Good Vibes · TECHIE 1121 · Cornell Tech · Summer 2026</a:t>
+            </a:r>
+          </a:p>
+        </p:txBody>
+      </p:sp>
+    </p:spTree>
+  </p:cSld>
+  <p:clrMapOvr>
+    <a:masterClrMapping/>
+  </p:clrMapOvr>
+</p:sld>
+</file>
+
+<file path=ppt/slides/slide14.xml><?xml version="1.0" encoding="utf-8"?>
+<p:sld xmlns:a="http://schemas.openxmlformats.org/drawingml/2006/main" xmlns:p="http://schemas.openxmlformats.org/presentationml/2006/main" xmlns:r="http://schemas.openxmlformats.org/officeDocument/2006/relationships">
+  <p:cSld>
+    <p:bg>
+      <p:bgPr>
+        <a:solidFill>
+          <a:srgbClr val="0B0E14"/>
+        </a:solidFill>
+        <a:effectLst/>
+      </p:bgPr>
+    </p:bg>
+    <p:spTree>
+      <p:nvGrpSpPr>
+        <p:cNvPr id="1" name=""/>
+        <p:cNvGrpSpPr/>
+        <p:nvPr/>
+      </p:nvGrpSpPr>
+      <p:grpSpPr/>
+      <p:sp>
+        <p:nvSpPr>
+          <p:cNvPr id="2" name="TextBox 1"/>
+          <p:cNvSpPr txBox="1"/>
+          <p:nvPr/>
+        </p:nvSpPr>
+        <p:spPr>
+          <a:xfrm>
+            <a:off x="640080" y="502920"/>
+            <a:ext cx="10058400" cy="365760"/>
+          </a:xfrm>
+          <a:prstGeom prst="rect">
+            <a:avLst/>
+          </a:prstGeom>
+          <a:noFill/>
+        </p:spPr>
+        <p:txBody>
+          <a:bodyPr wrap="square" anchor="t">
+            <a:spAutoFit/>
+          </a:bodyPr>
+          <a:lstStyle/>
+          <a:p>
+            <a:pPr algn="l">
+              <a:lnSpc>
+                <a:spcPct val="100000"/>
+              </a:lnSpc>
+            </a:pPr>
+            <a:r>
+              <a:rPr sz="1300" b="1">
+                <a:solidFill>
+                  <a:srgbClr val="00FF41"/>
+                </a:solidFill>
+                <a:latin typeface="Courier New"/>
+              </a:rPr>
+              <a:t>ACTIVITY - TODAY</a:t>
+            </a:r>
+          </a:p>
+        </p:txBody>
+      </p:sp>
+      <p:sp>
+        <p:nvSpPr>
+          <p:cNvPr id="3" name="Rectangle 2"/>
+          <p:cNvSpPr/>
+          <p:nvPr/>
+        </p:nvSpPr>
+        <p:spPr>
+          <a:xfrm>
+            <a:off x="640080" y="932688"/>
+            <a:ext cx="822960" cy="73152"/>
+          </a:xfrm>
+          <a:prstGeom prst="rect">
+            <a:avLst/>
+          </a:prstGeom>
+          <a:solidFill>
+            <a:srgbClr val="00FF41"/>
+          </a:solidFill>
+          <a:ln>
+            <a:noFill/>
+          </a:ln>
+          <a:effectLst/>
+        </p:spPr>
+        <p:style>
+          <a:lnRef idx="1">
+            <a:schemeClr val="accent1"/>
+          </a:lnRef>
+          <a:fillRef idx="3">
+            <a:schemeClr val="accent1"/>
+          </a:fillRef>
+          <a:effectRef idx="2">
+            <a:schemeClr val="accent1"/>
+          </a:effectRef>
+          <a:fontRef idx="minor">
+            <a:schemeClr val="lt1"/>
+          </a:fontRef>
+        </p:style>
+        <p:txBody>
+          <a:bodyPr rtlCol="0" anchor="ctr"/>
+          <a:lstStyle/>
+          <a:p>
+            <a:pPr algn="ctr"/>
+          </a:p>
+        </p:txBody>
+      </p:sp>
+      <p:sp>
+        <p:nvSpPr>
+          <p:cNvPr id="4" name="TextBox 3"/>
+          <p:cNvSpPr txBox="1"/>
+          <p:nvPr/>
+        </p:nvSpPr>
+        <p:spPr>
+          <a:xfrm>
+            <a:off x="640080" y="1325880"/>
+            <a:ext cx="10972800" cy="1828800"/>
+          </a:xfrm>
+          <a:prstGeom prst="rect">
+            <a:avLst/>
+          </a:prstGeom>
+          <a:noFill/>
+        </p:spPr>
+        <p:txBody>
+          <a:bodyPr wrap="square" anchor="t">
+            <a:spAutoFit/>
+          </a:bodyPr>
+          <a:lstStyle/>
+          <a:p>
+            <a:pPr algn="l">
+              <a:lnSpc>
+                <a:spcPct val="105000"/>
+              </a:lnSpc>
+            </a:pPr>
+            <a:r>
+              <a:rPr sz="3800" b="1">
+                <a:solidFill>
+                  <a:srgbClr val="F5F7FA"/>
+                </a:solidFill>
+                <a:latin typeface="Arial"/>
+              </a:rPr>
+              <a:t>Test your team's Project 2 prototype - on your own.</a:t>
+            </a:r>
+          </a:p>
+        </p:txBody>
+      </p:sp>
+      <p:sp>
+        <p:nvSpPr>
+          <p:cNvPr id="5" name="TextBox 4"/>
+          <p:cNvSpPr txBox="1"/>
+          <p:nvPr/>
+        </p:nvSpPr>
+        <p:spPr>
+          <a:xfrm>
+            <a:off x="658368" y="3611880"/>
+            <a:ext cx="10972800" cy="1737360"/>
+          </a:xfrm>
+          <a:prstGeom prst="rect">
+            <a:avLst/>
+          </a:prstGeom>
+          <a:noFill/>
+        </p:spPr>
+        <p:txBody>
+          <a:bodyPr wrap="square" anchor="t">
+            <a:spAutoFit/>
+          </a:bodyPr>
+          <a:lstStyle/>
+          <a:p>
+            <a:pPr algn="l">
+              <a:lnSpc>
+                <a:spcPct val="135000"/>
+              </a:lnSpc>
+            </a:pPr>
+            <a:r>
+              <a:rPr sz="1900" b="1">
+                <a:solidFill>
+                  <a:srgbClr val="00FF41"/>
+                </a:solidFill>
+                <a:latin typeface="Arial"/>
+              </a:rPr>
+              <a:t>→  </a:t>
+            </a:r>
+            <a:r>
+              <a:rPr sz="1900" b="0">
+                <a:solidFill>
+                  <a:srgbClr val="8A94A6"/>
+                </a:solidFill>
+                <a:latin typeface="Arial"/>
+              </a:rPr>
+              <a:t>Part A: 2 real testers (not teammates), think-aloud, ~10 min each, screen-recorded.</a:t>
+            </a:r>
+          </a:p>
+          <a:p>
+            <a:pPr algn="l">
+              <a:lnSpc>
+                <a:spcPct val="135000"/>
+              </a:lnSpc>
+            </a:pPr>
+            <a:r>
+              <a:rPr sz="1900" b="1">
+                <a:solidFill>
+                  <a:srgbClr val="00FF41"/>
+                </a:solidFill>
+                <a:latin typeface="Arial"/>
+              </a:rPr>
+              <a:t>→  </a:t>
+            </a:r>
+            <a:r>
+              <a:rPr sz="1900" b="0">
+                <a:solidFill>
+                  <a:srgbClr val="8A94A6"/>
+                </a:solidFill>
+                <a:latin typeface="Arial"/>
+              </a:rPr>
+              <a:t>Part B: 1 agent takes browser control of the live site; log your prompts.</a:t>
+            </a:r>
+          </a:p>
+          <a:p>
+            <a:pPr algn="l">
+              <a:lnSpc>
+                <a:spcPct val="135000"/>
+              </a:lnSpc>
+            </a:pPr>
+            <a:r>
+              <a:rPr sz="1900" b="1">
+                <a:solidFill>
+                  <a:srgbClr val="00FF41"/>
+                </a:solidFill>
+                <a:latin typeface="Arial"/>
+              </a:rPr>
+              <a:t>→  </a:t>
+            </a:r>
+            <a:r>
+              <a:rPr sz="1900" b="0">
+                <a:solidFill>
+                  <a:srgbClr val="8A94A6"/>
+                </a:solidFill>
+                <a:latin typeface="Arial"/>
+              </a:rPr>
+              <a:t>Edit it into one &lt;=5-min subtitled video, then write up human vs agent in vibe-report.md.</a:t>
+            </a:r>
+          </a:p>
+        </p:txBody>
+      </p:sp>
+      <p:sp>
+        <p:nvSpPr>
+          <p:cNvPr id="6" name="Rounded Rectangle 5"/>
+          <p:cNvSpPr/>
+          <p:nvPr/>
+        </p:nvSpPr>
+        <p:spPr>
+          <a:xfrm>
+            <a:off x="640080" y="5532120"/>
+            <a:ext cx="10911535" cy="658368"/>
+          </a:xfrm>
+          <a:prstGeom prst="roundRect">
+            <a:avLst/>
+          </a:prstGeom>
+          <a:solidFill>
+            <a:srgbClr val="151B26"/>
+          </a:solidFill>
+          <a:ln w="19050">
+            <a:solidFill>
+              <a:srgbClr val="00FF41"/>
+            </a:solidFill>
+          </a:ln>
+          <a:effectLst/>
+        </p:spPr>
+        <p:style>
+          <a:lnRef idx="1">
+            <a:schemeClr val="accent1"/>
+          </a:lnRef>
+          <a:fillRef idx="3">
+            <a:schemeClr val="accent1"/>
+          </a:fillRef>
+          <a:effectRef idx="2">
+            <a:schemeClr val="accent1"/>
+          </a:effectRef>
+          <a:fontRef idx="minor">
+            <a:schemeClr val="lt1"/>
+          </a:fontRef>
+        </p:style>
+        <p:txBody>
+          <a:bodyPr rtlCol="0" anchor="ctr"/>
+          <a:lstStyle/>
+          <a:p>
+            <a:pPr algn="ctr"/>
+          </a:p>
+        </p:txBody>
+      </p:sp>
+      <p:sp>
+        <p:nvSpPr>
+          <p:cNvPr id="7" name="TextBox 6"/>
+          <p:cNvSpPr txBox="1"/>
+          <p:nvPr/>
+        </p:nvSpPr>
+        <p:spPr>
+          <a:xfrm>
+            <a:off x="914400" y="5532120"/>
+            <a:ext cx="10362895" cy="658368"/>
+          </a:xfrm>
+          <a:prstGeom prst="rect">
+            <a:avLst/>
+          </a:prstGeom>
+          <a:noFill/>
+        </p:spPr>
+        <p:txBody>
+          <a:bodyPr wrap="square" anchor="ctr">
+            <a:spAutoFit/>
+          </a:bodyPr>
+          <a:lstStyle/>
+          <a:p>
+            <a:pPr algn="l">
+              <a:lnSpc>
+                <a:spcPct val="100000"/>
+              </a:lnSpc>
+            </a:pPr>
+            <a:r>
+              <a:rPr sz="1600" b="1">
+                <a:solidFill>
+                  <a:srgbClr val="00FF41"/>
+                </a:solidFill>
+                <a:latin typeface="Arial"/>
+              </a:rPr>
+              <a:t>▶  </a:t>
+            </a:r>
+            <a:r>
+              <a:rPr sz="1600" b="1">
+                <a:solidFill>
+                  <a:srgbClr val="F5F7FA"/>
+                </a:solidFill>
+                <a:latin typeface="Arial"/>
+              </a:rPr>
+              <a:t>Individual - on the group's Project 2 - deliverable = one video + one write-up (due Mon 7/27)</a:t>
+            </a:r>
+          </a:p>
+        </p:txBody>
+      </p:sp>
+      <p:sp>
+        <p:nvSpPr>
+          <p:cNvPr id="8" name="TextBox 7"/>
+          <p:cNvSpPr txBox="1"/>
+          <p:nvPr/>
+        </p:nvSpPr>
+        <p:spPr>
+          <a:xfrm>
+            <a:off x="640080" y="6355080"/>
+            <a:ext cx="10972800" cy="365760"/>
+          </a:xfrm>
+          <a:prstGeom prst="rect">
+            <a:avLst/>
+          </a:prstGeom>
+          <a:noFill/>
+        </p:spPr>
+        <p:txBody>
+          <a:bodyPr wrap="square" anchor="t">
+            <a:spAutoFit/>
+          </a:bodyPr>
+          <a:lstStyle/>
+          <a:p>
+            <a:pPr algn="l">
+              <a:lnSpc>
+                <a:spcPct val="100000"/>
+              </a:lnSpc>
+            </a:pPr>
+            <a:r>
+              <a:rPr sz="1000" b="0">
+                <a:solidFill>
+                  <a:srgbClr val="5A6474"/>
+                </a:solidFill>
+                <a:latin typeface="Courier New"/>
+              </a:rPr>
+              <a:t>Good Code, Good Vibes · TECHIE 1121 · Cornell Tech · Summer 2026</a:t>
+            </a:r>
+          </a:p>
+        </p:txBody>
+      </p:sp>
+    </p:spTree>
+  </p:cSld>
+  <p:clrMapOvr>
+    <a:masterClrMapping/>
+  </p:clrMapOvr>
+</p:sld>
+</file>
+
+<file path=ppt/slides/slide15.xml><?xml version="1.0" encoding="utf-8"?>
+<p:sld xmlns:a="http://schemas.openxmlformats.org/drawingml/2006/main" xmlns:p="http://schemas.openxmlformats.org/presentationml/2006/main" xmlns:r="http://schemas.openxmlformats.org/officeDocument/2006/relationships">
+  <p:cSld>
+    <p:bg>
+      <p:bgPr>
+        <a:solidFill>
+          <a:srgbClr val="0B0E14"/>
+        </a:solidFill>
+        <a:effectLst/>
+      </p:bgPr>
+    </p:bg>
+    <p:spTree>
+      <p:nvGrpSpPr>
+        <p:cNvPr id="1" name=""/>
+        <p:cNvGrpSpPr/>
+        <p:nvPr/>
+      </p:nvGrpSpPr>
+      <p:grpSpPr/>
+      <p:sp>
+        <p:nvSpPr>
+          <p:cNvPr id="2" name="TextBox 1"/>
+          <p:cNvSpPr txBox="1"/>
+          <p:nvPr/>
+        </p:nvSpPr>
+        <p:spPr>
+          <a:xfrm>
+            <a:off x="640080" y="502920"/>
+            <a:ext cx="10058400" cy="365760"/>
+          </a:xfrm>
+          <a:prstGeom prst="rect">
+            <a:avLst/>
+          </a:prstGeom>
+          <a:noFill/>
+        </p:spPr>
+        <p:txBody>
+          <a:bodyPr wrap="square" anchor="t">
+            <a:spAutoFit/>
+          </a:bodyPr>
+          <a:lstStyle/>
+          <a:p>
+            <a:pPr algn="l">
+              <a:lnSpc>
+                <a:spcPct val="100000"/>
+              </a:lnSpc>
+            </a:pPr>
+            <a:r>
+              <a:rPr sz="1300" b="1">
+                <a:solidFill>
+                  <a:srgbClr val="00FF41"/>
+                </a:solidFill>
+                <a:latin typeface="Courier New"/>
+              </a:rPr>
+              <a:t>SOURCES</a:t>
+            </a:r>
+          </a:p>
+        </p:txBody>
+      </p:sp>
+      <p:sp>
+        <p:nvSpPr>
+          <p:cNvPr id="3" name="Rectangle 2"/>
+          <p:cNvSpPr/>
+          <p:nvPr/>
+        </p:nvSpPr>
+        <p:spPr>
+          <a:xfrm>
+            <a:off x="640080" y="932688"/>
+            <a:ext cx="822960" cy="73152"/>
+          </a:xfrm>
+          <a:prstGeom prst="rect">
+            <a:avLst/>
+          </a:prstGeom>
+          <a:solidFill>
+            <a:srgbClr val="00FF41"/>
+          </a:solidFill>
+          <a:ln>
+            <a:noFill/>
+          </a:ln>
+          <a:effectLst/>
+        </p:spPr>
+        <p:style>
+          <a:lnRef idx="1">
+            <a:schemeClr val="accent1"/>
+          </a:lnRef>
+          <a:fillRef idx="3">
+            <a:schemeClr val="accent1"/>
+          </a:fillRef>
+          <a:effectRef idx="2">
+            <a:schemeClr val="accent1"/>
+          </a:effectRef>
+          <a:fontRef idx="minor">
+            <a:schemeClr val="lt1"/>
+          </a:fontRef>
+        </p:style>
+        <p:txBody>
+          <a:bodyPr rtlCol="0" anchor="ctr"/>
+          <a:lstStyle/>
+          <a:p>
+            <a:pPr algn="ctr"/>
+          </a:p>
+        </p:txBody>
+      </p:sp>
+      <p:sp>
+        <p:nvSpPr>
+          <p:cNvPr id="4" name="TextBox 3"/>
+          <p:cNvSpPr txBox="1"/>
+          <p:nvPr/>
+        </p:nvSpPr>
+        <p:spPr>
+          <a:xfrm>
+            <a:off x="640080" y="1024128"/>
+            <a:ext cx="10972800" cy="731520"/>
+          </a:xfrm>
+          <a:prstGeom prst="rect">
+            <a:avLst/>
+          </a:prstGeom>
+          <a:noFill/>
+        </p:spPr>
+        <p:txBody>
+          <a:bodyPr wrap="square" anchor="t">
+            <a:spAutoFit/>
+          </a:bodyPr>
+          <a:lstStyle/>
+          <a:p>
+            <a:pPr algn="l">
+              <a:lnSpc>
+                <a:spcPct val="100000"/>
+              </a:lnSpc>
+            </a:pPr>
+            <a:r>
+              <a:rPr sz="2800" b="1">
+                <a:solidFill>
+                  <a:srgbClr val="F5F7FA"/>
+                </a:solidFill>
+                <a:latin typeface="Arial"/>
+              </a:rPr>
+              <a:t>Watch, test, cite</a:t>
+            </a:r>
+          </a:p>
+        </p:txBody>
+      </p:sp>
+      <p:sp>
+        <p:nvSpPr>
+          <p:cNvPr id="5" name="TextBox 4"/>
+          <p:cNvSpPr txBox="1"/>
+          <p:nvPr/>
+        </p:nvSpPr>
+        <p:spPr>
+          <a:xfrm>
+            <a:off x="640080" y="1874519"/>
+            <a:ext cx="10911535" cy="402336"/>
+          </a:xfrm>
+          <a:prstGeom prst="rect">
+            <a:avLst/>
+          </a:prstGeom>
+          <a:noFill/>
+        </p:spPr>
+        <p:txBody>
+          <a:bodyPr wrap="square" anchor="t">
+            <a:spAutoFit/>
+          </a:bodyPr>
+          <a:lstStyle/>
+          <a:p>
+            <a:pPr algn="l">
+              <a:lnSpc>
+                <a:spcPct val="100000"/>
+              </a:lnSpc>
+            </a:pPr>
+            <a:r>
+              <a:rPr sz="1250" b="1">
+                <a:solidFill>
+                  <a:srgbClr val="F5F7FA"/>
+                </a:solidFill>
+                <a:latin typeface="Arial"/>
+              </a:rPr>
+              <a:t>Nielsen - 10 Usability Heuristics (NN/g)  —  </a:t>
+            </a:r>
+            <a:r>
+              <a:rPr sz="1100" b="0">
+                <a:solidFill>
+                  <a:srgbClr val="00FF41"/>
+                </a:solidFill>
+                <a:latin typeface="Courier New"/>
+              </a:rPr>
+              <a:t>nngroup.com/articles/ten-usability-heuristics/</a:t>
+            </a:r>
+          </a:p>
+        </p:txBody>
+      </p:sp>
+      <p:sp>
+        <p:nvSpPr>
+          <p:cNvPr id="6" name="TextBox 5"/>
+          <p:cNvSpPr txBox="1"/>
+          <p:nvPr/>
+        </p:nvSpPr>
+        <p:spPr>
+          <a:xfrm>
+            <a:off x="640080" y="2276855"/>
+            <a:ext cx="10911535" cy="402336"/>
+          </a:xfrm>
+          <a:prstGeom prst="rect">
+            <a:avLst/>
+          </a:prstGeom>
+          <a:noFill/>
+        </p:spPr>
+        <p:txBody>
+          <a:bodyPr wrap="square" anchor="t">
+            <a:spAutoFit/>
+          </a:bodyPr>
+          <a:lstStyle/>
+          <a:p>
+            <a:pPr algn="l">
+              <a:lnSpc>
+                <a:spcPct val="100000"/>
+              </a:lnSpc>
+            </a:pPr>
+            <a:r>
+              <a:rPr sz="1250" b="1">
+                <a:solidFill>
+                  <a:srgbClr val="F5F7FA"/>
+                </a:solidFill>
+                <a:latin typeface="Arial"/>
+              </a:rPr>
+              <a:t>UEQ - User Experience Questionnaire  —  </a:t>
+            </a:r>
+            <a:r>
+              <a:rPr sz="1100" b="0">
+                <a:solidFill>
+                  <a:srgbClr val="00FF41"/>
+                </a:solidFill>
+                <a:latin typeface="Courier New"/>
+              </a:rPr>
+              <a:t>ueq-online.org</a:t>
+            </a:r>
+          </a:p>
+        </p:txBody>
+      </p:sp>
+      <p:sp>
+        <p:nvSpPr>
+          <p:cNvPr id="7" name="TextBox 6"/>
+          <p:cNvSpPr txBox="1"/>
+          <p:nvPr/>
+        </p:nvSpPr>
+        <p:spPr>
+          <a:xfrm>
+            <a:off x="640080" y="2679191"/>
+            <a:ext cx="10911535" cy="402336"/>
+          </a:xfrm>
+          <a:prstGeom prst="rect">
+            <a:avLst/>
+          </a:prstGeom>
+          <a:noFill/>
+        </p:spPr>
+        <p:txBody>
+          <a:bodyPr wrap="square" anchor="t">
+            <a:spAutoFit/>
+          </a:bodyPr>
+          <a:lstStyle/>
+          <a:p>
+            <a:pPr algn="l">
+              <a:lnSpc>
+                <a:spcPct val="100000"/>
+              </a:lnSpc>
+            </a:pPr>
+            <a:r>
+              <a:rPr sz="1250" b="1">
+                <a:solidFill>
+                  <a:srgbClr val="F5F7FA"/>
+                </a:solidFill>
+                <a:latin typeface="Arial"/>
+              </a:rPr>
+              <a:t>Usability test demo video  —  </a:t>
+            </a:r>
+            <a:r>
+              <a:rPr sz="1100" b="0">
+                <a:solidFill>
+                  <a:srgbClr val="00FF41"/>
+                </a:solidFill>
+                <a:latin typeface="Courier New"/>
+              </a:rPr>
+              <a:t>youtube.com/watch?v=EH7Fx9rpC0c</a:t>
+            </a:r>
+          </a:p>
+        </p:txBody>
+      </p:sp>
+      <p:sp>
+        <p:nvSpPr>
+          <p:cNvPr id="8" name="TextBox 7"/>
+          <p:cNvSpPr txBox="1"/>
+          <p:nvPr/>
+        </p:nvSpPr>
+        <p:spPr>
+          <a:xfrm>
+            <a:off x="640080" y="3081527"/>
+            <a:ext cx="10911535" cy="402336"/>
+          </a:xfrm>
+          <a:prstGeom prst="rect">
+            <a:avLst/>
+          </a:prstGeom>
+          <a:noFill/>
+        </p:spPr>
+        <p:txBody>
+          <a:bodyPr wrap="square" anchor="t">
+            <a:spAutoFit/>
+          </a:bodyPr>
+          <a:lstStyle/>
+          <a:p>
+            <a:pPr algn="l">
+              <a:lnSpc>
+                <a:spcPct val="100000"/>
+              </a:lnSpc>
+            </a:pPr>
+            <a:r>
+              <a:rPr sz="1250" b="1">
+                <a:solidFill>
+                  <a:srgbClr val="F5F7FA"/>
+                </a:solidFill>
+                <a:latin typeface="Arial"/>
+              </a:rPr>
+              <a:t>Agent browser control - browser-use  —  </a:t>
+            </a:r>
+            <a:r>
+              <a:rPr sz="1100" b="0">
+                <a:solidFill>
+                  <a:srgbClr val="00FF41"/>
+                </a:solidFill>
+                <a:latin typeface="Courier New"/>
+              </a:rPr>
+              <a:t>github.com/browser-use/browser-use</a:t>
+            </a:r>
+          </a:p>
+        </p:txBody>
+      </p:sp>
+      <p:sp>
+        <p:nvSpPr>
+          <p:cNvPr id="9" name="TextBox 8"/>
+          <p:cNvSpPr txBox="1"/>
+          <p:nvPr/>
+        </p:nvSpPr>
+        <p:spPr>
+          <a:xfrm>
+            <a:off x="640080" y="3483863"/>
+            <a:ext cx="10911535" cy="402336"/>
+          </a:xfrm>
+          <a:prstGeom prst="rect">
+            <a:avLst/>
+          </a:prstGeom>
+          <a:noFill/>
+        </p:spPr>
+        <p:txBody>
+          <a:bodyPr wrap="square" anchor="t">
+            <a:spAutoFit/>
+          </a:bodyPr>
+          <a:lstStyle/>
+          <a:p>
+            <a:pPr algn="l">
+              <a:lnSpc>
+                <a:spcPct val="100000"/>
+              </a:lnSpc>
+            </a:pPr>
+            <a:r>
+              <a:rPr sz="1250" b="1">
+                <a:solidFill>
+                  <a:srgbClr val="F5F7FA"/>
+                </a:solidFill>
+                <a:latin typeface="Arial"/>
+              </a:rPr>
+              <a:t>Chrome DevTools MCP  —  </a:t>
+            </a:r>
+            <a:r>
+              <a:rPr sz="1100" b="0">
+                <a:solidFill>
+                  <a:srgbClr val="00FF41"/>
+                </a:solidFill>
+                <a:latin typeface="Courier New"/>
+              </a:rPr>
+              <a:t>github.com/ChromeDevTools/chrome-devtools-mcp</a:t>
+            </a:r>
+          </a:p>
+        </p:txBody>
+      </p:sp>
+      <p:sp>
+        <p:nvSpPr>
+          <p:cNvPr id="10" name="TextBox 9"/>
+          <p:cNvSpPr txBox="1"/>
+          <p:nvPr/>
+        </p:nvSpPr>
+        <p:spPr>
+          <a:xfrm>
+            <a:off x="640080" y="3886199"/>
+            <a:ext cx="10911535" cy="402336"/>
+          </a:xfrm>
+          <a:prstGeom prst="rect">
+            <a:avLst/>
+          </a:prstGeom>
+          <a:noFill/>
+        </p:spPr>
+        <p:txBody>
+          <a:bodyPr wrap="square" anchor="t">
+            <a:spAutoFit/>
+          </a:bodyPr>
+          <a:lstStyle/>
+          <a:p>
+            <a:pPr algn="l">
+              <a:lnSpc>
+                <a:spcPct val="100000"/>
+              </a:lnSpc>
+            </a:pPr>
+            <a:r>
+              <a:rPr sz="1250" b="1">
+                <a:solidFill>
+                  <a:srgbClr val="F5F7FA"/>
+                </a:solidFill>
+                <a:latin typeface="Arial"/>
+              </a:rPr>
+              <a:t>Usability-study material adapted from S. Azenkot, INFO 5305 UX &amp; User Research  —  </a:t>
+            </a:r>
+            <a:r>
+              <a:rPr sz="1100" b="0">
+                <a:solidFill>
+                  <a:srgbClr val="00FF41"/>
+                </a:solidFill>
+                <a:latin typeface="Courier New"/>
+              </a:rPr>
+              <a:t>Cornell Tech</a:t>
+            </a:r>
+          </a:p>
+        </p:txBody>
+      </p:sp>
+      <p:sp>
+        <p:nvSpPr>
+          <p:cNvPr id="11" name="TextBox 10"/>
+          <p:cNvSpPr txBox="1"/>
+          <p:nvPr/>
+        </p:nvSpPr>
+        <p:spPr>
+          <a:xfrm>
+            <a:off x="640080" y="6355080"/>
+            <a:ext cx="10972800" cy="365760"/>
+          </a:xfrm>
+          <a:prstGeom prst="rect">
+            <a:avLst/>
+          </a:prstGeom>
+          <a:noFill/>
+        </p:spPr>
+        <p:txBody>
+          <a:bodyPr wrap="square" anchor="t">
+            <a:spAutoFit/>
+          </a:bodyPr>
+          <a:lstStyle/>
+          <a:p>
+            <a:pPr algn="l">
+              <a:lnSpc>
+                <a:spcPct val="100000"/>
+              </a:lnSpc>
+            </a:pPr>
+            <a:r>
+              <a:rPr sz="1000" b="0">
+                <a:solidFill>
+                  <a:srgbClr val="5A6474"/>
+                </a:solidFill>
+                <a:latin typeface="Courier New"/>
+              </a:rPr>
+              <a:t>Good Code, Good Vibes · TECHIE 1121 · Cornell Tech · Summer 2026</a:t>
             </a:r>
           </a:p>
         </p:txBody>
@@ -3966,7 +6954,7 @@
                 </a:solidFill>
                 <a:latin typeface="Arial"/>
               </a:rPr>
-              <a:t>You built it. Does it work — for someone who isn’t you?</a:t>
+              <a:t>You built it. Does it work - for someone who isn't you?</a:t>
             </a:r>
           </a:p>
         </p:txBody>
@@ -3999,13 +6987,22 @@
               </a:lnSpc>
             </a:pPr>
             <a:r>
-              <a:rPr sz="2200" b="0">
+              <a:rPr sz="2100" b="0">
                 <a:solidFill>
                   <a:srgbClr val="F5F7FA"/>
                 </a:solidFill>
                 <a:latin typeface="Arial"/>
               </a:rPr>
-              <a:t>This week your final project meets real users. Two questions, two days:</a:t>
+              <a:t>Weeks 1-2 you built. This week you evaluate, then build the final. Two testing days on </a:t>
+            </a:r>
+            <a:r>
+              <a:rPr sz="2100" b="1">
+                <a:solidFill>
+                  <a:srgbClr val="F5F7FA"/>
+                </a:solidFill>
+                <a:latin typeface="Arial"/>
+              </a:rPr>
+              <a:t>last week's Project 2 prototype:</a:t>
             </a:r>
           </a:p>
           <a:p>
@@ -4031,16 +7028,16 @@
               </a:lnSpc>
             </a:pPr>
             <a:r>
-              <a:rPr sz="2000" b="0">
+              <a:rPr sz="2100" b="0">
                 <a:solidFill>
                   <a:srgbClr val="F5F7FA"/>
                 </a:solidFill>
                 <a:latin typeface="Arial"/>
               </a:rPr>
-              <a:t>Today — </a:t>
-            </a:r>
-            <a:r>
-              <a:rPr sz="2000" b="1">
+              <a:t>Today - </a:t>
+            </a:r>
+            <a:r>
+              <a:rPr sz="2100" b="1">
                 <a:solidFill>
                   <a:srgbClr val="00FF41"/>
                 </a:solidFill>
@@ -4049,16 +7046,16 @@
               <a:t>does it work?</a:t>
             </a:r>
             <a:r>
-              <a:rPr sz="2000" b="0">
+              <a:rPr sz="2100" b="0">
                 <a:solidFill>
                   <a:srgbClr val="F5F7FA"/>
                 </a:solidFill>
                 <a:latin typeface="Arial"/>
               </a:rPr>
-              <a:t>  (usability).   Tomorrow — </a:t>
-            </a:r>
-            <a:r>
-              <a:rPr sz="2000" b="1">
+              <a:t>  (usability).    Tomorrow - </a:t>
+            </a:r>
+            <a:r>
+              <a:rPr sz="2100" b="1">
                 <a:solidFill>
                   <a:srgbClr val="00FF41"/>
                 </a:solidFill>
@@ -4067,7 +7064,7 @@
               <a:t>does it do the right thing?</a:t>
             </a:r>
             <a:r>
-              <a:rPr sz="2000" b="0">
+              <a:rPr sz="2100" b="0">
                 <a:solidFill>
                   <a:srgbClr val="F5F7FA"/>
                 </a:solidFill>
@@ -4299,7 +7296,7 @@
                 </a:solidFill>
                 <a:latin typeface="Arial"/>
               </a:rPr>
-              <a:t>You know where every button is and what every label means — so you’re the worst person to judge whether it’s usable.</a:t>
+              <a:t>You know where every button is and what every label means - so you are the worst person alive to judge whether your own app is usable.</a:t>
             </a:r>
           </a:p>
           <a:p>
@@ -4331,7 +7328,25 @@
                 </a:solidFill>
                 <a:latin typeface="Arial"/>
               </a:rPr>
-              <a:t>Watching one real person try your app tells you more than any amount of guessing.</a:t>
+              <a:t>Watching </a:t>
+            </a:r>
+            <a:r>
+              <a:rPr sz="2000" b="1">
+                <a:solidFill>
+                  <a:srgbClr val="00FF41"/>
+                </a:solidFill>
+                <a:latin typeface="Arial"/>
+              </a:rPr>
+              <a:t>one</a:t>
+            </a:r>
+            <a:r>
+              <a:rPr sz="2000" b="0">
+                <a:solidFill>
+                  <a:srgbClr val="8A94A6"/>
+                </a:solidFill>
+                <a:latin typeface="Arial"/>
+              </a:rPr>
+              <a:t> real person try it tells you more than a week of guessing. You test the design, not the person - confusion is the design's fault, and it is your best data.</a:t>
             </a:r>
           </a:p>
         </p:txBody>
@@ -4435,65 +7450,21 @@
                 </a:solidFill>
                 <a:latin typeface="Courier New"/>
               </a:rPr>
-              <a:t>READING · NIELSEN</a:t>
-            </a:r>
-          </a:p>
-        </p:txBody>
-      </p:sp>
-      <p:sp>
-        <p:nvSpPr>
-          <p:cNvPr id="3" name="Rectangle 2"/>
-          <p:cNvSpPr/>
-          <p:nvPr/>
-        </p:nvSpPr>
-        <p:spPr>
-          <a:xfrm>
-            <a:off x="640080" y="932688"/>
-            <a:ext cx="822960" cy="73152"/>
-          </a:xfrm>
-          <a:prstGeom prst="rect">
-            <a:avLst/>
-          </a:prstGeom>
-          <a:solidFill>
-            <a:srgbClr val="00FF41"/>
-          </a:solidFill>
-          <a:ln>
-            <a:noFill/>
-          </a:ln>
-          <a:effectLst/>
-        </p:spPr>
-        <p:style>
-          <a:lnRef idx="1">
-            <a:schemeClr val="accent1"/>
-          </a:lnRef>
-          <a:fillRef idx="3">
-            <a:schemeClr val="accent1"/>
-          </a:fillRef>
-          <a:effectRef idx="2">
-            <a:schemeClr val="accent1"/>
-          </a:effectRef>
-          <a:fontRef idx="minor">
-            <a:schemeClr val="lt1"/>
-          </a:fontRef>
-        </p:style>
-        <p:txBody>
-          <a:bodyPr rtlCol="0" anchor="ctr"/>
-          <a:lstStyle/>
-          <a:p>
-            <a:pPr algn="ctr"/>
-          </a:p>
-        </p:txBody>
-      </p:sp>
-      <p:sp>
-        <p:nvSpPr>
-          <p:cNvPr id="4" name="TextBox 3"/>
+              <a:t>WHAT IT IS</a:t>
+            </a:r>
+          </a:p>
+        </p:txBody>
+      </p:sp>
+      <p:sp>
+        <p:nvSpPr>
+          <p:cNvPr id="3" name="TextBox 2"/>
           <p:cNvSpPr txBox="1"/>
           <p:nvPr/>
         </p:nvSpPr>
         <p:spPr>
           <a:xfrm>
-            <a:off x="640080" y="1188720"/>
-            <a:ext cx="10972800" cy="914400"/>
+            <a:off x="1097280" y="548640"/>
+            <a:ext cx="2743200" cy="1828800"/>
           </a:xfrm>
           <a:prstGeom prst="rect">
             <a:avLst/>
@@ -4512,27 +7483,27 @@
               </a:lnSpc>
             </a:pPr>
             <a:r>
-              <a:rPr sz="3200" b="1">
-                <a:solidFill>
-                  <a:srgbClr val="F5F7FA"/>
-                </a:solidFill>
-                <a:latin typeface="Arial"/>
-              </a:rPr>
-              <a:t>Nielsen’s 10 usability heuristics</a:t>
-            </a:r>
-          </a:p>
-        </p:txBody>
-      </p:sp>
-      <p:sp>
-        <p:nvSpPr>
-          <p:cNvPr id="5" name="TextBox 4"/>
+              <a:rPr sz="12000" b="1">
+                <a:solidFill>
+                  <a:srgbClr val="00FF41"/>
+                </a:solidFill>
+                <a:latin typeface="Arial"/>
+              </a:rPr>
+              <a:t>?</a:t>
+            </a:r>
+          </a:p>
+        </p:txBody>
+      </p:sp>
+      <p:sp>
+        <p:nvSpPr>
+          <p:cNvPr id="4" name="TextBox 3"/>
           <p:cNvSpPr txBox="1"/>
           <p:nvPr/>
         </p:nvSpPr>
         <p:spPr>
           <a:xfrm>
-            <a:off x="658368" y="2468880"/>
-            <a:ext cx="5394960" cy="3657600"/>
+            <a:off x="1097280" y="2743200"/>
+            <a:ext cx="10058400" cy="3108960"/>
           </a:xfrm>
           <a:prstGeom prst="rect">
             <a:avLst/>
@@ -4547,371 +7518,56 @@
           <a:p>
             <a:pPr algn="l">
               <a:lnSpc>
-                <a:spcPct val="135000"/>
-              </a:lnSpc>
-            </a:pPr>
-            <a:r>
-              <a:rPr sz="1500" b="1">
-                <a:solidFill>
-                  <a:srgbClr val="00FF41"/>
-                </a:solidFill>
-                <a:latin typeface="Courier New"/>
-              </a:rPr>
-              <a:t>01  </a:t>
-            </a:r>
-            <a:r>
-              <a:rPr sz="1600" b="1">
+                <a:spcPct val="112000"/>
+              </a:lnSpc>
+            </a:pPr>
+            <a:r>
+              <a:rPr sz="3000" b="1">
                 <a:solidFill>
                   <a:srgbClr val="F5F7FA"/>
                 </a:solidFill>
                 <a:latin typeface="Arial"/>
               </a:rPr>
-              <a:t>Visibility of system status  </a:t>
-            </a:r>
-            <a:r>
-              <a:rPr sz="1400" b="0">
-                <a:solidFill>
-                  <a:srgbClr val="8A94A6"/>
-                </a:solidFill>
-                <a:latin typeface="Arial"/>
-              </a:rPr>
-              <a:t>always show what’s happening</a:t>
-            </a:r>
-          </a:p>
-          <a:p>
-            <a:pPr algn="l">
-              <a:lnSpc>
-                <a:spcPct val="135000"/>
-              </a:lnSpc>
-            </a:pPr>
-            <a:r>
-              <a:rPr sz="1500" b="1">
-                <a:solidFill>
-                  <a:srgbClr val="00FF41"/>
-                </a:solidFill>
-                <a:latin typeface="Courier New"/>
-              </a:rPr>
-              <a:t>02  </a:t>
-            </a:r>
-            <a:r>
-              <a:rPr sz="1600" b="1">
+              <a:t>Give one real person one real task.</a:t>
+            </a:r>
+          </a:p>
+          <a:p>
+            <a:pPr algn="l">
+              <a:lnSpc>
+                <a:spcPct val="112000"/>
+              </a:lnSpc>
+            </a:pPr>
+            <a:r>
+              <a:rPr sz="3000" b="1">
                 <a:solidFill>
                   <a:srgbClr val="F5F7FA"/>
                 </a:solidFill>
                 <a:latin typeface="Arial"/>
               </a:rPr>
-              <a:t>Match the real world  </a:t>
-            </a:r>
-            <a:r>
-              <a:rPr sz="1400" b="0">
-                <a:solidFill>
-                  <a:srgbClr val="8A94A6"/>
-                </a:solidFill>
-                <a:latin typeface="Arial"/>
-              </a:rPr>
-              <a:t>speak the user’s language</a:t>
-            </a:r>
-          </a:p>
-          <a:p>
-            <a:pPr algn="l">
-              <a:lnSpc>
-                <a:spcPct val="135000"/>
-              </a:lnSpc>
-            </a:pPr>
-            <a:r>
-              <a:rPr sz="1500" b="1">
-                <a:solidFill>
-                  <a:srgbClr val="00FF41"/>
-                </a:solidFill>
-                <a:latin typeface="Courier New"/>
-              </a:rPr>
-              <a:t>03  </a:t>
-            </a:r>
-            <a:r>
-              <a:rPr sz="1600" b="1">
+              <a:t>Ask them to think aloud.</a:t>
+            </a:r>
+          </a:p>
+          <a:p>
+            <a:pPr algn="l">
+              <a:lnSpc>
+                <a:spcPct val="112000"/>
+              </a:lnSpc>
+            </a:pPr>
+            <a:r>
+              <a:rPr sz="3000" b="1">
                 <a:solidFill>
                   <a:srgbClr val="F5F7FA"/>
                 </a:solidFill>
                 <a:latin typeface="Arial"/>
               </a:rPr>
-              <a:t>User control &amp; freedom  </a:t>
-            </a:r>
-            <a:r>
-              <a:rPr sz="1400" b="0">
-                <a:solidFill>
-                  <a:srgbClr val="8A94A6"/>
-                </a:solidFill>
-                <a:latin typeface="Arial"/>
-              </a:rPr>
-              <a:t>easy undo / exits</a:t>
-            </a:r>
-          </a:p>
-          <a:p>
-            <a:pPr algn="l">
-              <a:lnSpc>
-                <a:spcPct val="135000"/>
-              </a:lnSpc>
-            </a:pPr>
-            <a:r>
-              <a:rPr sz="1500" b="1">
-                <a:solidFill>
-                  <a:srgbClr val="00FF41"/>
-                </a:solidFill>
-                <a:latin typeface="Courier New"/>
-              </a:rPr>
-              <a:t>04  </a:t>
-            </a:r>
-            <a:r>
-              <a:rPr sz="1600" b="1">
-                <a:solidFill>
-                  <a:srgbClr val="F5F7FA"/>
-                </a:solidFill>
-                <a:latin typeface="Arial"/>
-              </a:rPr>
-              <a:t>Consistency &amp; standards  </a:t>
-            </a:r>
-            <a:r>
-              <a:rPr sz="1400" b="0">
-                <a:solidFill>
-                  <a:srgbClr val="8A94A6"/>
-                </a:solidFill>
-                <a:latin typeface="Arial"/>
-              </a:rPr>
-              <a:t>follow conventions</a:t>
-            </a:r>
-          </a:p>
-          <a:p>
-            <a:pPr algn="l">
-              <a:lnSpc>
-                <a:spcPct val="135000"/>
-              </a:lnSpc>
-            </a:pPr>
-            <a:r>
-              <a:rPr sz="1500" b="1">
-                <a:solidFill>
-                  <a:srgbClr val="00FF41"/>
-                </a:solidFill>
-                <a:latin typeface="Courier New"/>
-              </a:rPr>
-              <a:t>05  </a:t>
-            </a:r>
-            <a:r>
-              <a:rPr sz="1600" b="1">
-                <a:solidFill>
-                  <a:srgbClr val="F5F7FA"/>
-                </a:solidFill>
-                <a:latin typeface="Arial"/>
-              </a:rPr>
-              <a:t>Error prevention  </a:t>
-            </a:r>
-            <a:r>
-              <a:rPr sz="1400" b="0">
-                <a:solidFill>
-                  <a:srgbClr val="8A94A6"/>
-                </a:solidFill>
-                <a:latin typeface="Arial"/>
-              </a:rPr>
-              <a:t>stop mistakes before they happen</a:t>
-            </a:r>
-          </a:p>
-        </p:txBody>
-      </p:sp>
-      <p:sp>
-        <p:nvSpPr>
-          <p:cNvPr id="6" name="TextBox 5"/>
-          <p:cNvSpPr txBox="1"/>
-          <p:nvPr/>
-        </p:nvSpPr>
-        <p:spPr>
-          <a:xfrm>
-            <a:off x="6309360" y="2468880"/>
-            <a:ext cx="5394960" cy="3657600"/>
-          </a:xfrm>
-          <a:prstGeom prst="rect">
-            <a:avLst/>
-          </a:prstGeom>
-          <a:noFill/>
-        </p:spPr>
-        <p:txBody>
-          <a:bodyPr wrap="square" anchor="t">
-            <a:spAutoFit/>
-          </a:bodyPr>
-          <a:lstStyle/>
-          <a:p>
-            <a:pPr algn="l">
-              <a:lnSpc>
-                <a:spcPct val="135000"/>
-              </a:lnSpc>
-            </a:pPr>
-            <a:r>
-              <a:rPr sz="1500" b="1">
-                <a:solidFill>
-                  <a:srgbClr val="00FF41"/>
-                </a:solidFill>
-                <a:latin typeface="Courier New"/>
-              </a:rPr>
-              <a:t>06  </a:t>
-            </a:r>
-            <a:r>
-              <a:rPr sz="1600" b="1">
-                <a:solidFill>
-                  <a:srgbClr val="F5F7FA"/>
-                </a:solidFill>
-                <a:latin typeface="Arial"/>
-              </a:rPr>
-              <a:t>Recognition over recall  </a:t>
-            </a:r>
-            <a:r>
-              <a:rPr sz="1400" b="0">
-                <a:solidFill>
-                  <a:srgbClr val="8A94A6"/>
-                </a:solidFill>
-                <a:latin typeface="Arial"/>
-              </a:rPr>
-              <a:t>show options, don’t make them remember</a:t>
-            </a:r>
-          </a:p>
-          <a:p>
-            <a:pPr algn="l">
-              <a:lnSpc>
-                <a:spcPct val="135000"/>
-              </a:lnSpc>
-            </a:pPr>
-            <a:r>
-              <a:rPr sz="1500" b="1">
-                <a:solidFill>
-                  <a:srgbClr val="00FF41"/>
-                </a:solidFill>
-                <a:latin typeface="Courier New"/>
-              </a:rPr>
-              <a:t>07  </a:t>
-            </a:r>
-            <a:r>
-              <a:rPr sz="1600" b="1">
-                <a:solidFill>
-                  <a:srgbClr val="F5F7FA"/>
-                </a:solidFill>
-                <a:latin typeface="Arial"/>
-              </a:rPr>
-              <a:t>Flexibility &amp; efficiency  </a:t>
-            </a:r>
-            <a:r>
-              <a:rPr sz="1400" b="0">
-                <a:solidFill>
-                  <a:srgbClr val="8A94A6"/>
-                </a:solidFill>
-                <a:latin typeface="Arial"/>
-              </a:rPr>
-              <a:t>shortcuts for experts</a:t>
-            </a:r>
-          </a:p>
-          <a:p>
-            <a:pPr algn="l">
-              <a:lnSpc>
-                <a:spcPct val="135000"/>
-              </a:lnSpc>
-            </a:pPr>
-            <a:r>
-              <a:rPr sz="1500" b="1">
-                <a:solidFill>
-                  <a:srgbClr val="00FF41"/>
-                </a:solidFill>
-                <a:latin typeface="Courier New"/>
-              </a:rPr>
-              <a:t>08  </a:t>
-            </a:r>
-            <a:r>
-              <a:rPr sz="1600" b="1">
-                <a:solidFill>
-                  <a:srgbClr val="F5F7FA"/>
-                </a:solidFill>
-                <a:latin typeface="Arial"/>
-              </a:rPr>
-              <a:t>Aesthetic &amp; minimalist  </a:t>
-            </a:r>
-            <a:r>
-              <a:rPr sz="1400" b="0">
-                <a:solidFill>
-                  <a:srgbClr val="8A94A6"/>
-                </a:solidFill>
-                <a:latin typeface="Arial"/>
-              </a:rPr>
-              <a:t>no needless clutter</a:t>
-            </a:r>
-          </a:p>
-          <a:p>
-            <a:pPr algn="l">
-              <a:lnSpc>
-                <a:spcPct val="135000"/>
-              </a:lnSpc>
-            </a:pPr>
-            <a:r>
-              <a:rPr sz="1500" b="1">
-                <a:solidFill>
-                  <a:srgbClr val="00FF41"/>
-                </a:solidFill>
-                <a:latin typeface="Courier New"/>
-              </a:rPr>
-              <a:t>09  </a:t>
-            </a:r>
-            <a:r>
-              <a:rPr sz="1600" b="1">
-                <a:solidFill>
-                  <a:srgbClr val="F5F7FA"/>
-                </a:solidFill>
-                <a:latin typeface="Arial"/>
-              </a:rPr>
-              <a:t>Recover from errors  </a:t>
-            </a:r>
-            <a:r>
-              <a:rPr sz="1400" b="0">
-                <a:solidFill>
-                  <a:srgbClr val="8A94A6"/>
-                </a:solidFill>
-                <a:latin typeface="Arial"/>
-              </a:rPr>
-              <a:t>plain-language fixes</a:t>
-            </a:r>
-          </a:p>
-          <a:p>
-            <a:pPr algn="l">
-              <a:lnSpc>
-                <a:spcPct val="135000"/>
-              </a:lnSpc>
-            </a:pPr>
-            <a:r>
-              <a:rPr sz="1500" b="1">
-                <a:solidFill>
-                  <a:srgbClr val="00FF41"/>
-                </a:solidFill>
-                <a:latin typeface="Courier New"/>
-              </a:rPr>
-              <a:t>10  </a:t>
-            </a:r>
-            <a:r>
-              <a:rPr sz="1600" b="1">
-                <a:solidFill>
-                  <a:srgbClr val="F5F7FA"/>
-                </a:solidFill>
-                <a:latin typeface="Arial"/>
-              </a:rPr>
-              <a:t>Help &amp; documentation  </a:t>
-            </a:r>
-            <a:r>
-              <a:rPr sz="1400" b="0">
-                <a:solidFill>
-                  <a:srgbClr val="8A94A6"/>
-                </a:solidFill>
-                <a:latin typeface="Arial"/>
-              </a:rPr>
-              <a:t>findable when needed</a:t>
-            </a:r>
-          </a:p>
-        </p:txBody>
-      </p:sp>
-      <p:sp>
-        <p:nvSpPr>
-          <p:cNvPr id="7" name="TextBox 6"/>
+              <a:t>Stay quiet and watch what they DO.</a:t>
+            </a:r>
+          </a:p>
+        </p:txBody>
+      </p:sp>
+      <p:sp>
+        <p:nvSpPr>
+          <p:cNvPr id="5" name="TextBox 4"/>
           <p:cNvSpPr txBox="1"/>
           <p:nvPr/>
         </p:nvSpPr>
@@ -5008,7 +7664,7 @@
                 </a:solidFill>
                 <a:latin typeface="Courier New"/>
               </a:rPr>
-              <a:t>HOW TO RUN IT</a:t>
+              <a:t>WATCH - A REAL USABILITY TEST</a:t>
             </a:r>
           </a:p>
         </p:txBody>
@@ -5091,7 +7747,7 @@
                 </a:solidFill>
                 <a:latin typeface="Arial"/>
               </a:rPr>
-              <a:t>A quick usability test in 4 moves</a:t>
+              <a:t>See it done before you do it</a:t>
             </a:r>
           </a:p>
         </p:txBody>
@@ -5124,13 +7780,22 @@
               </a:lnSpc>
             </a:pPr>
             <a:r>
+              <a:rPr sz="2000" b="0">
+                <a:solidFill>
+                  <a:srgbClr val="F5F7FA"/>
+                </a:solidFill>
+                <a:latin typeface="Arial"/>
+              </a:rPr>
+              <a:t>A moderated think-aloud test. User goal: </a:t>
+            </a:r>
+            <a:r>
               <a:rPr sz="2000" b="1">
                 <a:solidFill>
                   <a:srgbClr val="00FF41"/>
                 </a:solidFill>
                 <a:latin typeface="Arial"/>
               </a:rPr>
-              <a:t>•  </a:t>
+              <a:t>order medications online</a:t>
             </a:r>
             <a:r>
               <a:rPr sz="2000" b="0">
@@ -5139,7 +7804,7 @@
                 </a:solidFill>
                 <a:latin typeface="Arial"/>
               </a:rPr>
-              <a:t>Give a real task (“sign up and post one thing”) — don’t give a tour.</a:t>
+              <a:t> - refill Vitamin D and Tylenol, check which card is on file, set up auto-refill.</a:t>
             </a:r>
           </a:p>
           <a:p>
@@ -5149,72 +7814,61 @@
               </a:lnSpc>
             </a:pPr>
             <a:r>
-              <a:rPr sz="2000" b="1">
+              <a:rPr sz="2000" b="0">
+                <a:solidFill>
+                  <a:srgbClr val="F5F7FA"/>
+                </a:solidFill>
+                <a:latin typeface="Arial"/>
+              </a:rPr>
+              <a:t/>
+            </a:r>
+          </a:p>
+          <a:p>
+            <a:pPr algn="l">
+              <a:lnSpc>
+                <a:spcPct val="112000"/>
+              </a:lnSpc>
+            </a:pPr>
+            <a:r>
+              <a:rPr sz="1800" b="0">
+                <a:solidFill>
+                  <a:srgbClr val="8A94A6"/>
+                </a:solidFill>
+                <a:latin typeface="Arial"/>
+              </a:rPr>
+              <a:t>Watch for: where they hesitate, what they say they expect, and how the moderator stays neutral and lets them struggle.</a:t>
+            </a:r>
+          </a:p>
+          <a:p>
+            <a:pPr algn="l">
+              <a:lnSpc>
+                <a:spcPct val="112000"/>
+              </a:lnSpc>
+            </a:pPr>
+            <a:r>
+              <a:rPr sz="2000" b="0">
+                <a:solidFill>
+                  <a:srgbClr val="F5F7FA"/>
+                </a:solidFill>
+                <a:latin typeface="Arial"/>
+              </a:rPr>
+              <a:t/>
+            </a:r>
+          </a:p>
+          <a:p>
+            <a:pPr algn="l">
+              <a:lnSpc>
+                <a:spcPct val="112000"/>
+              </a:lnSpc>
+            </a:pPr>
+            <a:r>
+              <a:rPr sz="2200" b="1">
                 <a:solidFill>
                   <a:srgbClr val="00FF41"/>
                 </a:solidFill>
-                <a:latin typeface="Arial"/>
-              </a:rPr>
-              <a:t>•  </a:t>
-            </a:r>
-            <a:r>
-              <a:rPr sz="2000" b="0">
-                <a:solidFill>
-                  <a:srgbClr val="F5F7FA"/>
-                </a:solidFill>
-                <a:latin typeface="Arial"/>
-              </a:rPr>
-              <a:t>Watch, don’t help. Silence is data.</a:t>
-            </a:r>
-          </a:p>
-          <a:p>
-            <a:pPr algn="l">
-              <a:lnSpc>
-                <a:spcPct val="112000"/>
-              </a:lnSpc>
-            </a:pPr>
-            <a:r>
-              <a:rPr sz="2000" b="1">
-                <a:solidFill>
-                  <a:srgbClr val="00FF41"/>
-                </a:solidFill>
-                <a:latin typeface="Arial"/>
-              </a:rPr>
-              <a:t>•  </a:t>
-            </a:r>
-            <a:r>
-              <a:rPr sz="2000" b="0">
-                <a:solidFill>
-                  <a:srgbClr val="F5F7FA"/>
-                </a:solidFill>
-                <a:latin typeface="Arial"/>
-              </a:rPr>
-              <a:t>Ask them to think aloud — narrate what they expect.</a:t>
-            </a:r>
-          </a:p>
-          <a:p>
-            <a:pPr algn="l">
-              <a:lnSpc>
-                <a:spcPct val="112000"/>
-              </a:lnSpc>
-            </a:pPr>
-            <a:r>
-              <a:rPr sz="2000" b="1">
-                <a:solidFill>
-                  <a:srgbClr val="00FF41"/>
-                </a:solidFill>
-                <a:latin typeface="Arial"/>
-              </a:rPr>
-              <a:t>•  </a:t>
-            </a:r>
-            <a:r>
-              <a:rPr sz="2000" b="0">
-                <a:solidFill>
-                  <a:srgbClr val="F5F7FA"/>
-                </a:solidFill>
-                <a:latin typeface="Arial"/>
-              </a:rPr>
-              <a:t>Note every hesitation, wrong turn, and dead end.</a:t>
+                <a:latin typeface="Courier New"/>
+              </a:rPr>
+              <a:t>|&gt;  youtube.com/watch?v=EH7Fx9rpC0c</a:t>
             </a:r>
           </a:p>
         </p:txBody>
@@ -5254,6 +7908,45 @@
                 <a:latin typeface="Courier New"/>
               </a:rPr>
               <a:t>Good Code, Good Vibes · TECHIE 1121 · Cornell Tech · Summer 2026</a:t>
+            </a:r>
+          </a:p>
+        </p:txBody>
+      </p:sp>
+      <p:sp>
+        <p:nvSpPr>
+          <p:cNvPr id="7" name="TextBox 6"/>
+          <p:cNvSpPr txBox="1"/>
+          <p:nvPr/>
+        </p:nvSpPr>
+        <p:spPr>
+          <a:xfrm>
+            <a:off x="640080" y="6035040"/>
+            <a:ext cx="10972800" cy="292608"/>
+          </a:xfrm>
+          <a:prstGeom prst="rect">
+            <a:avLst/>
+          </a:prstGeom>
+          <a:noFill/>
+        </p:spPr>
+        <p:txBody>
+          <a:bodyPr wrap="square" anchor="t">
+            <a:spAutoFit/>
+          </a:bodyPr>
+          <a:lstStyle/>
+          <a:p>
+            <a:pPr algn="l">
+              <a:lnSpc>
+                <a:spcPct val="100000"/>
+              </a:lnSpc>
+            </a:pPr>
+            <a:r>
+              <a:rPr sz="950" b="0">
+                <a:solidFill>
+                  <a:srgbClr val="5A6474"/>
+                </a:solidFill>
+                <a:latin typeface="Courier New"/>
+              </a:rPr>
+              <a:t>Demo video + usability-study framing adapted from S. Azenkot, INFO 5305 UX &amp; User Research (Cornell Tech)</a:t>
             </a:r>
           </a:p>
         </p:txBody>
@@ -5318,7 +8011,7 @@
                 </a:solidFill>
                 <a:latin typeface="Courier New"/>
               </a:rPr>
-              <a:t>SLOP CHECK</a:t>
+              <a:t>READING - NIELSEN</a:t>
             </a:r>
           </a:p>
         </p:txBody>
@@ -5376,7 +8069,7 @@
         <p:spPr>
           <a:xfrm>
             <a:off x="640080" y="1188720"/>
-            <a:ext cx="10972800" cy="1097280"/>
+            <a:ext cx="10972800" cy="914400"/>
           </a:xfrm>
           <a:prstGeom prst="rect">
             <a:avLst/>
@@ -5395,13 +8088,13 @@
               </a:lnSpc>
             </a:pPr>
             <a:r>
-              <a:rPr sz="3400" b="1">
+              <a:rPr sz="3200" b="1">
                 <a:solidFill>
                   <a:srgbClr val="F5F7FA"/>
                 </a:solidFill>
                 <a:latin typeface="Arial"/>
               </a:rPr>
-              <a:t>Does it look AI-generated? Run the slop detector</a:t>
+              <a:t>Nielsen's 10 usability heuristics</a:t>
             </a:r>
           </a:p>
         </p:txBody>
@@ -5414,8 +8107,8 @@
         </p:nvSpPr>
         <p:spPr>
           <a:xfrm>
-            <a:off x="658368" y="2286000"/>
-            <a:ext cx="10881360" cy="3657600"/>
+            <a:off x="658368" y="2468880"/>
+            <a:ext cx="5394960" cy="3657600"/>
           </a:xfrm>
           <a:prstGeom prst="rect">
             <a:avLst/>
@@ -5430,126 +8123,171 @@
           <a:p>
             <a:pPr algn="l">
               <a:lnSpc>
-                <a:spcPct val="112000"/>
-              </a:lnSpc>
-            </a:pPr>
-            <a:r>
-              <a:rPr sz="2000" b="1">
+                <a:spcPct val="135000"/>
+              </a:lnSpc>
+            </a:pPr>
+            <a:r>
+              <a:rPr sz="1500" b="1">
                 <a:solidFill>
                   <a:srgbClr val="00FF41"/>
                 </a:solidFill>
-                <a:latin typeface="Arial"/>
-              </a:rPr>
-              <a:t>•  </a:t>
-            </a:r>
-            <a:r>
-              <a:rPr sz="2000" b="0">
+                <a:latin typeface="Courier New"/>
+              </a:rPr>
+              <a:t>01  </a:t>
+            </a:r>
+            <a:r>
+              <a:rPr sz="1600" b="1">
                 <a:solidFill>
                   <a:srgbClr val="F5F7FA"/>
                 </a:solidFill>
                 <a:latin typeface="Arial"/>
               </a:rPr>
-              <a:t>impeccable.style/slop catalogs 46 deterministic patterns that mark an interface as AI-generated.</a:t>
-            </a:r>
-          </a:p>
-          <a:p>
-            <a:pPr algn="l">
-              <a:lnSpc>
-                <a:spcPct val="112000"/>
-              </a:lnSpc>
-            </a:pPr>
-            <a:r>
-              <a:rPr sz="2000" b="1">
+              <a:t>Visibility of system status  </a:t>
+            </a:r>
+            <a:r>
+              <a:rPr sz="1400" b="0">
+                <a:solidFill>
+                  <a:srgbClr val="8A94A6"/>
+                </a:solidFill>
+                <a:latin typeface="Arial"/>
+              </a:rPr>
+              <a:t>always show what's happening</a:t>
+            </a:r>
+          </a:p>
+          <a:p>
+            <a:pPr algn="l">
+              <a:lnSpc>
+                <a:spcPct val="135000"/>
+              </a:lnSpc>
+            </a:pPr>
+            <a:r>
+              <a:rPr sz="1500" b="1">
                 <a:solidFill>
                   <a:srgbClr val="00FF41"/>
                 </a:solidFill>
-                <a:latin typeface="Arial"/>
-              </a:rPr>
-              <a:t>•  </a:t>
-            </a:r>
-            <a:r>
-              <a:rPr sz="2000" b="0">
+                <a:latin typeface="Courier New"/>
+              </a:rPr>
+              <a:t>02  </a:t>
+            </a:r>
+            <a:r>
+              <a:rPr sz="1600" b="1">
                 <a:solidFill>
                   <a:srgbClr val="F5F7FA"/>
                 </a:solidFill>
                 <a:latin typeface="Arial"/>
               </a:rPr>
-              <a:t>The tells: side-tab accent borders (“the most recognizable tell”), purple/violet gradients, gradient text, italic-serif display headlines, hero “pill chips”, dark mode with glowing accents…</a:t>
-            </a:r>
-          </a:p>
-          <a:p>
-            <a:pPr algn="l">
-              <a:lnSpc>
-                <a:spcPct val="112000"/>
-              </a:lnSpc>
-            </a:pPr>
-            <a:r>
-              <a:rPr sz="2000" b="1">
+              <a:t>Match the real world  </a:t>
+            </a:r>
+            <a:r>
+              <a:rPr sz="1400" b="0">
+                <a:solidFill>
+                  <a:srgbClr val="8A94A6"/>
+                </a:solidFill>
+                <a:latin typeface="Arial"/>
+              </a:rPr>
+              <a:t>speak the user's language</a:t>
+            </a:r>
+          </a:p>
+          <a:p>
+            <a:pPr algn="l">
+              <a:lnSpc>
+                <a:spcPct val="135000"/>
+              </a:lnSpc>
+            </a:pPr>
+            <a:r>
+              <a:rPr sz="1500" b="1">
                 <a:solidFill>
                   <a:srgbClr val="00FF41"/>
                 </a:solidFill>
-                <a:latin typeface="Arial"/>
-              </a:rPr>
-              <a:t>•  </a:t>
-            </a:r>
-            <a:r>
-              <a:rPr sz="2000" b="0">
+                <a:latin typeface="Courier New"/>
+              </a:rPr>
+              <a:t>03  </a:t>
+            </a:r>
+            <a:r>
+              <a:rPr sz="1600" b="1">
                 <a:solidFill>
                   <a:srgbClr val="F5F7FA"/>
                 </a:solidFill>
                 <a:latin typeface="Arial"/>
               </a:rPr>
-              <a:t>Free Chrome extension overlays your live page — hover any outlined element to see which rule fired. CLI: npx impeccable detect &lt;url&gt;.</a:t>
-            </a:r>
-          </a:p>
-          <a:p>
-            <a:pPr algn="l">
-              <a:lnSpc>
-                <a:spcPct val="112000"/>
-              </a:lnSpc>
-            </a:pPr>
-            <a:r>
-              <a:rPr sz="2000" b="1">
+              <a:t>User control &amp; freedom  </a:t>
+            </a:r>
+            <a:r>
+              <a:rPr sz="1400" b="0">
+                <a:solidFill>
+                  <a:srgbClr val="8A94A6"/>
+                </a:solidFill>
+                <a:latin typeface="Arial"/>
+              </a:rPr>
+              <a:t>easy undo / exits</a:t>
+            </a:r>
+          </a:p>
+          <a:p>
+            <a:pPr algn="l">
+              <a:lnSpc>
+                <a:spcPct val="135000"/>
+              </a:lnSpc>
+            </a:pPr>
+            <a:r>
+              <a:rPr sz="1500" b="1">
                 <a:solidFill>
                   <a:srgbClr val="00FF41"/>
                 </a:solidFill>
-                <a:latin typeface="Arial"/>
-              </a:rPr>
-              <a:t>•  </a:t>
-            </a:r>
-            <a:r>
-              <a:rPr sz="2000" b="0">
+                <a:latin typeface="Courier New"/>
+              </a:rPr>
+              <a:t>04  </a:t>
+            </a:r>
+            <a:r>
+              <a:rPr sz="1600" b="1">
                 <a:solidFill>
                   <a:srgbClr val="F5F7FA"/>
                 </a:solidFill>
                 <a:latin typeface="Arial"/>
               </a:rPr>
-              <a:t>In today’s peer test: run it on the project you’re testing. Do the flagged tells overlap with where real users hesitated?</a:t>
-            </a:r>
-          </a:p>
-          <a:p>
-            <a:pPr algn="l">
-              <a:lnSpc>
-                <a:spcPct val="112000"/>
-              </a:lnSpc>
-            </a:pPr>
-            <a:r>
-              <a:rPr sz="2000" b="1">
+              <a:t>Consistency &amp; standards  </a:t>
+            </a:r>
+            <a:r>
+              <a:rPr sz="1400" b="0">
+                <a:solidFill>
+                  <a:srgbClr val="8A94A6"/>
+                </a:solidFill>
+                <a:latin typeface="Arial"/>
+              </a:rPr>
+              <a:t>follow conventions</a:t>
+            </a:r>
+          </a:p>
+          <a:p>
+            <a:pPr algn="l">
+              <a:lnSpc>
+                <a:spcPct val="135000"/>
+              </a:lnSpc>
+            </a:pPr>
+            <a:r>
+              <a:rPr sz="1500" b="1">
                 <a:solidFill>
                   <a:srgbClr val="00FF41"/>
                 </a:solidFill>
-                <a:latin typeface="Arial"/>
-              </a:rPr>
-              <a:t>•  </a:t>
-            </a:r>
-            <a:r>
-              <a:rPr sz="2000" b="0">
+                <a:latin typeface="Courier New"/>
+              </a:rPr>
+              <a:t>05  </a:t>
+            </a:r>
+            <a:r>
+              <a:rPr sz="1600" b="1">
                 <a:solidFill>
                   <a:srgbClr val="F5F7FA"/>
                 </a:solidFill>
                 <a:latin typeface="Arial"/>
               </a:rPr>
-              <a:t>It grades taste, not truth — a flag is a question to ask, not a verdict. (Nielsen #8: aesthetic &amp; minimalist design.)</a:t>
+              <a:t>Error prevention  </a:t>
+            </a:r>
+            <a:r>
+              <a:rPr sz="1400" b="0">
+                <a:solidFill>
+                  <a:srgbClr val="8A94A6"/>
+                </a:solidFill>
+                <a:latin typeface="Arial"/>
+              </a:rPr>
+              <a:t>stop mistakes before they happen</a:t>
             </a:r>
           </a:p>
         </p:txBody>
@@ -5562,8 +8300,8 @@
         </p:nvSpPr>
         <p:spPr>
           <a:xfrm>
-            <a:off x="640080" y="6355080"/>
-            <a:ext cx="10972800" cy="365760"/>
+            <a:off x="6309360" y="2468880"/>
+            <a:ext cx="5394960" cy="3657600"/>
           </a:xfrm>
           <a:prstGeom prst="rect">
             <a:avLst/>
@@ -5578,17 +8316,171 @@
           <a:p>
             <a:pPr algn="l">
               <a:lnSpc>
-                <a:spcPct val="100000"/>
-              </a:lnSpc>
-            </a:pPr>
-            <a:r>
-              <a:rPr sz="1000" b="0">
-                <a:solidFill>
-                  <a:srgbClr val="5A6474"/>
+                <a:spcPct val="135000"/>
+              </a:lnSpc>
+            </a:pPr>
+            <a:r>
+              <a:rPr sz="1500" b="1">
+                <a:solidFill>
+                  <a:srgbClr val="00FF41"/>
                 </a:solidFill>
                 <a:latin typeface="Courier New"/>
               </a:rPr>
-              <a:t>Good Code, Good Vibes · TECHIE 1121 · Cornell Tech · Summer 2026</a:t>
+              <a:t>06  </a:t>
+            </a:r>
+            <a:r>
+              <a:rPr sz="1600" b="1">
+                <a:solidFill>
+                  <a:srgbClr val="F5F7FA"/>
+                </a:solidFill>
+                <a:latin typeface="Arial"/>
+              </a:rPr>
+              <a:t>Recognition over recall  </a:t>
+            </a:r>
+            <a:r>
+              <a:rPr sz="1400" b="0">
+                <a:solidFill>
+                  <a:srgbClr val="8A94A6"/>
+                </a:solidFill>
+                <a:latin typeface="Arial"/>
+              </a:rPr>
+              <a:t>show options, don't make them remember</a:t>
+            </a:r>
+          </a:p>
+          <a:p>
+            <a:pPr algn="l">
+              <a:lnSpc>
+                <a:spcPct val="135000"/>
+              </a:lnSpc>
+            </a:pPr>
+            <a:r>
+              <a:rPr sz="1500" b="1">
+                <a:solidFill>
+                  <a:srgbClr val="00FF41"/>
+                </a:solidFill>
+                <a:latin typeface="Courier New"/>
+              </a:rPr>
+              <a:t>07  </a:t>
+            </a:r>
+            <a:r>
+              <a:rPr sz="1600" b="1">
+                <a:solidFill>
+                  <a:srgbClr val="F5F7FA"/>
+                </a:solidFill>
+                <a:latin typeface="Arial"/>
+              </a:rPr>
+              <a:t>Flexibility &amp; efficiency  </a:t>
+            </a:r>
+            <a:r>
+              <a:rPr sz="1400" b="0">
+                <a:solidFill>
+                  <a:srgbClr val="8A94A6"/>
+                </a:solidFill>
+                <a:latin typeface="Arial"/>
+              </a:rPr>
+              <a:t>shortcuts for experts</a:t>
+            </a:r>
+          </a:p>
+          <a:p>
+            <a:pPr algn="l">
+              <a:lnSpc>
+                <a:spcPct val="135000"/>
+              </a:lnSpc>
+            </a:pPr>
+            <a:r>
+              <a:rPr sz="1500" b="1">
+                <a:solidFill>
+                  <a:srgbClr val="00FF41"/>
+                </a:solidFill>
+                <a:latin typeface="Courier New"/>
+              </a:rPr>
+              <a:t>08  </a:t>
+            </a:r>
+            <a:r>
+              <a:rPr sz="1600" b="1">
+                <a:solidFill>
+                  <a:srgbClr val="F5F7FA"/>
+                </a:solidFill>
+                <a:latin typeface="Arial"/>
+              </a:rPr>
+              <a:t>Aesthetic &amp; minimalist  </a:t>
+            </a:r>
+            <a:r>
+              <a:rPr sz="1400" b="0">
+                <a:solidFill>
+                  <a:srgbClr val="8A94A6"/>
+                </a:solidFill>
+                <a:latin typeface="Arial"/>
+              </a:rPr>
+              <a:t>no needless clutter</a:t>
+            </a:r>
+          </a:p>
+          <a:p>
+            <a:pPr algn="l">
+              <a:lnSpc>
+                <a:spcPct val="135000"/>
+              </a:lnSpc>
+            </a:pPr>
+            <a:r>
+              <a:rPr sz="1500" b="1">
+                <a:solidFill>
+                  <a:srgbClr val="00FF41"/>
+                </a:solidFill>
+                <a:latin typeface="Courier New"/>
+              </a:rPr>
+              <a:t>09  </a:t>
+            </a:r>
+            <a:r>
+              <a:rPr sz="1600" b="1">
+                <a:solidFill>
+                  <a:srgbClr val="F5F7FA"/>
+                </a:solidFill>
+                <a:latin typeface="Arial"/>
+              </a:rPr>
+              <a:t>Recover from errors  </a:t>
+            </a:r>
+            <a:r>
+              <a:rPr sz="1400" b="0">
+                <a:solidFill>
+                  <a:srgbClr val="8A94A6"/>
+                </a:solidFill>
+                <a:latin typeface="Arial"/>
+              </a:rPr>
+              <a:t>plain-language fixes</a:t>
+            </a:r>
+          </a:p>
+          <a:p>
+            <a:pPr algn="l">
+              <a:lnSpc>
+                <a:spcPct val="135000"/>
+              </a:lnSpc>
+            </a:pPr>
+            <a:r>
+              <a:rPr sz="1500" b="1">
+                <a:solidFill>
+                  <a:srgbClr val="00FF41"/>
+                </a:solidFill>
+                <a:latin typeface="Courier New"/>
+              </a:rPr>
+              <a:t>10  </a:t>
+            </a:r>
+            <a:r>
+              <a:rPr sz="1600" b="1">
+                <a:solidFill>
+                  <a:srgbClr val="F5F7FA"/>
+                </a:solidFill>
+                <a:latin typeface="Arial"/>
+              </a:rPr>
+              <a:t>Help &amp; documentation  </a:t>
+            </a:r>
+            <a:r>
+              <a:rPr sz="1400" b="0">
+                <a:solidFill>
+                  <a:srgbClr val="8A94A6"/>
+                </a:solidFill>
+                <a:latin typeface="Arial"/>
+              </a:rPr>
+              <a:t>findable when needed</a:t>
             </a:r>
           </a:p>
         </p:txBody>
@@ -5601,8 +8493,8 @@
         </p:nvSpPr>
         <p:spPr>
           <a:xfrm>
-            <a:off x="640080" y="6053328"/>
-            <a:ext cx="10972800" cy="320040"/>
+            <a:off x="640080" y="6355080"/>
+            <a:ext cx="10972800" cy="365760"/>
           </a:xfrm>
           <a:prstGeom prst="rect">
             <a:avLst/>
@@ -5621,13 +8513,13 @@
               </a:lnSpc>
             </a:pPr>
             <a:r>
-              <a:rPr sz="1050" b="0">
+              <a:rPr sz="1000" b="0">
                 <a:solidFill>
                   <a:srgbClr val="5A6474"/>
                 </a:solidFill>
                 <a:latin typeface="Courier New"/>
               </a:rPr>
-              <a:t>Source: impeccable.style/slop — Paul Bakaus (free &amp; open source)</a:t>
+              <a:t>Good Code, Good Vibes · TECHIE 1121 · Cornell Tech · Summer 2026</a:t>
             </a:r>
           </a:p>
         </p:txBody>
@@ -5692,7 +8584,7 @@
                 </a:solidFill>
                 <a:latin typeface="Courier New"/>
               </a:rPr>
-              <a:t>ACTIVITY · ROUND 1</a:t>
+              <a:t>HOW TO RUN IT</a:t>
             </a:r>
           </a:p>
         </p:txBody>
@@ -5775,7 +8667,7 @@
                 </a:solidFill>
                 <a:latin typeface="Arial"/>
               </a:rPr>
-              <a:t>Peer-test for usability</a:t>
+              <a:t>A usability test in 4 moves</a:t>
             </a:r>
           </a:p>
         </p:txBody>
@@ -5823,7 +8715,7 @@
                 </a:solidFill>
                 <a:latin typeface="Arial"/>
               </a:rPr>
-              <a:t>Each team tests other teams’ projects — and gets tested.</a:t>
+              <a:t>Give a real task ("sign up and log your first entry") - not a tour.</a:t>
             </a:r>
           </a:p>
           <a:p>
@@ -5848,7 +8740,7 @@
                 </a:solidFill>
                 <a:latin typeface="Arial"/>
               </a:rPr>
-              <a:t>Testers: run the 4 moves above; log issues against Nielsen’s heuristics.</a:t>
+              <a:t>Watch, don't help. Let them struggle a bit - silence is data.</a:t>
             </a:r>
           </a:p>
           <a:p>
@@ -5873,7 +8765,7 @@
                 </a:solidFill>
                 <a:latin typeface="Arial"/>
               </a:rPr>
-              <a:t>Teams: watch your users struggle — resist the urge to explain.</a:t>
+              <a:t>Ask them to think aloud - narrate what they see, expect, and want.</a:t>
             </a:r>
           </a:p>
           <a:p>
@@ -5898,7 +8790,7 @@
                 </a:solidFill>
                 <a:latin typeface="Arial"/>
               </a:rPr>
-              <a:t>Rank fixes by how badly they block the task, then iterate.</a:t>
+              <a:t>Note every hesitation, wrong turn, and dead end - name it against Nielsen's heuristics.</a:t>
             </a:r>
           </a:p>
         </p:txBody>
@@ -5938,6 +8830,1235 @@
                 <a:latin typeface="Courier New"/>
               </a:rPr>
               <a:t>Good Code, Good Vibes · TECHIE 1121 · Cornell Tech · Summer 2026</a:t>
+            </a:r>
+          </a:p>
+        </p:txBody>
+      </p:sp>
+    </p:spTree>
+  </p:cSld>
+  <p:clrMapOvr>
+    <a:masterClrMapping/>
+  </p:clrMapOvr>
+</p:sld>
+</file>
+
+<file path=ppt/slides/slide8.xml><?xml version="1.0" encoding="utf-8"?>
+<p:sld xmlns:a="http://schemas.openxmlformats.org/drawingml/2006/main" xmlns:p="http://schemas.openxmlformats.org/presentationml/2006/main" xmlns:r="http://schemas.openxmlformats.org/officeDocument/2006/relationships">
+  <p:cSld>
+    <p:bg>
+      <p:bgPr>
+        <a:solidFill>
+          <a:srgbClr val="0B0E14"/>
+        </a:solidFill>
+        <a:effectLst/>
+      </p:bgPr>
+    </p:bg>
+    <p:spTree>
+      <p:nvGrpSpPr>
+        <p:cNvPr id="1" name=""/>
+        <p:cNvGrpSpPr/>
+        <p:nvPr/>
+      </p:nvGrpSpPr>
+      <p:grpSpPr/>
+      <p:sp>
+        <p:nvSpPr>
+          <p:cNvPr id="2" name="TextBox 1"/>
+          <p:cNvSpPr txBox="1"/>
+          <p:nvPr/>
+        </p:nvSpPr>
+        <p:spPr>
+          <a:xfrm>
+            <a:off x="640080" y="502920"/>
+            <a:ext cx="10058400" cy="365760"/>
+          </a:xfrm>
+          <a:prstGeom prst="rect">
+            <a:avLst/>
+          </a:prstGeom>
+          <a:noFill/>
+        </p:spPr>
+        <p:txBody>
+          <a:bodyPr wrap="square" anchor="t">
+            <a:spAutoFit/>
+          </a:bodyPr>
+          <a:lstStyle/>
+          <a:p>
+            <a:pPr algn="l">
+              <a:lnSpc>
+                <a:spcPct val="100000"/>
+              </a:lnSpc>
+            </a:pPr>
+            <a:r>
+              <a:rPr sz="1300" b="1">
+                <a:solidFill>
+                  <a:srgbClr val="00FF41"/>
+                </a:solidFill>
+                <a:latin typeface="Courier New"/>
+              </a:rPr>
+              <a:t>MODERATION</a:t>
+            </a:r>
+          </a:p>
+        </p:txBody>
+      </p:sp>
+      <p:sp>
+        <p:nvSpPr>
+          <p:cNvPr id="3" name="Rectangle 2"/>
+          <p:cNvSpPr/>
+          <p:nvPr/>
+        </p:nvSpPr>
+        <p:spPr>
+          <a:xfrm>
+            <a:off x="640080" y="932688"/>
+            <a:ext cx="822960" cy="73152"/>
+          </a:xfrm>
+          <a:prstGeom prst="rect">
+            <a:avLst/>
+          </a:prstGeom>
+          <a:solidFill>
+            <a:srgbClr val="00FF41"/>
+          </a:solidFill>
+          <a:ln>
+            <a:noFill/>
+          </a:ln>
+          <a:effectLst/>
+        </p:spPr>
+        <p:style>
+          <a:lnRef idx="1">
+            <a:schemeClr val="accent1"/>
+          </a:lnRef>
+          <a:fillRef idx="3">
+            <a:schemeClr val="accent1"/>
+          </a:fillRef>
+          <a:effectRef idx="2">
+            <a:schemeClr val="accent1"/>
+          </a:effectRef>
+          <a:fontRef idx="minor">
+            <a:schemeClr val="lt1"/>
+          </a:fontRef>
+        </p:style>
+        <p:txBody>
+          <a:bodyPr rtlCol="0" anchor="ctr"/>
+          <a:lstStyle/>
+          <a:p>
+            <a:pPr algn="ctr"/>
+          </a:p>
+        </p:txBody>
+      </p:sp>
+      <p:sp>
+        <p:nvSpPr>
+          <p:cNvPr id="4" name="TextBox 3"/>
+          <p:cNvSpPr txBox="1"/>
+          <p:nvPr/>
+        </p:nvSpPr>
+        <p:spPr>
+          <a:xfrm>
+            <a:off x="640080" y="1188720"/>
+            <a:ext cx="10972800" cy="914400"/>
+          </a:xfrm>
+          <a:prstGeom prst="rect">
+            <a:avLst/>
+          </a:prstGeom>
+          <a:noFill/>
+        </p:spPr>
+        <p:txBody>
+          <a:bodyPr wrap="square" anchor="t">
+            <a:spAutoFit/>
+          </a:bodyPr>
+          <a:lstStyle/>
+          <a:p>
+            <a:pPr algn="l">
+              <a:lnSpc>
+                <a:spcPct val="100000"/>
+              </a:lnSpc>
+            </a:pPr>
+            <a:r>
+              <a:rPr sz="3200" b="1">
+                <a:solidFill>
+                  <a:srgbClr val="F5F7FA"/>
+                </a:solidFill>
+                <a:latin typeface="Arial"/>
+              </a:rPr>
+              <a:t>Prompt without leading</a:t>
+            </a:r>
+          </a:p>
+        </p:txBody>
+      </p:sp>
+      <p:sp>
+        <p:nvSpPr>
+          <p:cNvPr id="5" name="Rounded Rectangle 4"/>
+          <p:cNvSpPr/>
+          <p:nvPr/>
+        </p:nvSpPr>
+        <p:spPr>
+          <a:xfrm>
+            <a:off x="640080" y="2468880"/>
+            <a:ext cx="3393338" cy="3383280"/>
+          </a:xfrm>
+          <a:prstGeom prst="roundRect">
+            <a:avLst/>
+          </a:prstGeom>
+          <a:solidFill>
+            <a:srgbClr val="151B26"/>
+          </a:solidFill>
+          <a:ln>
+            <a:noFill/>
+          </a:ln>
+          <a:effectLst/>
+        </p:spPr>
+        <p:style>
+          <a:lnRef idx="1">
+            <a:schemeClr val="accent1"/>
+          </a:lnRef>
+          <a:fillRef idx="3">
+            <a:schemeClr val="accent1"/>
+          </a:fillRef>
+          <a:effectRef idx="2">
+            <a:schemeClr val="accent1"/>
+          </a:effectRef>
+          <a:fontRef idx="minor">
+            <a:schemeClr val="lt1"/>
+          </a:fontRef>
+        </p:style>
+        <p:txBody>
+          <a:bodyPr rtlCol="0" anchor="ctr"/>
+          <a:lstStyle/>
+          <a:p>
+            <a:pPr algn="ctr"/>
+          </a:p>
+        </p:txBody>
+      </p:sp>
+      <p:sp>
+        <p:nvSpPr>
+          <p:cNvPr id="6" name="Rectangle 5"/>
+          <p:cNvSpPr/>
+          <p:nvPr/>
+        </p:nvSpPr>
+        <p:spPr>
+          <a:xfrm>
+            <a:off x="640080" y="2468880"/>
+            <a:ext cx="3393338" cy="82296"/>
+          </a:xfrm>
+          <a:prstGeom prst="rect">
+            <a:avLst/>
+          </a:prstGeom>
+          <a:solidFill>
+            <a:srgbClr val="00FF41"/>
+          </a:solidFill>
+          <a:ln>
+            <a:noFill/>
+          </a:ln>
+          <a:effectLst/>
+        </p:spPr>
+        <p:style>
+          <a:lnRef idx="1">
+            <a:schemeClr val="accent1"/>
+          </a:lnRef>
+          <a:fillRef idx="3">
+            <a:schemeClr val="accent1"/>
+          </a:fillRef>
+          <a:effectRef idx="2">
+            <a:schemeClr val="accent1"/>
+          </a:effectRef>
+          <a:fontRef idx="minor">
+            <a:schemeClr val="lt1"/>
+          </a:fontRef>
+        </p:style>
+        <p:txBody>
+          <a:bodyPr rtlCol="0" anchor="ctr"/>
+          <a:lstStyle/>
+          <a:p>
+            <a:pPr algn="ctr"/>
+          </a:p>
+        </p:txBody>
+      </p:sp>
+      <p:sp>
+        <p:nvSpPr>
+          <p:cNvPr id="7" name="TextBox 6"/>
+          <p:cNvSpPr txBox="1"/>
+          <p:nvPr/>
+        </p:nvSpPr>
+        <p:spPr>
+          <a:xfrm>
+            <a:off x="914400" y="2788920"/>
+            <a:ext cx="2844698" cy="457200"/>
+          </a:xfrm>
+          <a:prstGeom prst="rect">
+            <a:avLst/>
+          </a:prstGeom>
+          <a:noFill/>
+        </p:spPr>
+        <p:txBody>
+          <a:bodyPr wrap="square" anchor="t">
+            <a:spAutoFit/>
+          </a:bodyPr>
+          <a:lstStyle/>
+          <a:p>
+            <a:pPr algn="l">
+              <a:lnSpc>
+                <a:spcPct val="100000"/>
+              </a:lnSpc>
+            </a:pPr>
+            <a:r>
+              <a:rPr sz="1200" b="1">
+                <a:solidFill>
+                  <a:srgbClr val="00FF41"/>
+                </a:solidFill>
+                <a:latin typeface="Courier New"/>
+              </a:rPr>
+              <a:t>ENCOURAGE</a:t>
+            </a:r>
+          </a:p>
+        </p:txBody>
+      </p:sp>
+      <p:sp>
+        <p:nvSpPr>
+          <p:cNvPr id="8" name="TextBox 7"/>
+          <p:cNvSpPr txBox="1"/>
+          <p:nvPr/>
+        </p:nvSpPr>
+        <p:spPr>
+          <a:xfrm>
+            <a:off x="914400" y="3246120"/>
+            <a:ext cx="2844698" cy="822960"/>
+          </a:xfrm>
+          <a:prstGeom prst="rect">
+            <a:avLst/>
+          </a:prstGeom>
+          <a:noFill/>
+        </p:spPr>
+        <p:txBody>
+          <a:bodyPr wrap="square" anchor="t">
+            <a:spAutoFit/>
+          </a:bodyPr>
+          <a:lstStyle/>
+          <a:p>
+            <a:pPr algn="l">
+              <a:lnSpc>
+                <a:spcPct val="100000"/>
+              </a:lnSpc>
+            </a:pPr>
+            <a:r>
+              <a:rPr sz="2000" b="1">
+                <a:solidFill>
+                  <a:srgbClr val="F5F7FA"/>
+                </a:solidFill>
+                <a:latin typeface="Arial"/>
+              </a:rPr>
+              <a:t>"What are you thinking?"</a:t>
+            </a:r>
+          </a:p>
+        </p:txBody>
+      </p:sp>
+      <p:sp>
+        <p:nvSpPr>
+          <p:cNvPr id="9" name="TextBox 8"/>
+          <p:cNvSpPr txBox="1"/>
+          <p:nvPr/>
+        </p:nvSpPr>
+        <p:spPr>
+          <a:xfrm>
+            <a:off x="914400" y="4114800"/>
+            <a:ext cx="2844698" cy="1554480"/>
+          </a:xfrm>
+          <a:prstGeom prst="rect">
+            <a:avLst/>
+          </a:prstGeom>
+          <a:noFill/>
+        </p:spPr>
+        <p:txBody>
+          <a:bodyPr wrap="square" anchor="t">
+            <a:spAutoFit/>
+          </a:bodyPr>
+          <a:lstStyle/>
+          <a:p>
+            <a:pPr algn="l">
+              <a:lnSpc>
+                <a:spcPct val="110000"/>
+              </a:lnSpc>
+            </a:pPr>
+            <a:r>
+              <a:rPr sz="1500" b="0">
+                <a:solidFill>
+                  <a:srgbClr val="8A94A6"/>
+                </a:solidFill>
+                <a:latin typeface="Arial"/>
+              </a:rPr>
+              <a:t>Keep them talking without steering. Let silence sit, then nudge gently.</a:t>
+            </a:r>
+          </a:p>
+        </p:txBody>
+      </p:sp>
+      <p:sp>
+        <p:nvSpPr>
+          <p:cNvPr id="10" name="Rounded Rectangle 9"/>
+          <p:cNvSpPr/>
+          <p:nvPr/>
+        </p:nvSpPr>
+        <p:spPr>
+          <a:xfrm>
+            <a:off x="4399178" y="2468880"/>
+            <a:ext cx="3393338" cy="3383280"/>
+          </a:xfrm>
+          <a:prstGeom prst="roundRect">
+            <a:avLst/>
+          </a:prstGeom>
+          <a:solidFill>
+            <a:srgbClr val="151B26"/>
+          </a:solidFill>
+          <a:ln>
+            <a:noFill/>
+          </a:ln>
+          <a:effectLst/>
+        </p:spPr>
+        <p:style>
+          <a:lnRef idx="1">
+            <a:schemeClr val="accent1"/>
+          </a:lnRef>
+          <a:fillRef idx="3">
+            <a:schemeClr val="accent1"/>
+          </a:fillRef>
+          <a:effectRef idx="2">
+            <a:schemeClr val="accent1"/>
+          </a:effectRef>
+          <a:fontRef idx="minor">
+            <a:schemeClr val="lt1"/>
+          </a:fontRef>
+        </p:style>
+        <p:txBody>
+          <a:bodyPr rtlCol="0" anchor="ctr"/>
+          <a:lstStyle/>
+          <a:p>
+            <a:pPr algn="ctr"/>
+          </a:p>
+        </p:txBody>
+      </p:sp>
+      <p:sp>
+        <p:nvSpPr>
+          <p:cNvPr id="11" name="Rectangle 10"/>
+          <p:cNvSpPr/>
+          <p:nvPr/>
+        </p:nvSpPr>
+        <p:spPr>
+          <a:xfrm>
+            <a:off x="4399178" y="2468880"/>
+            <a:ext cx="3393338" cy="82296"/>
+          </a:xfrm>
+          <a:prstGeom prst="rect">
+            <a:avLst/>
+          </a:prstGeom>
+          <a:solidFill>
+            <a:srgbClr val="00FF41"/>
+          </a:solidFill>
+          <a:ln>
+            <a:noFill/>
+          </a:ln>
+          <a:effectLst/>
+        </p:spPr>
+        <p:style>
+          <a:lnRef idx="1">
+            <a:schemeClr val="accent1"/>
+          </a:lnRef>
+          <a:fillRef idx="3">
+            <a:schemeClr val="accent1"/>
+          </a:fillRef>
+          <a:effectRef idx="2">
+            <a:schemeClr val="accent1"/>
+          </a:effectRef>
+          <a:fontRef idx="minor">
+            <a:schemeClr val="lt1"/>
+          </a:fontRef>
+        </p:style>
+        <p:txBody>
+          <a:bodyPr rtlCol="0" anchor="ctr"/>
+          <a:lstStyle/>
+          <a:p>
+            <a:pPr algn="ctr"/>
+          </a:p>
+        </p:txBody>
+      </p:sp>
+      <p:sp>
+        <p:nvSpPr>
+          <p:cNvPr id="12" name="TextBox 11"/>
+          <p:cNvSpPr txBox="1"/>
+          <p:nvPr/>
+        </p:nvSpPr>
+        <p:spPr>
+          <a:xfrm>
+            <a:off x="4673498" y="2788920"/>
+            <a:ext cx="2844698" cy="457200"/>
+          </a:xfrm>
+          <a:prstGeom prst="rect">
+            <a:avLst/>
+          </a:prstGeom>
+          <a:noFill/>
+        </p:spPr>
+        <p:txBody>
+          <a:bodyPr wrap="square" anchor="t">
+            <a:spAutoFit/>
+          </a:bodyPr>
+          <a:lstStyle/>
+          <a:p>
+            <a:pPr algn="l">
+              <a:lnSpc>
+                <a:spcPct val="100000"/>
+              </a:lnSpc>
+            </a:pPr>
+            <a:r>
+              <a:rPr sz="1200" b="1">
+                <a:solidFill>
+                  <a:srgbClr val="00FF41"/>
+                </a:solidFill>
+                <a:latin typeface="Courier New"/>
+              </a:rPr>
+              <a:t>EXPECTATION</a:t>
+            </a:r>
+          </a:p>
+        </p:txBody>
+      </p:sp>
+      <p:sp>
+        <p:nvSpPr>
+          <p:cNvPr id="13" name="TextBox 12"/>
+          <p:cNvSpPr txBox="1"/>
+          <p:nvPr/>
+        </p:nvSpPr>
+        <p:spPr>
+          <a:xfrm>
+            <a:off x="4673498" y="3246120"/>
+            <a:ext cx="2844698" cy="822960"/>
+          </a:xfrm>
+          <a:prstGeom prst="rect">
+            <a:avLst/>
+          </a:prstGeom>
+          <a:noFill/>
+        </p:spPr>
+        <p:txBody>
+          <a:bodyPr wrap="square" anchor="t">
+            <a:spAutoFit/>
+          </a:bodyPr>
+          <a:lstStyle/>
+          <a:p>
+            <a:pPr algn="l">
+              <a:lnSpc>
+                <a:spcPct val="100000"/>
+              </a:lnSpc>
+            </a:pPr>
+            <a:r>
+              <a:rPr sz="2000" b="1">
+                <a:solidFill>
+                  <a:srgbClr val="F5F7FA"/>
+                </a:solidFill>
+                <a:latin typeface="Arial"/>
+              </a:rPr>
+              <a:t>"What did you expect to happen?"</a:t>
+            </a:r>
+          </a:p>
+        </p:txBody>
+      </p:sp>
+      <p:sp>
+        <p:nvSpPr>
+          <p:cNvPr id="14" name="TextBox 13"/>
+          <p:cNvSpPr txBox="1"/>
+          <p:nvPr/>
+        </p:nvSpPr>
+        <p:spPr>
+          <a:xfrm>
+            <a:off x="4673498" y="4114800"/>
+            <a:ext cx="2844698" cy="1554480"/>
+          </a:xfrm>
+          <a:prstGeom prst="rect">
+            <a:avLst/>
+          </a:prstGeom>
+          <a:noFill/>
+        </p:spPr>
+        <p:txBody>
+          <a:bodyPr wrap="square" anchor="t">
+            <a:spAutoFit/>
+          </a:bodyPr>
+          <a:lstStyle/>
+          <a:p>
+            <a:pPr algn="l">
+              <a:lnSpc>
+                <a:spcPct val="110000"/>
+              </a:lnSpc>
+            </a:pPr>
+            <a:r>
+              <a:rPr sz="1500" b="0">
+                <a:solidFill>
+                  <a:srgbClr val="8A94A6"/>
+                </a:solidFill>
+                <a:latin typeface="Arial"/>
+              </a:rPr>
+              <a:t>Surfaces the gap between their mental model and your design.</a:t>
+            </a:r>
+          </a:p>
+        </p:txBody>
+      </p:sp>
+      <p:sp>
+        <p:nvSpPr>
+          <p:cNvPr id="15" name="Rounded Rectangle 14"/>
+          <p:cNvSpPr/>
+          <p:nvPr/>
+        </p:nvSpPr>
+        <p:spPr>
+          <a:xfrm>
+            <a:off x="8158276" y="2468880"/>
+            <a:ext cx="3393338" cy="3383280"/>
+          </a:xfrm>
+          <a:prstGeom prst="roundRect">
+            <a:avLst/>
+          </a:prstGeom>
+          <a:solidFill>
+            <a:srgbClr val="151B26"/>
+          </a:solidFill>
+          <a:ln>
+            <a:noFill/>
+          </a:ln>
+          <a:effectLst/>
+        </p:spPr>
+        <p:style>
+          <a:lnRef idx="1">
+            <a:schemeClr val="accent1"/>
+          </a:lnRef>
+          <a:fillRef idx="3">
+            <a:schemeClr val="accent1"/>
+          </a:fillRef>
+          <a:effectRef idx="2">
+            <a:schemeClr val="accent1"/>
+          </a:effectRef>
+          <a:fontRef idx="minor">
+            <a:schemeClr val="lt1"/>
+          </a:fontRef>
+        </p:style>
+        <p:txBody>
+          <a:bodyPr rtlCol="0" anchor="ctr"/>
+          <a:lstStyle/>
+          <a:p>
+            <a:pPr algn="ctr"/>
+          </a:p>
+        </p:txBody>
+      </p:sp>
+      <p:sp>
+        <p:nvSpPr>
+          <p:cNvPr id="16" name="Rectangle 15"/>
+          <p:cNvSpPr/>
+          <p:nvPr/>
+        </p:nvSpPr>
+        <p:spPr>
+          <a:xfrm>
+            <a:off x="8158276" y="2468880"/>
+            <a:ext cx="3393338" cy="82296"/>
+          </a:xfrm>
+          <a:prstGeom prst="rect">
+            <a:avLst/>
+          </a:prstGeom>
+          <a:solidFill>
+            <a:srgbClr val="00FF41"/>
+          </a:solidFill>
+          <a:ln>
+            <a:noFill/>
+          </a:ln>
+          <a:effectLst/>
+        </p:spPr>
+        <p:style>
+          <a:lnRef idx="1">
+            <a:schemeClr val="accent1"/>
+          </a:lnRef>
+          <a:fillRef idx="3">
+            <a:schemeClr val="accent1"/>
+          </a:fillRef>
+          <a:effectRef idx="2">
+            <a:schemeClr val="accent1"/>
+          </a:effectRef>
+          <a:fontRef idx="minor">
+            <a:schemeClr val="lt1"/>
+          </a:fontRef>
+        </p:style>
+        <p:txBody>
+          <a:bodyPr rtlCol="0" anchor="ctr"/>
+          <a:lstStyle/>
+          <a:p>
+            <a:pPr algn="ctr"/>
+          </a:p>
+        </p:txBody>
+      </p:sp>
+      <p:sp>
+        <p:nvSpPr>
+          <p:cNvPr id="17" name="TextBox 16"/>
+          <p:cNvSpPr txBox="1"/>
+          <p:nvPr/>
+        </p:nvSpPr>
+        <p:spPr>
+          <a:xfrm>
+            <a:off x="8432596" y="2788920"/>
+            <a:ext cx="2844698" cy="457200"/>
+          </a:xfrm>
+          <a:prstGeom prst="rect">
+            <a:avLst/>
+          </a:prstGeom>
+          <a:noFill/>
+        </p:spPr>
+        <p:txBody>
+          <a:bodyPr wrap="square" anchor="t">
+            <a:spAutoFit/>
+          </a:bodyPr>
+          <a:lstStyle/>
+          <a:p>
+            <a:pPr algn="l">
+              <a:lnSpc>
+                <a:spcPct val="100000"/>
+              </a:lnSpc>
+            </a:pPr>
+            <a:r>
+              <a:rPr sz="1200" b="1">
+                <a:solidFill>
+                  <a:srgbClr val="00FF41"/>
+                </a:solidFill>
+                <a:latin typeface="Courier New"/>
+              </a:rPr>
+              <a:t>NEVER</a:t>
+            </a:r>
+          </a:p>
+        </p:txBody>
+      </p:sp>
+      <p:sp>
+        <p:nvSpPr>
+          <p:cNvPr id="18" name="TextBox 17"/>
+          <p:cNvSpPr txBox="1"/>
+          <p:nvPr/>
+        </p:nvSpPr>
+        <p:spPr>
+          <a:xfrm>
+            <a:off x="8432596" y="3246120"/>
+            <a:ext cx="2844698" cy="822960"/>
+          </a:xfrm>
+          <a:prstGeom prst="rect">
+            <a:avLst/>
+          </a:prstGeom>
+          <a:noFill/>
+        </p:spPr>
+        <p:txBody>
+          <a:bodyPr wrap="square" anchor="t">
+            <a:spAutoFit/>
+          </a:bodyPr>
+          <a:lstStyle/>
+          <a:p>
+            <a:pPr algn="l">
+              <a:lnSpc>
+                <a:spcPct val="100000"/>
+              </a:lnSpc>
+            </a:pPr>
+            <a:r>
+              <a:rPr sz="2000" b="1">
+                <a:solidFill>
+                  <a:srgbClr val="F5F7FA"/>
+                </a:solidFill>
+                <a:latin typeface="Arial"/>
+              </a:rPr>
+              <a:t>"Did you like it?"</a:t>
+            </a:r>
+          </a:p>
+        </p:txBody>
+      </p:sp>
+      <p:sp>
+        <p:nvSpPr>
+          <p:cNvPr id="19" name="TextBox 18"/>
+          <p:cNvSpPr txBox="1"/>
+          <p:nvPr/>
+        </p:nvSpPr>
+        <p:spPr>
+          <a:xfrm>
+            <a:off x="8432596" y="4114800"/>
+            <a:ext cx="2844698" cy="1554480"/>
+          </a:xfrm>
+          <a:prstGeom prst="rect">
+            <a:avLst/>
+          </a:prstGeom>
+          <a:noFill/>
+        </p:spPr>
+        <p:txBody>
+          <a:bodyPr wrap="square" anchor="t">
+            <a:spAutoFit/>
+          </a:bodyPr>
+          <a:lstStyle/>
+          <a:p>
+            <a:pPr algn="l">
+              <a:lnSpc>
+                <a:spcPct val="110000"/>
+              </a:lnSpc>
+            </a:pPr>
+            <a:r>
+              <a:rPr sz="1500" b="0">
+                <a:solidFill>
+                  <a:srgbClr val="8A94A6"/>
+                </a:solidFill>
+                <a:latin typeface="Arial"/>
+              </a:rPr>
+              <a:t>Leading and unstructured. Watch what they DO - don't fish for approval.</a:t>
+            </a:r>
+          </a:p>
+        </p:txBody>
+      </p:sp>
+      <p:sp>
+        <p:nvSpPr>
+          <p:cNvPr id="20" name="TextBox 19"/>
+          <p:cNvSpPr txBox="1"/>
+          <p:nvPr/>
+        </p:nvSpPr>
+        <p:spPr>
+          <a:xfrm>
+            <a:off x="640080" y="6355080"/>
+            <a:ext cx="10972800" cy="365760"/>
+          </a:xfrm>
+          <a:prstGeom prst="rect">
+            <a:avLst/>
+          </a:prstGeom>
+          <a:noFill/>
+        </p:spPr>
+        <p:txBody>
+          <a:bodyPr wrap="square" anchor="t">
+            <a:spAutoFit/>
+          </a:bodyPr>
+          <a:lstStyle/>
+          <a:p>
+            <a:pPr algn="l">
+              <a:lnSpc>
+                <a:spcPct val="100000"/>
+              </a:lnSpc>
+            </a:pPr>
+            <a:r>
+              <a:rPr sz="1000" b="0">
+                <a:solidFill>
+                  <a:srgbClr val="5A6474"/>
+                </a:solidFill>
+                <a:latin typeface="Courier New"/>
+              </a:rPr>
+              <a:t>Good Code, Good Vibes · TECHIE 1121 · Cornell Tech · Summer 2026</a:t>
+            </a:r>
+          </a:p>
+        </p:txBody>
+      </p:sp>
+      <p:sp>
+        <p:nvSpPr>
+          <p:cNvPr id="21" name="TextBox 20"/>
+          <p:cNvSpPr txBox="1"/>
+          <p:nvPr/>
+        </p:nvSpPr>
+        <p:spPr>
+          <a:xfrm>
+            <a:off x="640080" y="6035040"/>
+            <a:ext cx="10972800" cy="292608"/>
+          </a:xfrm>
+          <a:prstGeom prst="rect">
+            <a:avLst/>
+          </a:prstGeom>
+          <a:noFill/>
+        </p:spPr>
+        <p:txBody>
+          <a:bodyPr wrap="square" anchor="t">
+            <a:spAutoFit/>
+          </a:bodyPr>
+          <a:lstStyle/>
+          <a:p>
+            <a:pPr algn="l">
+              <a:lnSpc>
+                <a:spcPct val="100000"/>
+              </a:lnSpc>
+            </a:pPr>
+            <a:r>
+              <a:rPr sz="950" b="0">
+                <a:solidFill>
+                  <a:srgbClr val="5A6474"/>
+                </a:solidFill>
+                <a:latin typeface="Courier New"/>
+              </a:rPr>
+              <a:t>Moderation guidelines adapted from S. Azenkot, INFO 5305 (Cornell Tech)</a:t>
+            </a:r>
+          </a:p>
+        </p:txBody>
+      </p:sp>
+    </p:spTree>
+  </p:cSld>
+  <p:clrMapOvr>
+    <a:masterClrMapping/>
+  </p:clrMapOvr>
+</p:sld>
+</file>
+
+<file path=ppt/slides/slide9.xml><?xml version="1.0" encoding="utf-8"?>
+<p:sld xmlns:a="http://schemas.openxmlformats.org/drawingml/2006/main" xmlns:p="http://schemas.openxmlformats.org/presentationml/2006/main" xmlns:r="http://schemas.openxmlformats.org/officeDocument/2006/relationships">
+  <p:cSld>
+    <p:bg>
+      <p:bgPr>
+        <a:solidFill>
+          <a:srgbClr val="0B0E14"/>
+        </a:solidFill>
+        <a:effectLst/>
+      </p:bgPr>
+    </p:bg>
+    <p:spTree>
+      <p:nvGrpSpPr>
+        <p:cNvPr id="1" name=""/>
+        <p:cNvGrpSpPr/>
+        <p:nvPr/>
+      </p:nvGrpSpPr>
+      <p:grpSpPr/>
+      <p:sp>
+        <p:nvSpPr>
+          <p:cNvPr id="2" name="TextBox 1"/>
+          <p:cNvSpPr txBox="1"/>
+          <p:nvPr/>
+        </p:nvSpPr>
+        <p:spPr>
+          <a:xfrm>
+            <a:off x="640080" y="502920"/>
+            <a:ext cx="10058400" cy="365760"/>
+          </a:xfrm>
+          <a:prstGeom prst="rect">
+            <a:avLst/>
+          </a:prstGeom>
+          <a:noFill/>
+        </p:spPr>
+        <p:txBody>
+          <a:bodyPr wrap="square" anchor="t">
+            <a:spAutoFit/>
+          </a:bodyPr>
+          <a:lstStyle/>
+          <a:p>
+            <a:pPr algn="l">
+              <a:lnSpc>
+                <a:spcPct val="100000"/>
+              </a:lnSpc>
+            </a:pPr>
+            <a:r>
+              <a:rPr sz="1300" b="1">
+                <a:solidFill>
+                  <a:srgbClr val="00FF41"/>
+                </a:solidFill>
+                <a:latin typeface="Courier New"/>
+              </a:rPr>
+              <a:t>WHAT TO LOOK FOR</a:t>
+            </a:r>
+          </a:p>
+        </p:txBody>
+      </p:sp>
+      <p:sp>
+        <p:nvSpPr>
+          <p:cNvPr id="3" name="Rectangle 2"/>
+          <p:cNvSpPr/>
+          <p:nvPr/>
+        </p:nvSpPr>
+        <p:spPr>
+          <a:xfrm>
+            <a:off x="640080" y="932688"/>
+            <a:ext cx="822960" cy="73152"/>
+          </a:xfrm>
+          <a:prstGeom prst="rect">
+            <a:avLst/>
+          </a:prstGeom>
+          <a:solidFill>
+            <a:srgbClr val="00FF41"/>
+          </a:solidFill>
+          <a:ln>
+            <a:noFill/>
+          </a:ln>
+          <a:effectLst/>
+        </p:spPr>
+        <p:style>
+          <a:lnRef idx="1">
+            <a:schemeClr val="accent1"/>
+          </a:lnRef>
+          <a:fillRef idx="3">
+            <a:schemeClr val="accent1"/>
+          </a:fillRef>
+          <a:effectRef idx="2">
+            <a:schemeClr val="accent1"/>
+          </a:effectRef>
+          <a:fontRef idx="minor">
+            <a:schemeClr val="lt1"/>
+          </a:fontRef>
+        </p:style>
+        <p:txBody>
+          <a:bodyPr rtlCol="0" anchor="ctr"/>
+          <a:lstStyle/>
+          <a:p>
+            <a:pPr algn="ctr"/>
+          </a:p>
+        </p:txBody>
+      </p:sp>
+      <p:sp>
+        <p:nvSpPr>
+          <p:cNvPr id="4" name="TextBox 3"/>
+          <p:cNvSpPr txBox="1"/>
+          <p:nvPr/>
+        </p:nvSpPr>
+        <p:spPr>
+          <a:xfrm>
+            <a:off x="640080" y="1188720"/>
+            <a:ext cx="10972800" cy="1097280"/>
+          </a:xfrm>
+          <a:prstGeom prst="rect">
+            <a:avLst/>
+          </a:prstGeom>
+          <a:noFill/>
+        </p:spPr>
+        <p:txBody>
+          <a:bodyPr wrap="square" anchor="t">
+            <a:spAutoFit/>
+          </a:bodyPr>
+          <a:lstStyle/>
+          <a:p>
+            <a:pPr algn="l">
+              <a:lnSpc>
+                <a:spcPct val="100000"/>
+              </a:lnSpc>
+            </a:pPr>
+            <a:r>
+              <a:rPr sz="3400" b="1">
+                <a:solidFill>
+                  <a:srgbClr val="F5F7FA"/>
+                </a:solidFill>
+                <a:latin typeface="Arial"/>
+              </a:rPr>
+              <a:t>Capture evidence, not your interpretation</a:t>
+            </a:r>
+          </a:p>
+        </p:txBody>
+      </p:sp>
+      <p:sp>
+        <p:nvSpPr>
+          <p:cNvPr id="5" name="TextBox 4"/>
+          <p:cNvSpPr txBox="1"/>
+          <p:nvPr/>
+        </p:nvSpPr>
+        <p:spPr>
+          <a:xfrm>
+            <a:off x="658368" y="2286000"/>
+            <a:ext cx="10881360" cy="3657600"/>
+          </a:xfrm>
+          <a:prstGeom prst="rect">
+            <a:avLst/>
+          </a:prstGeom>
+          <a:noFill/>
+        </p:spPr>
+        <p:txBody>
+          <a:bodyPr wrap="square" anchor="t">
+            <a:spAutoFit/>
+          </a:bodyPr>
+          <a:lstStyle/>
+          <a:p>
+            <a:pPr algn="l">
+              <a:lnSpc>
+                <a:spcPct val="112000"/>
+              </a:lnSpc>
+            </a:pPr>
+            <a:r>
+              <a:rPr sz="2000" b="0">
+                <a:solidFill>
+                  <a:srgbClr val="F5F7FA"/>
+                </a:solidFill>
+                <a:latin typeface="Arial"/>
+              </a:rPr>
+              <a:t>Look for usability problems - and write down what happened, not what you think it means:</a:t>
+            </a:r>
+          </a:p>
+          <a:p>
+            <a:pPr algn="l">
+              <a:lnSpc>
+                <a:spcPct val="112000"/>
+              </a:lnSpc>
+            </a:pPr>
+            <a:r>
+              <a:rPr sz="2000" b="0">
+                <a:solidFill>
+                  <a:srgbClr val="F5F7FA"/>
+                </a:solidFill>
+                <a:latin typeface="Arial"/>
+              </a:rPr>
+              <a:t/>
+            </a:r>
+          </a:p>
+          <a:p>
+            <a:pPr algn="l">
+              <a:lnSpc>
+                <a:spcPct val="112000"/>
+              </a:lnSpc>
+            </a:pPr>
+            <a:r>
+              <a:rPr sz="1900" b="1">
+                <a:solidFill>
+                  <a:srgbClr val="00FF41"/>
+                </a:solidFill>
+                <a:latin typeface="Arial"/>
+              </a:rPr>
+              <a:t>Breakdowns</a:t>
+            </a:r>
+            <a:r>
+              <a:rPr sz="1900" b="0">
+                <a:solidFill>
+                  <a:srgbClr val="F5F7FA"/>
+                </a:solidFill>
+                <a:latin typeface="Arial"/>
+              </a:rPr>
+              <a:t> - they get stuck, backtrack, or ask for help.</a:t>
+            </a:r>
+          </a:p>
+          <a:p>
+            <a:pPr algn="l">
+              <a:lnSpc>
+                <a:spcPct val="112000"/>
+              </a:lnSpc>
+            </a:pPr>
+            <a:r>
+              <a:rPr sz="1900" b="1">
+                <a:solidFill>
+                  <a:srgbClr val="00FF41"/>
+                </a:solidFill>
+                <a:latin typeface="Arial"/>
+              </a:rPr>
+              <a:t>Errors</a:t>
+            </a:r>
+            <a:r>
+              <a:rPr sz="1900" b="0">
+                <a:solidFill>
+                  <a:srgbClr val="F5F7FA"/>
+                </a:solidFill>
+                <a:latin typeface="Arial"/>
+              </a:rPr>
+              <a:t> - wrong action, wrong turn, wrong mental model.</a:t>
+            </a:r>
+          </a:p>
+          <a:p>
+            <a:pPr algn="l">
+              <a:lnSpc>
+                <a:spcPct val="112000"/>
+              </a:lnSpc>
+            </a:pPr>
+            <a:r>
+              <a:rPr sz="1900" b="1">
+                <a:solidFill>
+                  <a:srgbClr val="00FF41"/>
+                </a:solidFill>
+                <a:latin typeface="Arial"/>
+              </a:rPr>
+              <a:t>Workarounds</a:t>
+            </a:r>
+            <a:r>
+              <a:rPr sz="1900" b="0">
+                <a:solidFill>
+                  <a:srgbClr val="F5F7FA"/>
+                </a:solidFill>
+                <a:latin typeface="Arial"/>
+              </a:rPr>
+              <a:t> - they reach the goal, but not the way you designed.</a:t>
+            </a:r>
+          </a:p>
+          <a:p>
+            <a:pPr algn="l">
+              <a:lnSpc>
+                <a:spcPct val="112000"/>
+              </a:lnSpc>
+            </a:pPr>
+            <a:r>
+              <a:rPr sz="2000" b="0">
+                <a:solidFill>
+                  <a:srgbClr val="F5F7FA"/>
+                </a:solidFill>
+                <a:latin typeface="Arial"/>
+              </a:rPr>
+              <a:t/>
+            </a:r>
+          </a:p>
+          <a:p>
+            <a:pPr algn="l">
+              <a:lnSpc>
+                <a:spcPct val="112000"/>
+              </a:lnSpc>
+            </a:pPr>
+            <a:r>
+              <a:rPr sz="1700" b="0">
+                <a:solidFill>
+                  <a:srgbClr val="8A94A6"/>
+                </a:solidFill>
+                <a:latin typeface="Arial"/>
+              </a:rPr>
+              <a:t>Note the time, what they did, and a short quote. Refine from the recording afterwards.</a:t>
+            </a:r>
+          </a:p>
+        </p:txBody>
+      </p:sp>
+      <p:sp>
+        <p:nvSpPr>
+          <p:cNvPr id="6" name="TextBox 5"/>
+          <p:cNvSpPr txBox="1"/>
+          <p:nvPr/>
+        </p:nvSpPr>
+        <p:spPr>
+          <a:xfrm>
+            <a:off x="640080" y="6355080"/>
+            <a:ext cx="10972800" cy="365760"/>
+          </a:xfrm>
+          <a:prstGeom prst="rect">
+            <a:avLst/>
+          </a:prstGeom>
+          <a:noFill/>
+        </p:spPr>
+        <p:txBody>
+          <a:bodyPr wrap="square" anchor="t">
+            <a:spAutoFit/>
+          </a:bodyPr>
+          <a:lstStyle/>
+          <a:p>
+            <a:pPr algn="l">
+              <a:lnSpc>
+                <a:spcPct val="100000"/>
+              </a:lnSpc>
+            </a:pPr>
+            <a:r>
+              <a:rPr sz="1000" b="0">
+                <a:solidFill>
+                  <a:srgbClr val="5A6474"/>
+                </a:solidFill>
+                <a:latin typeface="Courier New"/>
+              </a:rPr>
+              <a:t>Good Code, Good Vibes · TECHIE 1121 · Cornell Tech · Summer 2026</a:t>
+            </a:r>
+          </a:p>
+        </p:txBody>
+      </p:sp>
+      <p:sp>
+        <p:nvSpPr>
+          <p:cNvPr id="7" name="TextBox 6"/>
+          <p:cNvSpPr txBox="1"/>
+          <p:nvPr/>
+        </p:nvSpPr>
+        <p:spPr>
+          <a:xfrm>
+            <a:off x="640080" y="6035040"/>
+            <a:ext cx="10972800" cy="292608"/>
+          </a:xfrm>
+          <a:prstGeom prst="rect">
+            <a:avLst/>
+          </a:prstGeom>
+          <a:noFill/>
+        </p:spPr>
+        <p:txBody>
+          <a:bodyPr wrap="square" anchor="t">
+            <a:spAutoFit/>
+          </a:bodyPr>
+          <a:lstStyle/>
+          <a:p>
+            <a:pPr algn="l">
+              <a:lnSpc>
+                <a:spcPct val="100000"/>
+              </a:lnSpc>
+            </a:pPr>
+            <a:r>
+              <a:rPr sz="950" b="0">
+                <a:solidFill>
+                  <a:srgbClr val="5A6474"/>
+                </a:solidFill>
+                <a:latin typeface="Courier New"/>
+              </a:rPr>
+              <a:t>Evidence framing adapted from S. Azenkot, INFO 5305 (Cornell Tech)</a:t>
             </a:r>
           </a:p>
         </p:txBody>

--- a/slides/Week3-Mon-User-Testing-I.pptx
+++ b/slides/Week3-Mon-User-Testing-I.pptx
@@ -20,6 +20,8 @@
     <p:sldId id="268" r:id="rId20"/>
     <p:sldId id="269" r:id="rId21"/>
     <p:sldId id="270" r:id="rId22"/>
+    <p:sldId id="271" r:id="rId23"/>
+    <p:sldId id="272" r:id="rId24"/>
   </p:sldIdLst>
   <p:sldSz cx="12191695" cy="6858000" type="screen4x3"/>
   <p:notesSz cx="6858000" cy="9144000"/>
@@ -6775,6 +6777,653 @@
       <p:sp>
         <p:nvSpPr>
           <p:cNvPr id="11" name="TextBox 10"/>
+          <p:cNvSpPr txBox="1"/>
+          <p:nvPr/>
+        </p:nvSpPr>
+        <p:spPr>
+          <a:xfrm>
+            <a:off x="640080" y="6355080"/>
+            <a:ext cx="10972800" cy="365760"/>
+          </a:xfrm>
+          <a:prstGeom prst="rect">
+            <a:avLst/>
+          </a:prstGeom>
+          <a:noFill/>
+        </p:spPr>
+        <p:txBody>
+          <a:bodyPr wrap="square" anchor="t">
+            <a:spAutoFit/>
+          </a:bodyPr>
+          <a:lstStyle/>
+          <a:p>
+            <a:pPr algn="l">
+              <a:lnSpc>
+                <a:spcPct val="100000"/>
+              </a:lnSpc>
+            </a:pPr>
+            <a:r>
+              <a:rPr sz="1000" b="0">
+                <a:solidFill>
+                  <a:srgbClr val="5A6474"/>
+                </a:solidFill>
+                <a:latin typeface="Courier New"/>
+              </a:rPr>
+              <a:t>Good Code, Good Vibes · TECHIE 1121 · Cornell Tech · Summer 2026</a:t>
+            </a:r>
+          </a:p>
+        </p:txBody>
+      </p:sp>
+    </p:spTree>
+  </p:cSld>
+  <p:clrMapOvr>
+    <a:masterClrMapping/>
+  </p:clrMapOvr>
+</p:sld>
+</file>
+
+<file path=ppt/slides/slide16.xml><?xml version="1.0" encoding="utf-8"?>
+<p:sld xmlns:a="http://schemas.openxmlformats.org/drawingml/2006/main" xmlns:p="http://schemas.openxmlformats.org/presentationml/2006/main" xmlns:r="http://schemas.openxmlformats.org/officeDocument/2006/relationships">
+  <p:cSld>
+    <p:bg>
+      <p:bgPr>
+        <a:solidFill>
+          <a:srgbClr val="0B0E14"/>
+        </a:solidFill>
+        <a:effectLst/>
+      </p:bgPr>
+    </p:bg>
+    <p:spTree>
+      <p:nvGrpSpPr>
+        <p:cNvPr id="1" name=""/>
+        <p:cNvGrpSpPr/>
+        <p:nvPr/>
+      </p:nvGrpSpPr>
+      <p:grpSpPr/>
+      <p:sp>
+        <p:nvSpPr>
+          <p:cNvPr id="2" name="TextBox 1"/>
+          <p:cNvSpPr txBox="1"/>
+          <p:nvPr/>
+        </p:nvSpPr>
+        <p:spPr>
+          <a:xfrm>
+            <a:off x="640080" y="502920"/>
+            <a:ext cx="10058400" cy="365760"/>
+          </a:xfrm>
+          <a:prstGeom prst="rect">
+            <a:avLst/>
+          </a:prstGeom>
+          <a:noFill/>
+        </p:spPr>
+        <p:txBody>
+          <a:bodyPr wrap="square" anchor="t">
+            <a:spAutoFit/>
+          </a:bodyPr>
+          <a:lstStyle/>
+          <a:p>
+            <a:pPr algn="l">
+              <a:lnSpc>
+                <a:spcPct val="100000"/>
+              </a:lnSpc>
+            </a:pPr>
+            <a:r>
+              <a:rPr sz="1300" b="1">
+                <a:solidFill>
+                  <a:srgbClr val="00FF41"/>
+                </a:solidFill>
+                <a:latin typeface="Courier New"/>
+              </a:rPr>
+              <a:t>TOOLS FOR TODAY</a:t>
+            </a:r>
+          </a:p>
+        </p:txBody>
+      </p:sp>
+      <p:sp>
+        <p:nvSpPr>
+          <p:cNvPr id="3" name="Rectangle 2"/>
+          <p:cNvSpPr/>
+          <p:nvPr/>
+        </p:nvSpPr>
+        <p:spPr>
+          <a:xfrm>
+            <a:off x="640080" y="932688"/>
+            <a:ext cx="822960" cy="73152"/>
+          </a:xfrm>
+          <a:prstGeom prst="rect">
+            <a:avLst/>
+          </a:prstGeom>
+          <a:solidFill>
+            <a:srgbClr val="00FF41"/>
+          </a:solidFill>
+          <a:ln>
+            <a:noFill/>
+          </a:ln>
+          <a:effectLst/>
+        </p:spPr>
+        <p:style>
+          <a:lnRef idx="1">
+            <a:schemeClr val="accent1"/>
+          </a:lnRef>
+          <a:fillRef idx="3">
+            <a:schemeClr val="accent1"/>
+          </a:fillRef>
+          <a:effectRef idx="2">
+            <a:schemeClr val="accent1"/>
+          </a:effectRef>
+          <a:fontRef idx="minor">
+            <a:schemeClr val="lt1"/>
+          </a:fontRef>
+        </p:style>
+        <p:txBody>
+          <a:bodyPr rtlCol="0" anchor="ctr"/>
+          <a:lstStyle/>
+          <a:p>
+            <a:pPr algn="ctr"/>
+          </a:p>
+        </p:txBody>
+      </p:sp>
+      <p:sp>
+        <p:nvSpPr>
+          <p:cNvPr id="4" name="TextBox 3"/>
+          <p:cNvSpPr txBox="1"/>
+          <p:nvPr/>
+        </p:nvSpPr>
+        <p:spPr>
+          <a:xfrm>
+            <a:off x="640080" y="1188720"/>
+            <a:ext cx="10972800" cy="1097280"/>
+          </a:xfrm>
+          <a:prstGeom prst="rect">
+            <a:avLst/>
+          </a:prstGeom>
+          <a:noFill/>
+        </p:spPr>
+        <p:txBody>
+          <a:bodyPr wrap="square" anchor="t">
+            <a:spAutoFit/>
+          </a:bodyPr>
+          <a:lstStyle/>
+          <a:p>
+            <a:pPr algn="l">
+              <a:lnSpc>
+                <a:spcPct val="100000"/>
+              </a:lnSpc>
+            </a:pPr>
+            <a:r>
+              <a:rPr sz="3400" b="1">
+                <a:solidFill>
+                  <a:srgbClr val="F5F7FA"/>
+                </a:solidFill>
+                <a:latin typeface="Arial"/>
+              </a:rPr>
+              <a:t>Record, drive, edit, caption</a:t>
+            </a:r>
+          </a:p>
+        </p:txBody>
+      </p:sp>
+      <p:sp>
+        <p:nvSpPr>
+          <p:cNvPr id="5" name="TextBox 4"/>
+          <p:cNvSpPr txBox="1"/>
+          <p:nvPr/>
+        </p:nvSpPr>
+        <p:spPr>
+          <a:xfrm>
+            <a:off x="658368" y="2286000"/>
+            <a:ext cx="10881360" cy="3657600"/>
+          </a:xfrm>
+          <a:prstGeom prst="rect">
+            <a:avLst/>
+          </a:prstGeom>
+          <a:noFill/>
+        </p:spPr>
+        <p:txBody>
+          <a:bodyPr wrap="square" anchor="t">
+            <a:spAutoFit/>
+          </a:bodyPr>
+          <a:lstStyle/>
+          <a:p>
+            <a:pPr algn="l">
+              <a:lnSpc>
+                <a:spcPct val="112000"/>
+              </a:lnSpc>
+            </a:pPr>
+            <a:r>
+              <a:rPr sz="2000" b="1">
+                <a:solidFill>
+                  <a:srgbClr val="00FF41"/>
+                </a:solidFill>
+                <a:latin typeface="Arial"/>
+              </a:rPr>
+              <a:t>•  </a:t>
+            </a:r>
+            <a:r>
+              <a:rPr sz="2000" b="0">
+                <a:solidFill>
+                  <a:srgbClr val="F5F7FA"/>
+                </a:solidFill>
+                <a:latin typeface="Arial"/>
+              </a:rPr>
+              <a:t>Record: QuickTime (Mac) / Xbox Game Bar (Win) / Loom / OBS - screen + mic together.</a:t>
+            </a:r>
+          </a:p>
+          <a:p>
+            <a:pPr algn="l">
+              <a:lnSpc>
+                <a:spcPct val="112000"/>
+              </a:lnSpc>
+            </a:pPr>
+            <a:r>
+              <a:rPr sz="2000" b="1">
+                <a:solidFill>
+                  <a:srgbClr val="00FF41"/>
+                </a:solidFill>
+                <a:latin typeface="Arial"/>
+              </a:rPr>
+              <a:t>•  </a:t>
+            </a:r>
+            <a:r>
+              <a:rPr sz="2000" b="0">
+                <a:solidFill>
+                  <a:srgbClr val="F5F7FA"/>
+                </a:solidFill>
+                <a:latin typeface="Arial"/>
+              </a:rPr>
+              <a:t>Agent testing: Antigravity, Chrome DevTools MCP, Playwright MCP, or browser-use - an AI drives your live URL.</a:t>
+            </a:r>
+          </a:p>
+          <a:p>
+            <a:pPr algn="l">
+              <a:lnSpc>
+                <a:spcPct val="112000"/>
+              </a:lnSpc>
+            </a:pPr>
+            <a:r>
+              <a:rPr sz="2000" b="1">
+                <a:solidFill>
+                  <a:srgbClr val="00FF41"/>
+                </a:solidFill>
+                <a:latin typeface="Arial"/>
+              </a:rPr>
+              <a:t>•  </a:t>
+            </a:r>
+            <a:r>
+              <a:rPr sz="2000" b="0">
+                <a:solidFill>
+                  <a:srgbClr val="F5F7FA"/>
+                </a:solidFill>
+                <a:latin typeface="Arial"/>
+              </a:rPr>
+              <a:t>Edit + speed up: CapCut, iMovie, or Clipchamp - cut to &lt;=5 min, speed the slow parts.</a:t>
+            </a:r>
+          </a:p>
+          <a:p>
+            <a:pPr algn="l">
+              <a:lnSpc>
+                <a:spcPct val="112000"/>
+              </a:lnSpc>
+            </a:pPr>
+            <a:r>
+              <a:rPr sz="2000" b="1">
+                <a:solidFill>
+                  <a:srgbClr val="00FF41"/>
+                </a:solidFill>
+                <a:latin typeface="Arial"/>
+              </a:rPr>
+              <a:t>•  </a:t>
+            </a:r>
+            <a:r>
+              <a:rPr sz="2000" b="0">
+                <a:solidFill>
+                  <a:srgbClr val="F5F7FA"/>
+                </a:solidFill>
+                <a:latin typeface="Arial"/>
+              </a:rPr>
+              <a:t>Captions: upload to YouTube (unlisted), turn on auto-captions.</a:t>
+            </a:r>
+          </a:p>
+          <a:p>
+            <a:pPr algn="l">
+              <a:lnSpc>
+                <a:spcPct val="112000"/>
+              </a:lnSpc>
+            </a:pPr>
+            <a:r>
+              <a:rPr sz="2000" b="1">
+                <a:solidFill>
+                  <a:srgbClr val="00FF41"/>
+                </a:solidFill>
+                <a:latin typeface="Arial"/>
+              </a:rPr>
+              <a:t>•  </a:t>
+            </a:r>
+            <a:r>
+              <a:rPr sz="2000" b="0">
+                <a:solidFill>
+                  <a:srgbClr val="F5F7FA"/>
+                </a:solidFill>
+                <a:latin typeface="Arial"/>
+              </a:rPr>
+              <a:t>Real UX tools (optional): Maze or Lyssna for prototype tests, Lookback for moderated sessions.</a:t>
+            </a:r>
+          </a:p>
+        </p:txBody>
+      </p:sp>
+      <p:sp>
+        <p:nvSpPr>
+          <p:cNvPr id="6" name="TextBox 5"/>
+          <p:cNvSpPr txBox="1"/>
+          <p:nvPr/>
+        </p:nvSpPr>
+        <p:spPr>
+          <a:xfrm>
+            <a:off x="640080" y="6355080"/>
+            <a:ext cx="10972800" cy="365760"/>
+          </a:xfrm>
+          <a:prstGeom prst="rect">
+            <a:avLst/>
+          </a:prstGeom>
+          <a:noFill/>
+        </p:spPr>
+        <p:txBody>
+          <a:bodyPr wrap="square" anchor="t">
+            <a:spAutoFit/>
+          </a:bodyPr>
+          <a:lstStyle/>
+          <a:p>
+            <a:pPr algn="l">
+              <a:lnSpc>
+                <a:spcPct val="100000"/>
+              </a:lnSpc>
+            </a:pPr>
+            <a:r>
+              <a:rPr sz="1000" b="0">
+                <a:solidFill>
+                  <a:srgbClr val="5A6474"/>
+                </a:solidFill>
+                <a:latin typeface="Courier New"/>
+              </a:rPr>
+              <a:t>Good Code, Good Vibes · TECHIE 1121 · Cornell Tech · Summer 2026</a:t>
+            </a:r>
+          </a:p>
+        </p:txBody>
+      </p:sp>
+    </p:spTree>
+  </p:cSld>
+  <p:clrMapOvr>
+    <a:masterClrMapping/>
+  </p:clrMapOvr>
+</p:sld>
+</file>
+
+<file path=ppt/slides/slide17.xml><?xml version="1.0" encoding="utf-8"?>
+<p:sld xmlns:a="http://schemas.openxmlformats.org/drawingml/2006/main" xmlns:p="http://schemas.openxmlformats.org/presentationml/2006/main" xmlns:r="http://schemas.openxmlformats.org/officeDocument/2006/relationships">
+  <p:cSld>
+    <p:bg>
+      <p:bgPr>
+        <a:solidFill>
+          <a:srgbClr val="0B0E14"/>
+        </a:solidFill>
+        <a:effectLst/>
+      </p:bgPr>
+    </p:bg>
+    <p:spTree>
+      <p:nvGrpSpPr>
+        <p:cNvPr id="1" name=""/>
+        <p:cNvGrpSpPr/>
+        <p:nvPr/>
+      </p:nvGrpSpPr>
+      <p:grpSpPr/>
+      <p:sp>
+        <p:nvSpPr>
+          <p:cNvPr id="2" name="TextBox 1"/>
+          <p:cNvSpPr txBox="1"/>
+          <p:nvPr/>
+        </p:nvSpPr>
+        <p:spPr>
+          <a:xfrm>
+            <a:off x="640080" y="502920"/>
+            <a:ext cx="10058400" cy="365760"/>
+          </a:xfrm>
+          <a:prstGeom prst="rect">
+            <a:avLst/>
+          </a:prstGeom>
+          <a:noFill/>
+        </p:spPr>
+        <p:txBody>
+          <a:bodyPr wrap="square" anchor="t">
+            <a:spAutoFit/>
+          </a:bodyPr>
+          <a:lstStyle/>
+          <a:p>
+            <a:pPr algn="l">
+              <a:lnSpc>
+                <a:spcPct val="100000"/>
+              </a:lnSpc>
+            </a:pPr>
+            <a:r>
+              <a:rPr sz="1300" b="1">
+                <a:solidFill>
+                  <a:srgbClr val="00FF41"/>
+                </a:solidFill>
+                <a:latin typeface="Courier New"/>
+              </a:rPr>
+              <a:t>SCREENSHOT SLOT</a:t>
+            </a:r>
+          </a:p>
+        </p:txBody>
+      </p:sp>
+      <p:sp>
+        <p:nvSpPr>
+          <p:cNvPr id="3" name="Rectangle 2"/>
+          <p:cNvSpPr/>
+          <p:nvPr/>
+        </p:nvSpPr>
+        <p:spPr>
+          <a:xfrm>
+            <a:off x="640080" y="932688"/>
+            <a:ext cx="822960" cy="73152"/>
+          </a:xfrm>
+          <a:prstGeom prst="rect">
+            <a:avLst/>
+          </a:prstGeom>
+          <a:solidFill>
+            <a:srgbClr val="00FF41"/>
+          </a:solidFill>
+          <a:ln>
+            <a:noFill/>
+          </a:ln>
+          <a:effectLst/>
+        </p:spPr>
+        <p:style>
+          <a:lnRef idx="1">
+            <a:schemeClr val="accent1"/>
+          </a:lnRef>
+          <a:fillRef idx="3">
+            <a:schemeClr val="accent1"/>
+          </a:fillRef>
+          <a:effectRef idx="2">
+            <a:schemeClr val="accent1"/>
+          </a:effectRef>
+          <a:fontRef idx="minor">
+            <a:schemeClr val="lt1"/>
+          </a:fontRef>
+        </p:style>
+        <p:txBody>
+          <a:bodyPr rtlCol="0" anchor="ctr"/>
+          <a:lstStyle/>
+          <a:p>
+            <a:pPr algn="ctr"/>
+          </a:p>
+        </p:txBody>
+      </p:sp>
+      <p:sp>
+        <p:nvSpPr>
+          <p:cNvPr id="4" name="TextBox 3"/>
+          <p:cNvSpPr txBox="1"/>
+          <p:nvPr/>
+        </p:nvSpPr>
+        <p:spPr>
+          <a:xfrm>
+            <a:off x="640080" y="1188720"/>
+            <a:ext cx="10972800" cy="914400"/>
+          </a:xfrm>
+          <a:prstGeom prst="rect">
+            <a:avLst/>
+          </a:prstGeom>
+          <a:noFill/>
+        </p:spPr>
+        <p:txBody>
+          <a:bodyPr wrap="square" anchor="t">
+            <a:spAutoFit/>
+          </a:bodyPr>
+          <a:lstStyle/>
+          <a:p>
+            <a:pPr algn="l">
+              <a:lnSpc>
+                <a:spcPct val="100000"/>
+              </a:lnSpc>
+            </a:pPr>
+            <a:r>
+              <a:rPr sz="3000" b="1">
+                <a:solidFill>
+                  <a:srgbClr val="F5F7FA"/>
+                </a:solidFill>
+                <a:latin typeface="Arial"/>
+              </a:rPr>
+              <a:t>Show a real test in action</a:t>
+            </a:r>
+          </a:p>
+        </p:txBody>
+      </p:sp>
+      <p:sp>
+        <p:nvSpPr>
+          <p:cNvPr id="5" name="Rounded Rectangle 4"/>
+          <p:cNvSpPr/>
+          <p:nvPr/>
+        </p:nvSpPr>
+        <p:spPr>
+          <a:xfrm>
+            <a:off x="2194560" y="2331720"/>
+            <a:ext cx="7772400" cy="3566160"/>
+          </a:xfrm>
+          <a:prstGeom prst="roundRect">
+            <a:avLst/>
+          </a:prstGeom>
+          <a:solidFill>
+            <a:srgbClr val="151B26"/>
+          </a:solidFill>
+          <a:ln w="19050">
+            <a:solidFill>
+              <a:srgbClr val="00FF41"/>
+            </a:solidFill>
+            <a:prstDash val="dash"/>
+          </a:ln>
+          <a:effectLst/>
+        </p:spPr>
+        <p:style>
+          <a:lnRef idx="1">
+            <a:schemeClr val="accent1"/>
+          </a:lnRef>
+          <a:fillRef idx="3">
+            <a:schemeClr val="accent1"/>
+          </a:fillRef>
+          <a:effectRef idx="2">
+            <a:schemeClr val="accent1"/>
+          </a:effectRef>
+          <a:fontRef idx="minor">
+            <a:schemeClr val="lt1"/>
+          </a:fontRef>
+        </p:style>
+        <p:txBody>
+          <a:bodyPr rtlCol="0" anchor="ctr"/>
+          <a:lstStyle/>
+          <a:p>
+            <a:pPr algn="ctr"/>
+          </a:p>
+        </p:txBody>
+      </p:sp>
+      <p:sp>
+        <p:nvSpPr>
+          <p:cNvPr id="6" name="TextBox 5"/>
+          <p:cNvSpPr txBox="1"/>
+          <p:nvPr/>
+        </p:nvSpPr>
+        <p:spPr>
+          <a:xfrm>
+            <a:off x="2194560" y="3383280"/>
+            <a:ext cx="7772400" cy="731520"/>
+          </a:xfrm>
+          <a:prstGeom prst="rect">
+            <a:avLst/>
+          </a:prstGeom>
+          <a:noFill/>
+        </p:spPr>
+        <p:txBody>
+          <a:bodyPr wrap="square" anchor="t">
+            <a:spAutoFit/>
+          </a:bodyPr>
+          <a:lstStyle/>
+          <a:p>
+            <a:pPr algn="ctr">
+              <a:lnSpc>
+                <a:spcPct val="100000"/>
+              </a:lnSpc>
+            </a:pPr>
+            <a:r>
+              <a:rPr sz="2200" b="1">
+                <a:solidFill>
+                  <a:srgbClr val="00FF41"/>
+                </a:solidFill>
+                <a:latin typeface="Courier New"/>
+              </a:rPr>
+              <a:t>[ screenshot / clip still goes here ]</a:t>
+            </a:r>
+          </a:p>
+        </p:txBody>
+      </p:sp>
+      <p:sp>
+        <p:nvSpPr>
+          <p:cNvPr id="7" name="TextBox 6"/>
+          <p:cNvSpPr txBox="1"/>
+          <p:nvPr/>
+        </p:nvSpPr>
+        <p:spPr>
+          <a:xfrm>
+            <a:off x="2194560" y="4114800"/>
+            <a:ext cx="7772400" cy="731520"/>
+          </a:xfrm>
+          <a:prstGeom prst="rect">
+            <a:avLst/>
+          </a:prstGeom>
+          <a:noFill/>
+        </p:spPr>
+        <p:txBody>
+          <a:bodyPr wrap="square" anchor="t">
+            <a:spAutoFit/>
+          </a:bodyPr>
+          <a:lstStyle/>
+          <a:p>
+            <a:pPr algn="ctr">
+              <a:lnSpc>
+                <a:spcPct val="100000"/>
+              </a:lnSpc>
+            </a:pPr>
+            <a:r>
+              <a:rPr sz="1400" b="0">
+                <a:solidFill>
+                  <a:srgbClr val="8A94A6"/>
+                </a:solidFill>
+                <a:latin typeface="Arial"/>
+              </a:rPr>
+              <a:t>e.g. a tester mid-task, or your AI agent driving the live site</a:t>
+            </a:r>
+          </a:p>
+        </p:txBody>
+      </p:sp>
+      <p:sp>
+        <p:nvSpPr>
+          <p:cNvPr id="8" name="TextBox 7"/>
           <p:cNvSpPr txBox="1"/>
           <p:nvPr/>
         </p:nvSpPr>
